--- a/examples/gallery/pattern_gallery.pptx
+++ b/examples/gallery/pattern_gallery.pptx
@@ -6250,7 +6250,7 @@
         </p:nvCxnSpPr>
         <p:spPr>
           <a:xfrm>
-            <a:off x="2424988" y="2221992"/>
+            <a:off x="2424988" y="2487168"/>
             <a:ext cx="512064" cy="0"/>
           </a:xfrm>
           <a:prstGeom prst="line">
@@ -6287,7 +6287,7 @@
         </p:nvCxnSpPr>
         <p:spPr>
           <a:xfrm>
-            <a:off x="4703673" y="2221992"/>
+            <a:off x="4703673" y="2487168"/>
             <a:ext cx="512064" cy="0"/>
           </a:xfrm>
           <a:prstGeom prst="line">
@@ -6324,7 +6324,7 @@
         </p:nvCxnSpPr>
         <p:spPr>
           <a:xfrm>
-            <a:off x="6982358" y="2221992"/>
+            <a:off x="6982358" y="2487168"/>
             <a:ext cx="512064" cy="0"/>
           </a:xfrm>
           <a:prstGeom prst="line">
@@ -6361,7 +6361,7 @@
         </p:nvCxnSpPr>
         <p:spPr>
           <a:xfrm>
-            <a:off x="6982358" y="2221992"/>
+            <a:off x="6982358" y="2487168"/>
             <a:ext cx="256032" cy="0"/>
           </a:xfrm>
           <a:prstGeom prst="line">
@@ -6397,7 +6397,7 @@
         </p:nvCxnSpPr>
         <p:spPr>
           <a:xfrm>
-            <a:off x="7238390" y="2221992"/>
+            <a:off x="7238390" y="2487168"/>
             <a:ext cx="0" cy="1243584"/>
           </a:xfrm>
           <a:prstGeom prst="line">
@@ -6433,7 +6433,7 @@
         </p:nvCxnSpPr>
         <p:spPr>
           <a:xfrm>
-            <a:off x="7238390" y="3465576"/>
+            <a:off x="7238390" y="3730752"/>
             <a:ext cx="256032" cy="0"/>
           </a:xfrm>
           <a:prstGeom prst="line">
@@ -6470,7 +6470,7 @@
         </p:nvCxnSpPr>
         <p:spPr>
           <a:xfrm>
-            <a:off x="9261043" y="2221992"/>
+            <a:off x="9261043" y="2487168"/>
             <a:ext cx="512064" cy="0"/>
           </a:xfrm>
           <a:prstGeom prst="line">
@@ -6507,8 +6507,8 @@
         </p:nvCxnSpPr>
         <p:spPr>
           <a:xfrm>
-            <a:off x="8377732" y="3931920"/>
-            <a:ext cx="0" cy="438912"/>
+            <a:off x="8377732" y="4197096"/>
+            <a:ext cx="0" cy="402336"/>
           </a:xfrm>
           <a:prstGeom prst="line">
             <a:avLst/>
@@ -6544,7 +6544,7 @@
         </p:nvCxnSpPr>
         <p:spPr>
           <a:xfrm flipH="1">
-            <a:off x="3820363" y="4370832"/>
+            <a:off x="3820363" y="4599432"/>
             <a:ext cx="4557369" cy="0"/>
           </a:xfrm>
           <a:prstGeom prst="line">
@@ -6581,8 +6581,8 @@
         </p:nvCxnSpPr>
         <p:spPr>
           <a:xfrm flipV="1">
-            <a:off x="3820363" y="2688336"/>
-            <a:ext cx="0" cy="1682496"/>
+            <a:off x="3820363" y="2953512"/>
+            <a:ext cx="0" cy="1645920"/>
           </a:xfrm>
           <a:prstGeom prst="line">
             <a:avLst/>
@@ -6619,7 +6619,7 @@
         </p:nvSpPr>
         <p:spPr>
           <a:xfrm>
-            <a:off x="658368" y="1755648"/>
+            <a:off x="658368" y="2020824"/>
             <a:ext cx="1766620" cy="932688"/>
           </a:xfrm>
           <a:prstGeom prst="rect">
@@ -6665,7 +6665,7 @@
         </p:nvSpPr>
         <p:spPr>
           <a:xfrm>
-            <a:off x="786384" y="1874520"/>
+            <a:off x="786384" y="2139696"/>
             <a:ext cx="1510588" cy="292608"/>
           </a:xfrm>
           <a:prstGeom prst="rect">
@@ -6706,7 +6706,7 @@
         </p:nvSpPr>
         <p:spPr>
           <a:xfrm>
-            <a:off x="795528" y="2212848"/>
+            <a:off x="795528" y="2478024"/>
             <a:ext cx="1492300" cy="310896"/>
           </a:xfrm>
           <a:prstGeom prst="rect">
@@ -6747,7 +6747,7 @@
         </p:nvSpPr>
         <p:spPr>
           <a:xfrm>
-            <a:off x="795528" y="2441448"/>
+            <a:off x="795528" y="2706624"/>
             <a:ext cx="1492300" cy="201168"/>
           </a:xfrm>
           <a:prstGeom prst="rect">
@@ -6788,7 +6788,7 @@
         </p:nvSpPr>
         <p:spPr>
           <a:xfrm>
-            <a:off x="2937052" y="1755648"/>
+            <a:off x="2937052" y="2020824"/>
             <a:ext cx="1766620" cy="932688"/>
           </a:xfrm>
           <a:prstGeom prst="rect">
@@ -6834,7 +6834,7 @@
         </p:nvSpPr>
         <p:spPr>
           <a:xfrm>
-            <a:off x="3065068" y="1874520"/>
+            <a:off x="3065068" y="2139696"/>
             <a:ext cx="1510588" cy="292608"/>
           </a:xfrm>
           <a:prstGeom prst="rect">
@@ -6875,7 +6875,7 @@
         </p:nvSpPr>
         <p:spPr>
           <a:xfrm>
-            <a:off x="3074212" y="2212848"/>
+            <a:off x="3074212" y="2478024"/>
             <a:ext cx="1492300" cy="310896"/>
           </a:xfrm>
           <a:prstGeom prst="rect">
@@ -6916,7 +6916,7 @@
         </p:nvSpPr>
         <p:spPr>
           <a:xfrm>
-            <a:off x="3074212" y="2441448"/>
+            <a:off x="3074212" y="2706624"/>
             <a:ext cx="1492300" cy="201168"/>
           </a:xfrm>
           <a:prstGeom prst="rect">
@@ -6957,7 +6957,176 @@
         </p:nvSpPr>
         <p:spPr>
           <a:xfrm>
-            <a:off x="5215737" y="1755648"/>
+            <a:off x="5215737" y="2020824"/>
+            <a:ext cx="1766620" cy="932688"/>
+          </a:xfrm>
+          <a:prstGeom prst="rect">
+            <a:avLst/>
+          </a:prstGeom>
+          <a:solidFill>
+            <a:srgbClr val="182C43"/>
+          </a:solidFill>
+          <a:ln w="9525">
+            <a:solidFill>
+              <a:srgbClr val="182C43"/>
+            </a:solidFill>
+          </a:ln>
+          <a:effectLst/>
+        </p:spPr>
+        <p:style>
+          <a:lnRef idx="1">
+            <a:schemeClr val="accent1"/>
+          </a:lnRef>
+          <a:fillRef idx="3">
+            <a:schemeClr val="accent1"/>
+          </a:fillRef>
+          <a:effectRef idx="2">
+            <a:schemeClr val="accent1"/>
+          </a:effectRef>
+          <a:fontRef idx="minor">
+            <a:schemeClr val="lt1"/>
+          </a:fontRef>
+        </p:style>
+        <p:txBody>
+          <a:bodyPr rtlCol="0" anchor="ctr"/>
+          <a:lstStyle/>
+          <a:p>
+            <a:pPr algn="ctr"/>
+          </a:p>
+        </p:txBody>
+      </p:sp>
+      <p:sp>
+        <p:nvSpPr>
+          <p:cNvPr id="24" name="TextBox 23"/>
+          <p:cNvSpPr txBox="1"/>
+          <p:nvPr/>
+        </p:nvSpPr>
+        <p:spPr>
+          <a:xfrm>
+            <a:off x="5343753" y="2139696"/>
+            <a:ext cx="1510588" cy="292608"/>
+          </a:xfrm>
+          <a:prstGeom prst="rect">
+            <a:avLst/>
+          </a:prstGeom>
+          <a:noFill/>
+        </p:spPr>
+        <p:txBody>
+          <a:bodyPr wrap="square" anchor="t" lIns="0" rIns="0" tIns="0" bIns="0">
+            <a:spAutoFit/>
+          </a:bodyPr>
+          <a:lstStyle/>
+          <a:p>
+            <a:pPr algn="ctr">
+              <a:lnSpc>
+                <a:spcPct val="130000"/>
+              </a:lnSpc>
+            </a:pPr>
+            <a:r>
+              <a:rPr sz="1400" b="1" lang="ja-JP">
+                <a:solidFill>
+                  <a:srgbClr val="FFFFFC"/>
+                </a:solidFill>
+                <a:latin typeface="Yu Gothic"/>
+                <a:ea typeface="Yu Gothic"/>
+                <a:cs typeface="Yu Gothic"/>
+              </a:rPr>
+              <a:t>内容審査</a:t>
+            </a:r>
+          </a:p>
+        </p:txBody>
+      </p:sp>
+      <p:sp>
+        <p:nvSpPr>
+          <p:cNvPr id="25" name="TextBox 24"/>
+          <p:cNvSpPr txBox="1"/>
+          <p:nvPr/>
+        </p:nvSpPr>
+        <p:spPr>
+          <a:xfrm>
+            <a:off x="5352897" y="2478024"/>
+            <a:ext cx="1492300" cy="310896"/>
+          </a:xfrm>
+          <a:prstGeom prst="rect">
+            <a:avLst/>
+          </a:prstGeom>
+          <a:noFill/>
+        </p:spPr>
+        <p:txBody>
+          <a:bodyPr wrap="square" anchor="t" lIns="0" rIns="0" tIns="0" bIns="0">
+            <a:spAutoFit/>
+          </a:bodyPr>
+          <a:lstStyle/>
+          <a:p>
+            <a:pPr algn="ctr">
+              <a:lnSpc>
+                <a:spcPct val="112000"/>
+              </a:lnSpc>
+            </a:pPr>
+            <a:r>
+              <a:rPr sz="1200" b="0" lang="ja-JP">
+                <a:solidFill>
+                  <a:srgbClr val="DFEBE8"/>
+                </a:solidFill>
+                <a:latin typeface="Yu Gothic"/>
+                <a:ea typeface="Yu Gothic"/>
+                <a:cs typeface="Yu Gothic"/>
+              </a:rPr>
+              <a:t>リスクと効果を評価</a:t>
+            </a:r>
+          </a:p>
+        </p:txBody>
+      </p:sp>
+      <p:sp>
+        <p:nvSpPr>
+          <p:cNvPr id="26" name="TextBox 25"/>
+          <p:cNvSpPr txBox="1"/>
+          <p:nvPr/>
+        </p:nvSpPr>
+        <p:spPr>
+          <a:xfrm>
+            <a:off x="5352897" y="2706624"/>
+            <a:ext cx="1492300" cy="201168"/>
+          </a:xfrm>
+          <a:prstGeom prst="rect">
+            <a:avLst/>
+          </a:prstGeom>
+          <a:noFill/>
+        </p:spPr>
+        <p:txBody>
+          <a:bodyPr wrap="square" anchor="t" lIns="0" rIns="0" tIns="0" bIns="0">
+            <a:spAutoFit/>
+          </a:bodyPr>
+          <a:lstStyle/>
+          <a:p>
+            <a:pPr algn="ctr">
+              <a:lnSpc>
+                <a:spcPct val="130000"/>
+              </a:lnSpc>
+            </a:pPr>
+            <a:r>
+              <a:rPr sz="950" b="1" lang="ja-JP">
+                <a:solidFill>
+                  <a:srgbClr val="FFFFFC"/>
+                </a:solidFill>
+                <a:latin typeface="Yu Gothic"/>
+                <a:ea typeface="Yu Gothic"/>
+                <a:cs typeface="Yu Gothic"/>
+              </a:rPr>
+              <a:t>審査会</a:t>
+            </a:r>
+          </a:p>
+        </p:txBody>
+      </p:sp>
+      <p:sp>
+        <p:nvSpPr>
+          <p:cNvPr id="27" name="Rectangle 26"/>
+          <p:cNvSpPr/>
+          <p:nvPr/>
+        </p:nvSpPr>
+        <p:spPr>
+          <a:xfrm>
+            <a:off x="7494422" y="2020824"/>
             <a:ext cx="1766620" cy="932688"/>
           </a:xfrm>
           <a:prstGeom prst="rect">
@@ -6997,13 +7166,13 @@
       </p:sp>
       <p:sp>
         <p:nvSpPr>
-          <p:cNvPr id="24" name="TextBox 23"/>
-          <p:cNvSpPr txBox="1"/>
-          <p:nvPr/>
-        </p:nvSpPr>
-        <p:spPr>
-          <a:xfrm>
-            <a:off x="5343753" y="1874520"/>
+          <p:cNvPr id="28" name="TextBox 27"/>
+          <p:cNvSpPr txBox="1"/>
+          <p:nvPr/>
+        </p:nvSpPr>
+        <p:spPr>
+          <a:xfrm>
+            <a:off x="7622438" y="2139696"/>
             <a:ext cx="1510588" cy="292608"/>
           </a:xfrm>
           <a:prstGeom prst="rect">
@@ -7031,175 +7200,6 @@
                 <a:ea typeface="Yu Gothic"/>
                 <a:cs typeface="Yu Gothic"/>
               </a:rPr>
-              <a:t>内容審査</a:t>
-            </a:r>
-          </a:p>
-        </p:txBody>
-      </p:sp>
-      <p:sp>
-        <p:nvSpPr>
-          <p:cNvPr id="25" name="TextBox 24"/>
-          <p:cNvSpPr txBox="1"/>
-          <p:nvPr/>
-        </p:nvSpPr>
-        <p:spPr>
-          <a:xfrm>
-            <a:off x="5352897" y="2212848"/>
-            <a:ext cx="1492300" cy="310896"/>
-          </a:xfrm>
-          <a:prstGeom prst="rect">
-            <a:avLst/>
-          </a:prstGeom>
-          <a:noFill/>
-        </p:spPr>
-        <p:txBody>
-          <a:bodyPr wrap="square" anchor="t" lIns="0" rIns="0" tIns="0" bIns="0">
-            <a:spAutoFit/>
-          </a:bodyPr>
-          <a:lstStyle/>
-          <a:p>
-            <a:pPr algn="ctr">
-              <a:lnSpc>
-                <a:spcPct val="112000"/>
-              </a:lnSpc>
-            </a:pPr>
-            <a:r>
-              <a:rPr sz="1200" b="0" lang="ja-JP">
-                <a:solidFill>
-                  <a:srgbClr val="202729"/>
-                </a:solidFill>
-                <a:latin typeface="Yu Gothic"/>
-                <a:ea typeface="Yu Gothic"/>
-                <a:cs typeface="Yu Gothic"/>
-              </a:rPr>
-              <a:t>リスクと効果を評価</a:t>
-            </a:r>
-          </a:p>
-        </p:txBody>
-      </p:sp>
-      <p:sp>
-        <p:nvSpPr>
-          <p:cNvPr id="26" name="TextBox 25"/>
-          <p:cNvSpPr txBox="1"/>
-          <p:nvPr/>
-        </p:nvSpPr>
-        <p:spPr>
-          <a:xfrm>
-            <a:off x="5352897" y="2441448"/>
-            <a:ext cx="1492300" cy="201168"/>
-          </a:xfrm>
-          <a:prstGeom prst="rect">
-            <a:avLst/>
-          </a:prstGeom>
-          <a:noFill/>
-        </p:spPr>
-        <p:txBody>
-          <a:bodyPr wrap="square" anchor="t" lIns="0" rIns="0" tIns="0" bIns="0">
-            <a:spAutoFit/>
-          </a:bodyPr>
-          <a:lstStyle/>
-          <a:p>
-            <a:pPr algn="ctr">
-              <a:lnSpc>
-                <a:spcPct val="130000"/>
-              </a:lnSpc>
-            </a:pPr>
-            <a:r>
-              <a:rPr sz="950" b="1" lang="ja-JP">
-                <a:solidFill>
-                  <a:srgbClr val="0D7870"/>
-                </a:solidFill>
-                <a:latin typeface="Yu Gothic"/>
-                <a:ea typeface="Yu Gothic"/>
-                <a:cs typeface="Yu Gothic"/>
-              </a:rPr>
-              <a:t>審査会</a:t>
-            </a:r>
-          </a:p>
-        </p:txBody>
-      </p:sp>
-      <p:sp>
-        <p:nvSpPr>
-          <p:cNvPr id="27" name="Rectangle 26"/>
-          <p:cNvSpPr/>
-          <p:nvPr/>
-        </p:nvSpPr>
-        <p:spPr>
-          <a:xfrm>
-            <a:off x="7494422" y="1755648"/>
-            <a:ext cx="1766620" cy="932688"/>
-          </a:xfrm>
-          <a:prstGeom prst="rect">
-            <a:avLst/>
-          </a:prstGeom>
-          <a:solidFill>
-            <a:srgbClr val="FFFFFC"/>
-          </a:solidFill>
-          <a:ln w="9525">
-            <a:solidFill>
-              <a:srgbClr val="0D7870"/>
-            </a:solidFill>
-          </a:ln>
-          <a:effectLst/>
-        </p:spPr>
-        <p:style>
-          <a:lnRef idx="1">
-            <a:schemeClr val="accent1"/>
-          </a:lnRef>
-          <a:fillRef idx="3">
-            <a:schemeClr val="accent1"/>
-          </a:fillRef>
-          <a:effectRef idx="2">
-            <a:schemeClr val="accent1"/>
-          </a:effectRef>
-          <a:fontRef idx="minor">
-            <a:schemeClr val="lt1"/>
-          </a:fontRef>
-        </p:style>
-        <p:txBody>
-          <a:bodyPr rtlCol="0" anchor="ctr"/>
-          <a:lstStyle/>
-          <a:p>
-            <a:pPr algn="ctr"/>
-          </a:p>
-        </p:txBody>
-      </p:sp>
-      <p:sp>
-        <p:nvSpPr>
-          <p:cNvPr id="28" name="TextBox 27"/>
-          <p:cNvSpPr txBox="1"/>
-          <p:nvPr/>
-        </p:nvSpPr>
-        <p:spPr>
-          <a:xfrm>
-            <a:off x="7622438" y="1874520"/>
-            <a:ext cx="1510588" cy="292608"/>
-          </a:xfrm>
-          <a:prstGeom prst="rect">
-            <a:avLst/>
-          </a:prstGeom>
-          <a:noFill/>
-        </p:spPr>
-        <p:txBody>
-          <a:bodyPr wrap="square" anchor="t" lIns="0" rIns="0" tIns="0" bIns="0">
-            <a:spAutoFit/>
-          </a:bodyPr>
-          <a:lstStyle/>
-          <a:p>
-            <a:pPr algn="ctr">
-              <a:lnSpc>
-                <a:spcPct val="130000"/>
-              </a:lnSpc>
-            </a:pPr>
-            <a:r>
-              <a:rPr sz="1400" b="1" lang="ja-JP">
-                <a:solidFill>
-                  <a:srgbClr val="182C43"/>
-                </a:solidFill>
-                <a:latin typeface="Yu Gothic"/>
-                <a:ea typeface="Yu Gothic"/>
-                <a:cs typeface="Yu Gothic"/>
-              </a:rPr>
               <a:t>承認</a:t>
             </a:r>
           </a:p>
@@ -7213,7 +7213,7 @@
         </p:nvSpPr>
         <p:spPr>
           <a:xfrm>
-            <a:off x="7631582" y="2212848"/>
+            <a:off x="7631582" y="2478024"/>
             <a:ext cx="1492300" cy="457200"/>
           </a:xfrm>
           <a:prstGeom prst="rect">
@@ -7254,7 +7254,7 @@
         </p:nvSpPr>
         <p:spPr>
           <a:xfrm>
-            <a:off x="7494422" y="2999232"/>
+            <a:off x="7494422" y="3264408"/>
             <a:ext cx="1766620" cy="932688"/>
           </a:xfrm>
           <a:prstGeom prst="rect">
@@ -7300,7 +7300,7 @@
         </p:nvSpPr>
         <p:spPr>
           <a:xfrm>
-            <a:off x="7622438" y="3118104"/>
+            <a:off x="7622438" y="3383280"/>
             <a:ext cx="1510588" cy="292608"/>
           </a:xfrm>
           <a:prstGeom prst="rect">
@@ -7341,7 +7341,7 @@
         </p:nvSpPr>
         <p:spPr>
           <a:xfrm>
-            <a:off x="7631582" y="3456432"/>
+            <a:off x="7631582" y="3721608"/>
             <a:ext cx="1492300" cy="310896"/>
           </a:xfrm>
           <a:prstGeom prst="rect">
@@ -7382,7 +7382,7 @@
         </p:nvSpPr>
         <p:spPr>
           <a:xfrm>
-            <a:off x="7631582" y="3685032"/>
+            <a:off x="7631582" y="3950208"/>
             <a:ext cx="1492300" cy="201168"/>
           </a:xfrm>
           <a:prstGeom prst="rect">
@@ -7423,7 +7423,7 @@
         </p:nvSpPr>
         <p:spPr>
           <a:xfrm>
-            <a:off x="9773107" y="1755648"/>
+            <a:off x="9773107" y="2020824"/>
             <a:ext cx="1766620" cy="932688"/>
           </a:xfrm>
           <a:prstGeom prst="rect">
@@ -7469,7 +7469,7 @@
         </p:nvSpPr>
         <p:spPr>
           <a:xfrm>
-            <a:off x="9901123" y="1874520"/>
+            <a:off x="9901123" y="2139696"/>
             <a:ext cx="1510588" cy="292608"/>
           </a:xfrm>
           <a:prstGeom prst="rect">
@@ -7510,7 +7510,7 @@
         </p:nvSpPr>
         <p:spPr>
           <a:xfrm>
-            <a:off x="9910267" y="2212848"/>
+            <a:off x="9910267" y="2478024"/>
             <a:ext cx="1492300" cy="310896"/>
           </a:xfrm>
           <a:prstGeom prst="rect">
@@ -7551,7 +7551,7 @@
         </p:nvSpPr>
         <p:spPr>
           <a:xfrm>
-            <a:off x="9910267" y="2441448"/>
+            <a:off x="9910267" y="2706624"/>
             <a:ext cx="1492300" cy="201168"/>
           </a:xfrm>
           <a:prstGeom prst="rect">
@@ -7592,7 +7592,7 @@
         </p:nvSpPr>
         <p:spPr>
           <a:xfrm>
-            <a:off x="7079513" y="2144331"/>
+            <a:off x="7079513" y="2409507"/>
             <a:ext cx="317754" cy="155321"/>
           </a:xfrm>
           <a:prstGeom prst="rect">
@@ -7635,7 +7635,7 @@
         </p:nvSpPr>
         <p:spPr>
           <a:xfrm>
-            <a:off x="7022934" y="3387915"/>
+            <a:off x="7022934" y="3653091"/>
             <a:ext cx="430911" cy="155321"/>
           </a:xfrm>
           <a:prstGeom prst="rect">
@@ -7678,7 +7678,7 @@
         </p:nvSpPr>
         <p:spPr>
           <a:xfrm>
-            <a:off x="5883592" y="4293171"/>
+            <a:off x="5883592" y="4521771"/>
             <a:ext cx="430911" cy="155321"/>
           </a:xfrm>
           <a:prstGeom prst="rect">
@@ -18015,13 +18015,13 @@
         </p:nvCxnSpPr>
         <p:spPr>
           <a:xfrm>
-            <a:off x="3267379" y="2286000"/>
-            <a:ext cx="0" cy="155448"/>
+            <a:off x="3267379" y="2441448"/>
+            <a:ext cx="6648527" cy="0"/>
           </a:xfrm>
           <a:prstGeom prst="line">
             <a:avLst/>
           </a:prstGeom>
-          <a:ln w="15875">
+          <a:ln w="13970">
             <a:solidFill>
               <a:srgbClr val="6C7372"/>
             </a:solidFill>
@@ -18051,13 +18051,13 @@
         </p:nvCxnSpPr>
         <p:spPr>
           <a:xfrm>
-            <a:off x="3267379" y="2441448"/>
-            <a:ext cx="2828468" cy="0"/>
+            <a:off x="3267379" y="2286000"/>
+            <a:ext cx="0" cy="155448"/>
           </a:xfrm>
           <a:prstGeom prst="line">
             <a:avLst/>
           </a:prstGeom>
-          <a:ln w="15875">
+          <a:ln w="13970">
             <a:solidFill>
               <a:srgbClr val="6C7372"/>
             </a:solidFill>
@@ -18087,17 +18087,16 @@
         </p:nvCxnSpPr>
         <p:spPr>
           <a:xfrm>
-            <a:off x="6095847" y="2441448"/>
+            <a:off x="8924315" y="2286000"/>
             <a:ext cx="0" cy="155448"/>
           </a:xfrm>
           <a:prstGeom prst="line">
             <a:avLst/>
           </a:prstGeom>
-          <a:ln w="15875">
+          <a:ln w="13970">
             <a:solidFill>
               <a:srgbClr val="6C7372"/>
             </a:solidFill>
-            <a:tailEnd type="triangle" w="med" len="med"/>
           </a:ln>
           <a:effectLst/>
         </p:spPr>
@@ -18124,16 +18123,17 @@
         </p:nvCxnSpPr>
         <p:spPr>
           <a:xfrm>
-            <a:off x="8924315" y="2286000"/>
+            <a:off x="6095847" y="2441448"/>
             <a:ext cx="0" cy="155448"/>
           </a:xfrm>
           <a:prstGeom prst="line">
             <a:avLst/>
           </a:prstGeom>
-          <a:ln w="15875">
+          <a:ln w="13970">
             <a:solidFill>
               <a:srgbClr val="6C7372"/>
             </a:solidFill>
+            <a:tailEnd type="triangle" w="med" len="med"/>
           </a:ln>
           <a:effectLst/>
         </p:spPr>
@@ -18159,17 +18159,18 @@
           <p:nvPr/>
         </p:nvCxnSpPr>
         <p:spPr>
-          <a:xfrm flipH="1">
-            <a:off x="6095847" y="2441448"/>
-            <a:ext cx="2828468" cy="0"/>
+          <a:xfrm>
+            <a:off x="9915906" y="2441448"/>
+            <a:ext cx="0" cy="155448"/>
           </a:xfrm>
           <a:prstGeom prst="line">
             <a:avLst/>
           </a:prstGeom>
-          <a:ln w="15875">
+          <a:ln w="13970">
             <a:solidFill>
               <a:srgbClr val="6C7372"/>
             </a:solidFill>
+            <a:tailEnd type="triangle" w="med" len="med"/>
           </a:ln>
           <a:effectLst/>
         </p:spPr>
@@ -18196,17 +18197,16 @@
         </p:nvCxnSpPr>
         <p:spPr>
           <a:xfrm>
-            <a:off x="6095847" y="2441448"/>
-            <a:ext cx="0" cy="155448"/>
+            <a:off x="2324557" y="3520439"/>
+            <a:ext cx="7591349" cy="0"/>
           </a:xfrm>
           <a:prstGeom prst="line">
             <a:avLst/>
           </a:prstGeom>
-          <a:ln w="15875">
+          <a:ln w="13970">
             <a:solidFill>
               <a:srgbClr val="6C7372"/>
             </a:solidFill>
-            <a:tailEnd type="triangle" w="med" len="med"/>
           </a:ln>
           <a:effectLst/>
         </p:spPr>
@@ -18233,13 +18233,13 @@
         </p:nvCxnSpPr>
         <p:spPr>
           <a:xfrm>
-            <a:off x="8924315" y="2286000"/>
+            <a:off x="6095847" y="3364991"/>
             <a:ext cx="0" cy="155448"/>
           </a:xfrm>
           <a:prstGeom prst="line">
             <a:avLst/>
           </a:prstGeom>
-          <a:ln w="15875">
+          <a:ln w="13970">
             <a:solidFill>
               <a:srgbClr val="6C7372"/>
             </a:solidFill>
@@ -18269,13 +18269,13 @@
         </p:nvCxnSpPr>
         <p:spPr>
           <a:xfrm>
-            <a:off x="8924315" y="2441448"/>
-            <a:ext cx="991591" cy="0"/>
+            <a:off x="9915906" y="3364991"/>
+            <a:ext cx="0" cy="155448"/>
           </a:xfrm>
           <a:prstGeom prst="line">
             <a:avLst/>
           </a:prstGeom>
-          <a:ln w="15875">
+          <a:ln w="13970">
             <a:solidFill>
               <a:srgbClr val="6C7372"/>
             </a:solidFill>
@@ -18305,13 +18305,13 @@
         </p:nvCxnSpPr>
         <p:spPr>
           <a:xfrm>
-            <a:off x="9915906" y="2441448"/>
+            <a:off x="2324557" y="3520439"/>
             <a:ext cx="0" cy="155448"/>
           </a:xfrm>
           <a:prstGeom prst="line">
             <a:avLst/>
           </a:prstGeom>
-          <a:ln w="15875">
+          <a:ln w="13970">
             <a:solidFill>
               <a:srgbClr val="6C7372"/>
             </a:solidFill>
@@ -18342,16 +18342,17 @@
         </p:nvCxnSpPr>
         <p:spPr>
           <a:xfrm>
-            <a:off x="6095847" y="3364991"/>
+            <a:off x="6095847" y="3520439"/>
             <a:ext cx="0" cy="155448"/>
           </a:xfrm>
           <a:prstGeom prst="line">
             <a:avLst/>
           </a:prstGeom>
-          <a:ln w="15875">
+          <a:ln w="13970">
             <a:solidFill>
               <a:srgbClr val="6C7372"/>
             </a:solidFill>
+            <a:tailEnd type="triangle" w="med" len="med"/>
           </a:ln>
           <a:effectLst/>
         </p:spPr>
@@ -18377,17 +18378,18 @@
           <p:nvPr/>
         </p:nvCxnSpPr>
         <p:spPr>
-          <a:xfrm flipH="1">
-            <a:off x="2324557" y="3520439"/>
-            <a:ext cx="3771290" cy="0"/>
+          <a:xfrm>
+            <a:off x="9867138" y="3520439"/>
+            <a:ext cx="0" cy="155448"/>
           </a:xfrm>
           <a:prstGeom prst="line">
             <a:avLst/>
           </a:prstGeom>
-          <a:ln w="15875">
+          <a:ln w="13970">
             <a:solidFill>
               <a:srgbClr val="6C7372"/>
             </a:solidFill>
+            <a:tailEnd type="triangle" w="med" len="med"/>
           </a:ln>
           <a:effectLst/>
         </p:spPr>
@@ -18414,17 +18416,16 @@
         </p:nvCxnSpPr>
         <p:spPr>
           <a:xfrm>
-            <a:off x="2324557" y="3520439"/>
-            <a:ext cx="0" cy="155448"/>
+            <a:off x="3207943" y="4983479"/>
+            <a:ext cx="6659195" cy="0"/>
           </a:xfrm>
           <a:prstGeom prst="line">
             <a:avLst/>
           </a:prstGeom>
-          <a:ln w="15875">
+          <a:ln w="13970">
             <a:solidFill>
               <a:srgbClr val="6C7372"/>
             </a:solidFill>
-            <a:tailEnd type="triangle" w="med" len="med"/>
           </a:ln>
           <a:effectLst/>
         </p:spPr>
@@ -18451,13 +18452,13 @@
         </p:nvCxnSpPr>
         <p:spPr>
           <a:xfrm>
-            <a:off x="6095847" y="3364991"/>
+            <a:off x="6095847" y="4828031"/>
             <a:ext cx="0" cy="155448"/>
           </a:xfrm>
           <a:prstGeom prst="line">
             <a:avLst/>
           </a:prstGeom>
-          <a:ln w="15875">
+          <a:ln w="13970">
             <a:solidFill>
               <a:srgbClr val="6C7372"/>
             </a:solidFill>
@@ -18487,13 +18488,13 @@
         </p:nvCxnSpPr>
         <p:spPr>
           <a:xfrm>
-            <a:off x="6095847" y="3520439"/>
-            <a:ext cx="0" cy="0"/>
+            <a:off x="9867138" y="4828031"/>
+            <a:ext cx="0" cy="155448"/>
           </a:xfrm>
           <a:prstGeom prst="line">
             <a:avLst/>
           </a:prstGeom>
-          <a:ln w="15875">
+          <a:ln w="13970">
             <a:solidFill>
               <a:srgbClr val="6C7372"/>
             </a:solidFill>
@@ -18523,13 +18524,13 @@
         </p:nvCxnSpPr>
         <p:spPr>
           <a:xfrm>
-            <a:off x="6095847" y="3520439"/>
+            <a:off x="3207943" y="4983479"/>
             <a:ext cx="0" cy="155448"/>
           </a:xfrm>
           <a:prstGeom prst="line">
             <a:avLst/>
           </a:prstGeom>
-          <a:ln w="15875">
+          <a:ln w="13970">
             <a:solidFill>
               <a:srgbClr val="6C7372"/>
             </a:solidFill>
@@ -18552,445 +18553,9 @@
           </a:fontRef>
         </p:style>
       </p:cxnSp>
-      <p:cxnSp>
-        <p:nvCxnSpPr>
-          <p:cNvPr id="20" name="Connector 19"/>
-          <p:cNvCxnSpPr/>
-          <p:nvPr/>
-        </p:nvCxnSpPr>
-        <p:spPr>
-          <a:xfrm>
-            <a:off x="6095847" y="3364991"/>
-            <a:ext cx="0" cy="155448"/>
-          </a:xfrm>
-          <a:prstGeom prst="line">
-            <a:avLst/>
-          </a:prstGeom>
-          <a:ln w="15875">
-            <a:solidFill>
-              <a:srgbClr val="6C7372"/>
-            </a:solidFill>
-          </a:ln>
-          <a:effectLst/>
-        </p:spPr>
-        <p:style>
-          <a:lnRef idx="2">
-            <a:schemeClr val="accent1"/>
-          </a:lnRef>
-          <a:fillRef idx="0">
-            <a:schemeClr val="accent1"/>
-          </a:fillRef>
-          <a:effectRef idx="1">
-            <a:schemeClr val="accent1"/>
-          </a:effectRef>
-          <a:fontRef idx="minor">
-            <a:schemeClr val="tx1"/>
-          </a:fontRef>
-        </p:style>
-      </p:cxnSp>
-      <p:cxnSp>
-        <p:nvCxnSpPr>
-          <p:cNvPr id="21" name="Connector 20"/>
-          <p:cNvCxnSpPr/>
-          <p:nvPr/>
-        </p:nvCxnSpPr>
-        <p:spPr>
-          <a:xfrm>
-            <a:off x="6095847" y="3520439"/>
-            <a:ext cx="3771291" cy="0"/>
-          </a:xfrm>
-          <a:prstGeom prst="line">
-            <a:avLst/>
-          </a:prstGeom>
-          <a:ln w="15875">
-            <a:solidFill>
-              <a:srgbClr val="6C7372"/>
-            </a:solidFill>
-          </a:ln>
-          <a:effectLst/>
-        </p:spPr>
-        <p:style>
-          <a:lnRef idx="2">
-            <a:schemeClr val="accent1"/>
-          </a:lnRef>
-          <a:fillRef idx="0">
-            <a:schemeClr val="accent1"/>
-          </a:fillRef>
-          <a:effectRef idx="1">
-            <a:schemeClr val="accent1"/>
-          </a:effectRef>
-          <a:fontRef idx="minor">
-            <a:schemeClr val="tx1"/>
-          </a:fontRef>
-        </p:style>
-      </p:cxnSp>
-      <p:cxnSp>
-        <p:nvCxnSpPr>
-          <p:cNvPr id="22" name="Connector 21"/>
-          <p:cNvCxnSpPr/>
-          <p:nvPr/>
-        </p:nvCxnSpPr>
-        <p:spPr>
-          <a:xfrm>
-            <a:off x="9867138" y="3520439"/>
-            <a:ext cx="0" cy="155448"/>
-          </a:xfrm>
-          <a:prstGeom prst="line">
-            <a:avLst/>
-          </a:prstGeom>
-          <a:ln w="15875">
-            <a:solidFill>
-              <a:srgbClr val="6C7372"/>
-            </a:solidFill>
-            <a:tailEnd type="triangle" w="med" len="med"/>
-          </a:ln>
-          <a:effectLst/>
-        </p:spPr>
-        <p:style>
-          <a:lnRef idx="2">
-            <a:schemeClr val="accent1"/>
-          </a:lnRef>
-          <a:fillRef idx="0">
-            <a:schemeClr val="accent1"/>
-          </a:fillRef>
-          <a:effectRef idx="1">
-            <a:schemeClr val="accent1"/>
-          </a:effectRef>
-          <a:fontRef idx="minor">
-            <a:schemeClr val="tx1"/>
-          </a:fontRef>
-        </p:style>
-      </p:cxnSp>
-      <p:cxnSp>
-        <p:nvCxnSpPr>
-          <p:cNvPr id="23" name="Connector 22"/>
-          <p:cNvCxnSpPr/>
-          <p:nvPr/>
-        </p:nvCxnSpPr>
-        <p:spPr>
-          <a:xfrm>
-            <a:off x="9915906" y="3364991"/>
-            <a:ext cx="0" cy="155448"/>
-          </a:xfrm>
-          <a:prstGeom prst="line">
-            <a:avLst/>
-          </a:prstGeom>
-          <a:ln w="15875">
-            <a:solidFill>
-              <a:srgbClr val="6C7372"/>
-            </a:solidFill>
-          </a:ln>
-          <a:effectLst/>
-        </p:spPr>
-        <p:style>
-          <a:lnRef idx="2">
-            <a:schemeClr val="accent1"/>
-          </a:lnRef>
-          <a:fillRef idx="0">
-            <a:schemeClr val="accent1"/>
-          </a:fillRef>
-          <a:effectRef idx="1">
-            <a:schemeClr val="accent1"/>
-          </a:effectRef>
-          <a:fontRef idx="minor">
-            <a:schemeClr val="tx1"/>
-          </a:fontRef>
-        </p:style>
-      </p:cxnSp>
-      <p:cxnSp>
-        <p:nvCxnSpPr>
-          <p:cNvPr id="24" name="Connector 23"/>
-          <p:cNvCxnSpPr/>
-          <p:nvPr/>
-        </p:nvCxnSpPr>
-        <p:spPr>
-          <a:xfrm flipH="1">
-            <a:off x="6095847" y="3520439"/>
-            <a:ext cx="3820059" cy="0"/>
-          </a:xfrm>
-          <a:prstGeom prst="line">
-            <a:avLst/>
-          </a:prstGeom>
-          <a:ln w="15875">
-            <a:solidFill>
-              <a:srgbClr val="6C7372"/>
-            </a:solidFill>
-          </a:ln>
-          <a:effectLst/>
-        </p:spPr>
-        <p:style>
-          <a:lnRef idx="2">
-            <a:schemeClr val="accent1"/>
-          </a:lnRef>
-          <a:fillRef idx="0">
-            <a:schemeClr val="accent1"/>
-          </a:fillRef>
-          <a:effectRef idx="1">
-            <a:schemeClr val="accent1"/>
-          </a:effectRef>
-          <a:fontRef idx="minor">
-            <a:schemeClr val="tx1"/>
-          </a:fontRef>
-        </p:style>
-      </p:cxnSp>
-      <p:cxnSp>
-        <p:nvCxnSpPr>
-          <p:cNvPr id="25" name="Connector 24"/>
-          <p:cNvCxnSpPr/>
-          <p:nvPr/>
-        </p:nvCxnSpPr>
-        <p:spPr>
-          <a:xfrm>
-            <a:off x="6095847" y="3520439"/>
-            <a:ext cx="0" cy="155448"/>
-          </a:xfrm>
-          <a:prstGeom prst="line">
-            <a:avLst/>
-          </a:prstGeom>
-          <a:ln w="15875">
-            <a:solidFill>
-              <a:srgbClr val="6C7372"/>
-            </a:solidFill>
-            <a:tailEnd type="triangle" w="med" len="med"/>
-          </a:ln>
-          <a:effectLst/>
-        </p:spPr>
-        <p:style>
-          <a:lnRef idx="2">
-            <a:schemeClr val="accent1"/>
-          </a:lnRef>
-          <a:fillRef idx="0">
-            <a:schemeClr val="accent1"/>
-          </a:fillRef>
-          <a:effectRef idx="1">
-            <a:schemeClr val="accent1"/>
-          </a:effectRef>
-          <a:fontRef idx="minor">
-            <a:schemeClr val="tx1"/>
-          </a:fontRef>
-        </p:style>
-      </p:cxnSp>
-      <p:cxnSp>
-        <p:nvCxnSpPr>
-          <p:cNvPr id="26" name="Connector 25"/>
-          <p:cNvCxnSpPr/>
-          <p:nvPr/>
-        </p:nvCxnSpPr>
-        <p:spPr>
-          <a:xfrm>
-            <a:off x="6095847" y="4828031"/>
-            <a:ext cx="0" cy="155448"/>
-          </a:xfrm>
-          <a:prstGeom prst="line">
-            <a:avLst/>
-          </a:prstGeom>
-          <a:ln w="15875">
-            <a:solidFill>
-              <a:srgbClr val="6C7372"/>
-            </a:solidFill>
-          </a:ln>
-          <a:effectLst/>
-        </p:spPr>
-        <p:style>
-          <a:lnRef idx="2">
-            <a:schemeClr val="accent1"/>
-          </a:lnRef>
-          <a:fillRef idx="0">
-            <a:schemeClr val="accent1"/>
-          </a:fillRef>
-          <a:effectRef idx="1">
-            <a:schemeClr val="accent1"/>
-          </a:effectRef>
-          <a:fontRef idx="minor">
-            <a:schemeClr val="tx1"/>
-          </a:fontRef>
-        </p:style>
-      </p:cxnSp>
-      <p:cxnSp>
-        <p:nvCxnSpPr>
-          <p:cNvPr id="27" name="Connector 26"/>
-          <p:cNvCxnSpPr/>
-          <p:nvPr/>
-        </p:nvCxnSpPr>
-        <p:spPr>
-          <a:xfrm flipH="1">
-            <a:off x="3207943" y="4983479"/>
-            <a:ext cx="2887904" cy="0"/>
-          </a:xfrm>
-          <a:prstGeom prst="line">
-            <a:avLst/>
-          </a:prstGeom>
-          <a:ln w="15875">
-            <a:solidFill>
-              <a:srgbClr val="6C7372"/>
-            </a:solidFill>
-          </a:ln>
-          <a:effectLst/>
-        </p:spPr>
-        <p:style>
-          <a:lnRef idx="2">
-            <a:schemeClr val="accent1"/>
-          </a:lnRef>
-          <a:fillRef idx="0">
-            <a:schemeClr val="accent1"/>
-          </a:fillRef>
-          <a:effectRef idx="1">
-            <a:schemeClr val="accent1"/>
-          </a:effectRef>
-          <a:fontRef idx="minor">
-            <a:schemeClr val="tx1"/>
-          </a:fontRef>
-        </p:style>
-      </p:cxnSp>
-      <p:cxnSp>
-        <p:nvCxnSpPr>
-          <p:cNvPr id="28" name="Connector 27"/>
-          <p:cNvCxnSpPr/>
-          <p:nvPr/>
-        </p:nvCxnSpPr>
-        <p:spPr>
-          <a:xfrm>
-            <a:off x="3207943" y="4983479"/>
-            <a:ext cx="0" cy="155448"/>
-          </a:xfrm>
-          <a:prstGeom prst="line">
-            <a:avLst/>
-          </a:prstGeom>
-          <a:ln w="15875">
-            <a:solidFill>
-              <a:srgbClr val="6C7372"/>
-            </a:solidFill>
-            <a:tailEnd type="triangle" w="med" len="med"/>
-          </a:ln>
-          <a:effectLst/>
-        </p:spPr>
-        <p:style>
-          <a:lnRef idx="2">
-            <a:schemeClr val="accent1"/>
-          </a:lnRef>
-          <a:fillRef idx="0">
-            <a:schemeClr val="accent1"/>
-          </a:fillRef>
-          <a:effectRef idx="1">
-            <a:schemeClr val="accent1"/>
-          </a:effectRef>
-          <a:fontRef idx="minor">
-            <a:schemeClr val="tx1"/>
-          </a:fontRef>
-        </p:style>
-      </p:cxnSp>
-      <p:cxnSp>
-        <p:nvCxnSpPr>
-          <p:cNvPr id="29" name="Connector 28"/>
-          <p:cNvCxnSpPr/>
-          <p:nvPr/>
-        </p:nvCxnSpPr>
-        <p:spPr>
-          <a:xfrm>
-            <a:off x="9867138" y="4828031"/>
-            <a:ext cx="0" cy="155448"/>
-          </a:xfrm>
-          <a:prstGeom prst="line">
-            <a:avLst/>
-          </a:prstGeom>
-          <a:ln w="15875">
-            <a:solidFill>
-              <a:srgbClr val="6C7372"/>
-            </a:solidFill>
-          </a:ln>
-          <a:effectLst/>
-        </p:spPr>
-        <p:style>
-          <a:lnRef idx="2">
-            <a:schemeClr val="accent1"/>
-          </a:lnRef>
-          <a:fillRef idx="0">
-            <a:schemeClr val="accent1"/>
-          </a:fillRef>
-          <a:effectRef idx="1">
-            <a:schemeClr val="accent1"/>
-          </a:effectRef>
-          <a:fontRef idx="minor">
-            <a:schemeClr val="tx1"/>
-          </a:fontRef>
-        </p:style>
-      </p:cxnSp>
-      <p:cxnSp>
-        <p:nvCxnSpPr>
-          <p:cNvPr id="30" name="Connector 29"/>
-          <p:cNvCxnSpPr/>
-          <p:nvPr/>
-        </p:nvCxnSpPr>
-        <p:spPr>
-          <a:xfrm flipH="1">
-            <a:off x="3207943" y="4983479"/>
-            <a:ext cx="6659195" cy="0"/>
-          </a:xfrm>
-          <a:prstGeom prst="line">
-            <a:avLst/>
-          </a:prstGeom>
-          <a:ln w="15875">
-            <a:solidFill>
-              <a:srgbClr val="6C7372"/>
-            </a:solidFill>
-          </a:ln>
-          <a:effectLst/>
-        </p:spPr>
-        <p:style>
-          <a:lnRef idx="2">
-            <a:schemeClr val="accent1"/>
-          </a:lnRef>
-          <a:fillRef idx="0">
-            <a:schemeClr val="accent1"/>
-          </a:fillRef>
-          <a:effectRef idx="1">
-            <a:schemeClr val="accent1"/>
-          </a:effectRef>
-          <a:fontRef idx="minor">
-            <a:schemeClr val="tx1"/>
-          </a:fontRef>
-        </p:style>
-      </p:cxnSp>
-      <p:cxnSp>
-        <p:nvCxnSpPr>
-          <p:cNvPr id="31" name="Connector 30"/>
-          <p:cNvCxnSpPr/>
-          <p:nvPr/>
-        </p:nvCxnSpPr>
-        <p:spPr>
-          <a:xfrm>
-            <a:off x="3207943" y="4983479"/>
-            <a:ext cx="0" cy="155448"/>
-          </a:xfrm>
-          <a:prstGeom prst="line">
-            <a:avLst/>
-          </a:prstGeom>
-          <a:ln w="15875">
-            <a:solidFill>
-              <a:srgbClr val="6C7372"/>
-            </a:solidFill>
-            <a:tailEnd type="triangle" w="med" len="med"/>
-          </a:ln>
-          <a:effectLst/>
-        </p:spPr>
-        <p:style>
-          <a:lnRef idx="2">
-            <a:schemeClr val="accent1"/>
-          </a:lnRef>
-          <a:fillRef idx="0">
-            <a:schemeClr val="accent1"/>
-          </a:fillRef>
-          <a:effectRef idx="1">
-            <a:schemeClr val="accent1"/>
-          </a:effectRef>
-          <a:fontRef idx="minor">
-            <a:schemeClr val="tx1"/>
-          </a:fontRef>
-        </p:style>
-      </p:cxnSp>
-      <p:sp>
-        <p:nvSpPr>
-          <p:cNvPr id="32" name="Rectangle 31"/>
+      <p:sp>
+        <p:nvSpPr>
+          <p:cNvPr id="20" name="Rectangle 19"/>
           <p:cNvSpPr/>
           <p:nvPr/>
         </p:nvSpPr>
@@ -19036,7 +18601,7 @@
       </p:sp>
       <p:sp>
         <p:nvSpPr>
-          <p:cNvPr id="33" name="TextBox 32"/>
+          <p:cNvPr id="21" name="TextBox 20"/>
           <p:cNvSpPr txBox="1"/>
           <p:nvPr/>
         </p:nvSpPr>
@@ -19077,7 +18642,7 @@
       </p:sp>
       <p:sp>
         <p:nvSpPr>
-          <p:cNvPr id="34" name="TextBox 33"/>
+          <p:cNvPr id="22" name="TextBox 21"/>
           <p:cNvSpPr txBox="1"/>
           <p:nvPr/>
         </p:nvSpPr>
@@ -19118,7 +18683,7 @@
       </p:sp>
       <p:sp>
         <p:nvSpPr>
-          <p:cNvPr id="35" name="Rectangle 34"/>
+          <p:cNvPr id="23" name="Rectangle 22"/>
           <p:cNvSpPr/>
           <p:nvPr/>
         </p:nvSpPr>
@@ -19164,7 +18729,7 @@
       </p:sp>
       <p:sp>
         <p:nvSpPr>
-          <p:cNvPr id="36" name="TextBox 35"/>
+          <p:cNvPr id="24" name="TextBox 23"/>
           <p:cNvSpPr txBox="1"/>
           <p:nvPr/>
         </p:nvSpPr>
@@ -19205,7 +18770,7 @@
       </p:sp>
       <p:sp>
         <p:nvSpPr>
-          <p:cNvPr id="37" name="TextBox 36"/>
+          <p:cNvPr id="25" name="TextBox 24"/>
           <p:cNvSpPr txBox="1"/>
           <p:nvPr/>
         </p:nvSpPr>
@@ -19246,7 +18811,7 @@
       </p:sp>
       <p:sp>
         <p:nvSpPr>
-          <p:cNvPr id="38" name="Rectangle 37"/>
+          <p:cNvPr id="26" name="Rectangle 25"/>
           <p:cNvSpPr/>
           <p:nvPr/>
         </p:nvSpPr>
@@ -19292,7 +18857,7 @@
       </p:sp>
       <p:sp>
         <p:nvSpPr>
-          <p:cNvPr id="39" name="TextBox 38"/>
+          <p:cNvPr id="27" name="TextBox 26"/>
           <p:cNvSpPr txBox="1"/>
           <p:nvPr/>
         </p:nvSpPr>
@@ -19333,7 +18898,7 @@
       </p:sp>
       <p:sp>
         <p:nvSpPr>
-          <p:cNvPr id="40" name="TextBox 39"/>
+          <p:cNvPr id="28" name="TextBox 27"/>
           <p:cNvSpPr txBox="1"/>
           <p:nvPr/>
         </p:nvSpPr>
@@ -19374,7 +18939,7 @@
       </p:sp>
       <p:sp>
         <p:nvSpPr>
-          <p:cNvPr id="41" name="Rectangle 40"/>
+          <p:cNvPr id="29" name="Rectangle 28"/>
           <p:cNvSpPr/>
           <p:nvPr/>
         </p:nvSpPr>
@@ -19420,7 +18985,7 @@
       </p:sp>
       <p:sp>
         <p:nvSpPr>
-          <p:cNvPr id="42" name="TextBox 41"/>
+          <p:cNvPr id="30" name="TextBox 29"/>
           <p:cNvSpPr txBox="1"/>
           <p:nvPr/>
         </p:nvSpPr>
@@ -19461,7 +19026,7 @@
       </p:sp>
       <p:sp>
         <p:nvSpPr>
-          <p:cNvPr id="43" name="TextBox 42"/>
+          <p:cNvPr id="31" name="TextBox 30"/>
           <p:cNvSpPr txBox="1"/>
           <p:nvPr/>
         </p:nvSpPr>
@@ -19502,7 +19067,7 @@
       </p:sp>
       <p:sp>
         <p:nvSpPr>
-          <p:cNvPr id="44" name="Rectangle 43"/>
+          <p:cNvPr id="32" name="Rectangle 31"/>
           <p:cNvSpPr/>
           <p:nvPr/>
         </p:nvSpPr>
@@ -19548,7 +19113,7 @@
       </p:sp>
       <p:sp>
         <p:nvSpPr>
-          <p:cNvPr id="45" name="TextBox 44"/>
+          <p:cNvPr id="33" name="TextBox 32"/>
           <p:cNvSpPr txBox="1"/>
           <p:nvPr/>
         </p:nvSpPr>
@@ -19589,7 +19154,7 @@
       </p:sp>
       <p:sp>
         <p:nvSpPr>
-          <p:cNvPr id="46" name="TextBox 45"/>
+          <p:cNvPr id="34" name="TextBox 33"/>
           <p:cNvSpPr txBox="1"/>
           <p:nvPr/>
         </p:nvSpPr>
@@ -19630,7 +19195,7 @@
       </p:sp>
       <p:sp>
         <p:nvSpPr>
-          <p:cNvPr id="47" name="Rectangle 46"/>
+          <p:cNvPr id="35" name="Rectangle 34"/>
           <p:cNvSpPr/>
           <p:nvPr/>
         </p:nvSpPr>
@@ -19676,7 +19241,7 @@
       </p:sp>
       <p:sp>
         <p:nvSpPr>
-          <p:cNvPr id="48" name="TextBox 47"/>
+          <p:cNvPr id="36" name="TextBox 35"/>
           <p:cNvSpPr txBox="1"/>
           <p:nvPr/>
         </p:nvSpPr>
@@ -19717,7 +19282,7 @@
       </p:sp>
       <p:sp>
         <p:nvSpPr>
-          <p:cNvPr id="49" name="TextBox 48"/>
+          <p:cNvPr id="37" name="TextBox 36"/>
           <p:cNvSpPr txBox="1"/>
           <p:nvPr/>
         </p:nvSpPr>
@@ -19758,7 +19323,7 @@
       </p:sp>
       <p:sp>
         <p:nvSpPr>
-          <p:cNvPr id="50" name="Rectangle 49"/>
+          <p:cNvPr id="38" name="Rectangle 37"/>
           <p:cNvSpPr/>
           <p:nvPr/>
         </p:nvSpPr>
@@ -19802,7 +19367,7 @@
       </p:sp>
       <p:sp>
         <p:nvSpPr>
-          <p:cNvPr id="51" name="TextBox 50"/>
+          <p:cNvPr id="39" name="TextBox 38"/>
           <p:cNvSpPr txBox="1"/>
           <p:nvPr/>
         </p:nvSpPr>
@@ -19843,7 +19408,7 @@
       </p:sp>
       <p:sp>
         <p:nvSpPr>
-          <p:cNvPr id="52" name="Rectangle 51"/>
+          <p:cNvPr id="40" name="Rectangle 39"/>
           <p:cNvSpPr/>
           <p:nvPr/>
         </p:nvSpPr>
@@ -19889,7 +19454,7 @@
       </p:sp>
       <p:sp>
         <p:nvSpPr>
-          <p:cNvPr id="53" name="TextBox 52"/>
+          <p:cNvPr id="41" name="TextBox 40"/>
           <p:cNvSpPr txBox="1"/>
           <p:nvPr/>
         </p:nvSpPr>
@@ -19930,7 +19495,7 @@
       </p:sp>
       <p:sp>
         <p:nvSpPr>
-          <p:cNvPr id="54" name="TextBox 53"/>
+          <p:cNvPr id="42" name="TextBox 41"/>
           <p:cNvSpPr txBox="1"/>
           <p:nvPr/>
         </p:nvSpPr>
@@ -19971,7 +19536,7 @@
       </p:sp>
       <p:sp>
         <p:nvSpPr>
-          <p:cNvPr id="55" name="Rectangle 54"/>
+          <p:cNvPr id="43" name="Rectangle 42"/>
           <p:cNvSpPr/>
           <p:nvPr/>
         </p:nvSpPr>
@@ -20015,7 +19580,7 @@
       </p:sp>
       <p:sp>
         <p:nvSpPr>
-          <p:cNvPr id="56" name="TextBox 55"/>
+          <p:cNvPr id="44" name="TextBox 43"/>
           <p:cNvSpPr txBox="1"/>
           <p:nvPr/>
         </p:nvSpPr>
@@ -20056,7 +19621,7 @@
       </p:sp>
       <p:sp>
         <p:nvSpPr>
-          <p:cNvPr id="57" name="Rectangle 56"/>
+          <p:cNvPr id="45" name="Rectangle 44"/>
           <p:cNvSpPr/>
           <p:nvPr/>
         </p:nvSpPr>
@@ -20102,7 +19667,7 @@
       </p:sp>
       <p:sp>
         <p:nvSpPr>
-          <p:cNvPr id="58" name="TextBox 57"/>
+          <p:cNvPr id="46" name="TextBox 45"/>
           <p:cNvSpPr txBox="1"/>
           <p:nvPr/>
         </p:nvSpPr>
@@ -20143,7 +19708,7 @@
       </p:sp>
       <p:sp>
         <p:nvSpPr>
-          <p:cNvPr id="59" name="TextBox 58"/>
+          <p:cNvPr id="47" name="TextBox 46"/>
           <p:cNvSpPr txBox="1"/>
           <p:nvPr/>
         </p:nvSpPr>
@@ -20184,7 +19749,7 @@
       </p:sp>
       <p:sp>
         <p:nvSpPr>
-          <p:cNvPr id="60" name="Rectangle 59"/>
+          <p:cNvPr id="48" name="Rectangle 47"/>
           <p:cNvSpPr/>
           <p:nvPr/>
         </p:nvSpPr>
@@ -20228,7 +19793,7 @@
       </p:sp>
       <p:sp>
         <p:nvSpPr>
-          <p:cNvPr id="61" name="TextBox 60"/>
+          <p:cNvPr id="49" name="TextBox 48"/>
           <p:cNvSpPr txBox="1"/>
           <p:nvPr/>
         </p:nvSpPr>
@@ -20269,7 +19834,7 @@
       </p:sp>
       <p:sp>
         <p:nvSpPr>
-          <p:cNvPr id="62" name="Rectangle 61"/>
+          <p:cNvPr id="50" name="Rectangle 49"/>
           <p:cNvSpPr/>
           <p:nvPr/>
         </p:nvSpPr>
@@ -20315,7 +19880,7 @@
       </p:sp>
       <p:sp>
         <p:nvSpPr>
-          <p:cNvPr id="63" name="TextBox 62"/>
+          <p:cNvPr id="51" name="TextBox 50"/>
           <p:cNvSpPr txBox="1"/>
           <p:nvPr/>
         </p:nvSpPr>
@@ -20356,7 +19921,7 @@
       </p:sp>
       <p:sp>
         <p:nvSpPr>
-          <p:cNvPr id="64" name="TextBox 63"/>
+          <p:cNvPr id="52" name="TextBox 51"/>
           <p:cNvSpPr txBox="1"/>
           <p:nvPr/>
         </p:nvSpPr>
@@ -20397,7 +19962,7 @@
       </p:sp>
       <p:sp>
         <p:nvSpPr>
-          <p:cNvPr id="65" name="Rectangle 64"/>
+          <p:cNvPr id="53" name="Rectangle 52"/>
           <p:cNvSpPr/>
           <p:nvPr/>
         </p:nvSpPr>
@@ -20443,7 +20008,7 @@
       </p:sp>
       <p:sp>
         <p:nvSpPr>
-          <p:cNvPr id="66" name="TextBox 65"/>
+          <p:cNvPr id="54" name="TextBox 53"/>
           <p:cNvSpPr txBox="1"/>
           <p:nvPr/>
         </p:nvSpPr>
@@ -20484,7 +20049,7 @@
       </p:sp>
       <p:sp>
         <p:nvSpPr>
-          <p:cNvPr id="67" name="TextBox 66"/>
+          <p:cNvPr id="55" name="TextBox 54"/>
           <p:cNvSpPr txBox="1"/>
           <p:nvPr/>
         </p:nvSpPr>
@@ -20525,7 +20090,7 @@
       </p:sp>
       <p:cxnSp>
         <p:nvCxnSpPr>
-          <p:cNvPr id="68" name="Connector 67"/>
+          <p:cNvPr id="56" name="Connector 55"/>
           <p:cNvCxnSpPr/>
           <p:nvPr/>
         </p:nvCxnSpPr>
@@ -20537,7 +20102,7 @@
           <a:prstGeom prst="line">
             <a:avLst/>
           </a:prstGeom>
-          <a:ln w="15875">
+          <a:ln w="13970">
             <a:prstDash val="dash"/>
             <a:solidFill>
               <a:srgbClr val="6C7372"/>
@@ -20563,7 +20128,7 @@
       </p:cxnSp>
       <p:cxnSp>
         <p:nvCxnSpPr>
-          <p:cNvPr id="69" name="Connector 68"/>
+          <p:cNvPr id="57" name="Connector 56"/>
           <p:cNvCxnSpPr/>
           <p:nvPr/>
         </p:nvCxnSpPr>
@@ -20575,7 +20140,7 @@
           <a:prstGeom prst="line">
             <a:avLst/>
           </a:prstGeom>
-          <a:ln w="15875">
+          <a:ln w="13970">
             <a:prstDash val="dash"/>
             <a:solidFill>
               <a:srgbClr val="6C7372"/>
@@ -20601,7 +20166,7 @@
       </p:cxnSp>
       <p:cxnSp>
         <p:nvCxnSpPr>
-          <p:cNvPr id="70" name="Connector 69"/>
+          <p:cNvPr id="58" name="Connector 57"/>
           <p:cNvCxnSpPr/>
           <p:nvPr/>
         </p:nvCxnSpPr>
@@ -20613,7 +20178,7 @@
           <a:prstGeom prst="line">
             <a:avLst/>
           </a:prstGeom>
-          <a:ln w="15875">
+          <a:ln w="13970">
             <a:prstDash val="dash"/>
             <a:solidFill>
               <a:srgbClr val="6C7372"/>
@@ -20639,7 +20204,7 @@
       </p:cxnSp>
       <p:sp>
         <p:nvSpPr>
-          <p:cNvPr id="71" name="TextBox 70"/>
+          <p:cNvPr id="59" name="TextBox 58"/>
           <p:cNvSpPr txBox="1"/>
           <p:nvPr/>
         </p:nvSpPr>
@@ -20682,7 +20247,7 @@
       </p:sp>
       <p:sp>
         <p:nvSpPr>
-          <p:cNvPr id="72" name="TextBox 71"/>
+          <p:cNvPr id="60" name="TextBox 59"/>
           <p:cNvSpPr txBox="1"/>
           <p:nvPr/>
         </p:nvSpPr>
@@ -20725,7 +20290,7 @@
       </p:sp>
       <p:sp>
         <p:nvSpPr>
-          <p:cNvPr id="73" name="Rectangle 72"/>
+          <p:cNvPr id="61" name="Rectangle 60"/>
           <p:cNvSpPr/>
           <p:nvPr/>
         </p:nvSpPr>
@@ -20769,7 +20334,7 @@
       </p:sp>
       <p:sp>
         <p:nvSpPr>
-          <p:cNvPr id="74" name="TextBox 73"/>
+          <p:cNvPr id="62" name="TextBox 61"/>
           <p:cNvSpPr txBox="1"/>
           <p:nvPr/>
         </p:nvSpPr>
@@ -20810,7 +20375,7 @@
       </p:sp>
       <p:sp>
         <p:nvSpPr>
-          <p:cNvPr id="75" name="TextBox 74"/>
+          <p:cNvPr id="63" name="TextBox 62"/>
           <p:cNvSpPr txBox="1"/>
           <p:nvPr/>
         </p:nvSpPr>
@@ -20851,7 +20416,7 @@
       </p:sp>
       <p:sp>
         <p:nvSpPr>
-          <p:cNvPr id="76" name="TextBox 75"/>
+          <p:cNvPr id="64" name="TextBox 63"/>
           <p:cNvSpPr txBox="1"/>
           <p:nvPr/>
         </p:nvSpPr>
@@ -31081,8 +30646,8 @@
         </p:nvSpPr>
         <p:spPr>
           <a:xfrm>
-            <a:off x="694944" y="1755648"/>
-            <a:ext cx="5193792" cy="3383280"/>
+            <a:off x="694944" y="1719072"/>
+            <a:ext cx="5212080" cy="3243072"/>
           </a:xfrm>
           <a:prstGeom prst="rect">
             <a:avLst/>
@@ -31119,14 +30684,58 @@
       </p:sp>
       <p:sp>
         <p:nvSpPr>
-          <p:cNvPr id="6" name="TextBox 5"/>
-          <p:cNvSpPr txBox="1"/>
-          <p:nvPr/>
-        </p:nvSpPr>
-        <p:spPr>
-          <a:xfrm>
-            <a:off x="1024128" y="2011680"/>
-            <a:ext cx="4535424" cy="228600"/>
+          <p:cNvPr id="6" name="Rectangle 5"/>
+          <p:cNvSpPr/>
+          <p:nvPr/>
+        </p:nvSpPr>
+        <p:spPr>
+          <a:xfrm>
+            <a:off x="694944" y="1719072"/>
+            <a:ext cx="5212080" cy="41148"/>
+          </a:xfrm>
+          <a:prstGeom prst="rect">
+            <a:avLst/>
+          </a:prstGeom>
+          <a:solidFill>
+            <a:srgbClr val="666E70"/>
+          </a:solidFill>
+          <a:ln>
+            <a:noFill/>
+          </a:ln>
+          <a:effectLst/>
+        </p:spPr>
+        <p:style>
+          <a:lnRef idx="1">
+            <a:schemeClr val="accent1"/>
+          </a:lnRef>
+          <a:fillRef idx="3">
+            <a:schemeClr val="accent1"/>
+          </a:fillRef>
+          <a:effectRef idx="2">
+            <a:schemeClr val="accent1"/>
+          </a:effectRef>
+          <a:fontRef idx="minor">
+            <a:schemeClr val="lt1"/>
+          </a:fontRef>
+        </p:style>
+        <p:txBody>
+          <a:bodyPr rtlCol="0" anchor="ctr"/>
+          <a:lstStyle/>
+          <a:p>
+            <a:pPr algn="ctr"/>
+          </a:p>
+        </p:txBody>
+      </p:sp>
+      <p:sp>
+        <p:nvSpPr>
+          <p:cNvPr id="7" name="TextBox 6"/>
+          <p:cNvSpPr txBox="1"/>
+          <p:nvPr/>
+        </p:nvSpPr>
+        <p:spPr>
+          <a:xfrm>
+            <a:off x="1042416" y="1984248"/>
+            <a:ext cx="4517136" cy="201168"/>
           </a:xfrm>
           <a:prstGeom prst="rect">
             <a:avLst/>
@@ -31160,14 +30769,14 @@
       </p:sp>
       <p:sp>
         <p:nvSpPr>
-          <p:cNvPr id="7" name="TextBox 6"/>
-          <p:cNvSpPr txBox="1"/>
-          <p:nvPr/>
-        </p:nvSpPr>
-        <p:spPr>
-          <a:xfrm>
-            <a:off x="1024128" y="2368296"/>
-            <a:ext cx="4535424" cy="438912"/>
+          <p:cNvPr id="8" name="TextBox 7"/>
+          <p:cNvSpPr txBox="1"/>
+          <p:nvPr/>
+        </p:nvSpPr>
+        <p:spPr>
+          <a:xfrm>
+            <a:off x="1042416" y="2304288"/>
+            <a:ext cx="4517136" cy="384048"/>
           </a:xfrm>
           <a:prstGeom prst="rect">
             <a:avLst/>
@@ -31201,14 +30810,58 @@
       </p:sp>
       <p:sp>
         <p:nvSpPr>
-          <p:cNvPr id="8" name="TextBox 7"/>
-          <p:cNvSpPr txBox="1"/>
-          <p:nvPr/>
-        </p:nvSpPr>
-        <p:spPr>
-          <a:xfrm>
-            <a:off x="1024128" y="3044952"/>
-            <a:ext cx="219456" cy="274320"/>
+          <p:cNvPr id="9" name="Rectangle 8"/>
+          <p:cNvSpPr/>
+          <p:nvPr/>
+        </p:nvSpPr>
+        <p:spPr>
+          <a:xfrm>
+            <a:off x="1042416" y="2779776"/>
+            <a:ext cx="4517136" cy="9144"/>
+          </a:xfrm>
+          <a:prstGeom prst="rect">
+            <a:avLst/>
+          </a:prstGeom>
+          <a:solidFill>
+            <a:srgbClr val="D1CFC8"/>
+          </a:solidFill>
+          <a:ln>
+            <a:noFill/>
+          </a:ln>
+          <a:effectLst/>
+        </p:spPr>
+        <p:style>
+          <a:lnRef idx="1">
+            <a:schemeClr val="accent1"/>
+          </a:lnRef>
+          <a:fillRef idx="3">
+            <a:schemeClr val="accent1"/>
+          </a:fillRef>
+          <a:effectRef idx="2">
+            <a:schemeClr val="accent1"/>
+          </a:effectRef>
+          <a:fontRef idx="minor">
+            <a:schemeClr val="lt1"/>
+          </a:fontRef>
+        </p:style>
+        <p:txBody>
+          <a:bodyPr rtlCol="0" anchor="ctr"/>
+          <a:lstStyle/>
+          <a:p>
+            <a:pPr algn="ctr"/>
+          </a:p>
+        </p:txBody>
+      </p:sp>
+      <p:sp>
+        <p:nvSpPr>
+          <p:cNvPr id="10" name="TextBox 9"/>
+          <p:cNvSpPr txBox="1"/>
+          <p:nvPr/>
+        </p:nvSpPr>
+        <p:spPr>
+          <a:xfrm>
+            <a:off x="1042416" y="2953512"/>
+            <a:ext cx="310896" cy="219456"/>
           </a:xfrm>
           <a:prstGeom prst="rect">
             <a:avLst/>
@@ -31227,7 +30880,7 @@
               </a:lnSpc>
             </a:pPr>
             <a:r>
-              <a:rPr sz="1200" b="1" lang="ja-JP">
+              <a:rPr sz="950" b="1" lang="ja-JP">
                 <a:solidFill>
                   <a:srgbClr val="666E70"/>
                 </a:solidFill>
@@ -31235,21 +30888,21 @@
                 <a:ea typeface="Yu Gothic"/>
                 <a:cs typeface="Yu Gothic"/>
               </a:rPr>
-              <a:t>—</a:t>
-            </a:r>
-          </a:p>
-        </p:txBody>
-      </p:sp>
-      <p:sp>
-        <p:nvSpPr>
-          <p:cNvPr id="9" name="TextBox 8"/>
-          <p:cNvSpPr txBox="1"/>
-          <p:nvPr/>
-        </p:nvSpPr>
-        <p:spPr>
-          <a:xfrm>
-            <a:off x="1335024" y="3054096"/>
-            <a:ext cx="4498848" cy="499871"/>
+              <a:t>01</a:t>
+            </a:r>
+          </a:p>
+        </p:txBody>
+      </p:sp>
+      <p:sp>
+        <p:nvSpPr>
+          <p:cNvPr id="11" name="TextBox 10"/>
+          <p:cNvSpPr txBox="1"/>
+          <p:nvPr/>
+        </p:nvSpPr>
+        <p:spPr>
+          <a:xfrm>
+            <a:off x="1444752" y="2944368"/>
+            <a:ext cx="4206240" cy="474472"/>
           </a:xfrm>
           <a:prstGeom prst="rect">
             <a:avLst/>
@@ -31264,7 +30917,7 @@
           <a:p>
             <a:pPr algn="l">
               <a:lnSpc>
-                <a:spcPct val="120000"/>
+                <a:spcPct val="118000"/>
               </a:lnSpc>
             </a:pPr>
             <a:r>
@@ -31283,14 +30936,58 @@
       </p:sp>
       <p:sp>
         <p:nvSpPr>
-          <p:cNvPr id="10" name="TextBox 9"/>
-          <p:cNvSpPr txBox="1"/>
-          <p:nvPr/>
-        </p:nvSpPr>
-        <p:spPr>
-          <a:xfrm>
-            <a:off x="1024128" y="3764280"/>
-            <a:ext cx="219456" cy="274320"/>
+          <p:cNvPr id="12" name="Rectangle 11"/>
+          <p:cNvSpPr/>
+          <p:nvPr/>
+        </p:nvSpPr>
+        <p:spPr>
+          <a:xfrm>
+            <a:off x="1444752" y="3501136"/>
+            <a:ext cx="4206240" cy="7315"/>
+          </a:xfrm>
+          <a:prstGeom prst="rect">
+            <a:avLst/>
+          </a:prstGeom>
+          <a:solidFill>
+            <a:srgbClr val="D1CFC8"/>
+          </a:solidFill>
+          <a:ln>
+            <a:noFill/>
+          </a:ln>
+          <a:effectLst/>
+        </p:spPr>
+        <p:style>
+          <a:lnRef idx="1">
+            <a:schemeClr val="accent1"/>
+          </a:lnRef>
+          <a:fillRef idx="3">
+            <a:schemeClr val="accent1"/>
+          </a:fillRef>
+          <a:effectRef idx="2">
+            <a:schemeClr val="accent1"/>
+          </a:effectRef>
+          <a:fontRef idx="minor">
+            <a:schemeClr val="lt1"/>
+          </a:fontRef>
+        </p:style>
+        <p:txBody>
+          <a:bodyPr rtlCol="0" anchor="ctr"/>
+          <a:lstStyle/>
+          <a:p>
+            <a:pPr algn="ctr"/>
+          </a:p>
+        </p:txBody>
+      </p:sp>
+      <p:sp>
+        <p:nvSpPr>
+          <p:cNvPr id="13" name="TextBox 12"/>
+          <p:cNvSpPr txBox="1"/>
+          <p:nvPr/>
+        </p:nvSpPr>
+        <p:spPr>
+          <a:xfrm>
+            <a:off x="1042416" y="3592576"/>
+            <a:ext cx="310896" cy="219456"/>
           </a:xfrm>
           <a:prstGeom prst="rect">
             <a:avLst/>
@@ -31309,7 +31006,7 @@
               </a:lnSpc>
             </a:pPr>
             <a:r>
-              <a:rPr sz="1200" b="1" lang="ja-JP">
+              <a:rPr sz="950" b="1" lang="ja-JP">
                 <a:solidFill>
                   <a:srgbClr val="666E70"/>
                 </a:solidFill>
@@ -31317,21 +31014,21 @@
                 <a:ea typeface="Yu Gothic"/>
                 <a:cs typeface="Yu Gothic"/>
               </a:rPr>
-              <a:t>—</a:t>
-            </a:r>
-          </a:p>
-        </p:txBody>
-      </p:sp>
-      <p:sp>
-        <p:nvSpPr>
-          <p:cNvPr id="11" name="TextBox 10"/>
-          <p:cNvSpPr txBox="1"/>
-          <p:nvPr/>
-        </p:nvSpPr>
-        <p:spPr>
-          <a:xfrm>
-            <a:off x="1335024" y="3773424"/>
-            <a:ext cx="4498848" cy="499871"/>
+              <a:t>02</a:t>
+            </a:r>
+          </a:p>
+        </p:txBody>
+      </p:sp>
+      <p:sp>
+        <p:nvSpPr>
+          <p:cNvPr id="14" name="TextBox 13"/>
+          <p:cNvSpPr txBox="1"/>
+          <p:nvPr/>
+        </p:nvSpPr>
+        <p:spPr>
+          <a:xfrm>
+            <a:off x="1444752" y="3583432"/>
+            <a:ext cx="4206240" cy="474472"/>
           </a:xfrm>
           <a:prstGeom prst="rect">
             <a:avLst/>
@@ -31346,7 +31043,7 @@
           <a:p>
             <a:pPr algn="l">
               <a:lnSpc>
-                <a:spcPct val="120000"/>
+                <a:spcPct val="118000"/>
               </a:lnSpc>
             </a:pPr>
             <a:r>
@@ -31365,14 +31062,58 @@
       </p:sp>
       <p:sp>
         <p:nvSpPr>
-          <p:cNvPr id="12" name="TextBox 11"/>
-          <p:cNvSpPr txBox="1"/>
-          <p:nvPr/>
-        </p:nvSpPr>
-        <p:spPr>
-          <a:xfrm>
-            <a:off x="1024128" y="4483608"/>
-            <a:ext cx="219456" cy="274320"/>
+          <p:cNvPr id="15" name="Rectangle 14"/>
+          <p:cNvSpPr/>
+          <p:nvPr/>
+        </p:nvSpPr>
+        <p:spPr>
+          <a:xfrm>
+            <a:off x="1444752" y="4140200"/>
+            <a:ext cx="4206240" cy="7315"/>
+          </a:xfrm>
+          <a:prstGeom prst="rect">
+            <a:avLst/>
+          </a:prstGeom>
+          <a:solidFill>
+            <a:srgbClr val="D1CFC8"/>
+          </a:solidFill>
+          <a:ln>
+            <a:noFill/>
+          </a:ln>
+          <a:effectLst/>
+        </p:spPr>
+        <p:style>
+          <a:lnRef idx="1">
+            <a:schemeClr val="accent1"/>
+          </a:lnRef>
+          <a:fillRef idx="3">
+            <a:schemeClr val="accent1"/>
+          </a:fillRef>
+          <a:effectRef idx="2">
+            <a:schemeClr val="accent1"/>
+          </a:effectRef>
+          <a:fontRef idx="minor">
+            <a:schemeClr val="lt1"/>
+          </a:fontRef>
+        </p:style>
+        <p:txBody>
+          <a:bodyPr rtlCol="0" anchor="ctr"/>
+          <a:lstStyle/>
+          <a:p>
+            <a:pPr algn="ctr"/>
+          </a:p>
+        </p:txBody>
+      </p:sp>
+      <p:sp>
+        <p:nvSpPr>
+          <p:cNvPr id="16" name="TextBox 15"/>
+          <p:cNvSpPr txBox="1"/>
+          <p:nvPr/>
+        </p:nvSpPr>
+        <p:spPr>
+          <a:xfrm>
+            <a:off x="1042416" y="4231640"/>
+            <a:ext cx="310896" cy="219456"/>
           </a:xfrm>
           <a:prstGeom prst="rect">
             <a:avLst/>
@@ -31391,7 +31132,7 @@
               </a:lnSpc>
             </a:pPr>
             <a:r>
-              <a:rPr sz="1200" b="1" lang="ja-JP">
+              <a:rPr sz="950" b="1" lang="ja-JP">
                 <a:solidFill>
                   <a:srgbClr val="666E70"/>
                 </a:solidFill>
@@ -31399,21 +31140,21 @@
                 <a:ea typeface="Yu Gothic"/>
                 <a:cs typeface="Yu Gothic"/>
               </a:rPr>
-              <a:t>—</a:t>
-            </a:r>
-          </a:p>
-        </p:txBody>
-      </p:sp>
-      <p:sp>
-        <p:nvSpPr>
-          <p:cNvPr id="13" name="TextBox 12"/>
-          <p:cNvSpPr txBox="1"/>
-          <p:nvPr/>
-        </p:nvSpPr>
-        <p:spPr>
-          <a:xfrm>
-            <a:off x="1335024" y="4492752"/>
-            <a:ext cx="4498848" cy="499871"/>
+              <a:t>03</a:t>
+            </a:r>
+          </a:p>
+        </p:txBody>
+      </p:sp>
+      <p:sp>
+        <p:nvSpPr>
+          <p:cNvPr id="17" name="TextBox 16"/>
+          <p:cNvSpPr txBox="1"/>
+          <p:nvPr/>
+        </p:nvSpPr>
+        <p:spPr>
+          <a:xfrm>
+            <a:off x="1444752" y="4222496"/>
+            <a:ext cx="4206240" cy="474472"/>
           </a:xfrm>
           <a:prstGeom prst="rect">
             <a:avLst/>
@@ -31428,7 +31169,7 @@
           <a:p>
             <a:pPr algn="l">
               <a:lnSpc>
-                <a:spcPct val="120000"/>
+                <a:spcPct val="118000"/>
               </a:lnSpc>
             </a:pPr>
             <a:r>
@@ -31447,14 +31188,14 @@
       </p:sp>
       <p:sp>
         <p:nvSpPr>
-          <p:cNvPr id="14" name="Rectangle 13"/>
+          <p:cNvPr id="18" name="Rectangle 17"/>
           <p:cNvSpPr/>
           <p:nvPr/>
         </p:nvSpPr>
         <p:spPr>
           <a:xfrm>
-            <a:off x="6309359" y="1755648"/>
-            <a:ext cx="5193792" cy="3383280"/>
+            <a:off x="6291072" y="1719072"/>
+            <a:ext cx="5212080" cy="3243072"/>
           </a:xfrm>
           <a:prstGeom prst="rect">
             <a:avLst/>
@@ -31491,14 +31232,58 @@
       </p:sp>
       <p:sp>
         <p:nvSpPr>
-          <p:cNvPr id="15" name="TextBox 14"/>
-          <p:cNvSpPr txBox="1"/>
-          <p:nvPr/>
-        </p:nvSpPr>
-        <p:spPr>
-          <a:xfrm>
-            <a:off x="6638544" y="2011680"/>
-            <a:ext cx="4535424" cy="228600"/>
+          <p:cNvPr id="19" name="Rectangle 18"/>
+          <p:cNvSpPr/>
+          <p:nvPr/>
+        </p:nvSpPr>
+        <p:spPr>
+          <a:xfrm>
+            <a:off x="6291072" y="1719072"/>
+            <a:ext cx="5212080" cy="41148"/>
+          </a:xfrm>
+          <a:prstGeom prst="rect">
+            <a:avLst/>
+          </a:prstGeom>
+          <a:solidFill>
+            <a:srgbClr val="0D7870"/>
+          </a:solidFill>
+          <a:ln>
+            <a:noFill/>
+          </a:ln>
+          <a:effectLst/>
+        </p:spPr>
+        <p:style>
+          <a:lnRef idx="1">
+            <a:schemeClr val="accent1"/>
+          </a:lnRef>
+          <a:fillRef idx="3">
+            <a:schemeClr val="accent1"/>
+          </a:fillRef>
+          <a:effectRef idx="2">
+            <a:schemeClr val="accent1"/>
+          </a:effectRef>
+          <a:fontRef idx="minor">
+            <a:schemeClr val="lt1"/>
+          </a:fontRef>
+        </p:style>
+        <p:txBody>
+          <a:bodyPr rtlCol="0" anchor="ctr"/>
+          <a:lstStyle/>
+          <a:p>
+            <a:pPr algn="ctr"/>
+          </a:p>
+        </p:txBody>
+      </p:sp>
+      <p:sp>
+        <p:nvSpPr>
+          <p:cNvPr id="20" name="TextBox 19"/>
+          <p:cNvSpPr txBox="1"/>
+          <p:nvPr/>
+        </p:nvSpPr>
+        <p:spPr>
+          <a:xfrm>
+            <a:off x="6638544" y="1984248"/>
+            <a:ext cx="4517136" cy="201168"/>
           </a:xfrm>
           <a:prstGeom prst="rect">
             <a:avLst/>
@@ -31532,14 +31317,14 @@
       </p:sp>
       <p:sp>
         <p:nvSpPr>
-          <p:cNvPr id="16" name="TextBox 15"/>
-          <p:cNvSpPr txBox="1"/>
-          <p:nvPr/>
-        </p:nvSpPr>
-        <p:spPr>
-          <a:xfrm>
-            <a:off x="6638544" y="2368296"/>
-            <a:ext cx="4535424" cy="438912"/>
+          <p:cNvPr id="21" name="TextBox 20"/>
+          <p:cNvSpPr txBox="1"/>
+          <p:nvPr/>
+        </p:nvSpPr>
+        <p:spPr>
+          <a:xfrm>
+            <a:off x="6638544" y="2304288"/>
+            <a:ext cx="4517136" cy="384048"/>
           </a:xfrm>
           <a:prstGeom prst="rect">
             <a:avLst/>
@@ -31573,14 +31358,58 @@
       </p:sp>
       <p:sp>
         <p:nvSpPr>
-          <p:cNvPr id="17" name="TextBox 16"/>
-          <p:cNvSpPr txBox="1"/>
-          <p:nvPr/>
-        </p:nvSpPr>
-        <p:spPr>
-          <a:xfrm>
-            <a:off x="6638544" y="3044952"/>
-            <a:ext cx="219456" cy="274320"/>
+          <p:cNvPr id="22" name="Rectangle 21"/>
+          <p:cNvSpPr/>
+          <p:nvPr/>
+        </p:nvSpPr>
+        <p:spPr>
+          <a:xfrm>
+            <a:off x="6638544" y="2779776"/>
+            <a:ext cx="4517136" cy="9144"/>
+          </a:xfrm>
+          <a:prstGeom prst="rect">
+            <a:avLst/>
+          </a:prstGeom>
+          <a:solidFill>
+            <a:srgbClr val="D1CFC8"/>
+          </a:solidFill>
+          <a:ln>
+            <a:noFill/>
+          </a:ln>
+          <a:effectLst/>
+        </p:spPr>
+        <p:style>
+          <a:lnRef idx="1">
+            <a:schemeClr val="accent1"/>
+          </a:lnRef>
+          <a:fillRef idx="3">
+            <a:schemeClr val="accent1"/>
+          </a:fillRef>
+          <a:effectRef idx="2">
+            <a:schemeClr val="accent1"/>
+          </a:effectRef>
+          <a:fontRef idx="minor">
+            <a:schemeClr val="lt1"/>
+          </a:fontRef>
+        </p:style>
+        <p:txBody>
+          <a:bodyPr rtlCol="0" anchor="ctr"/>
+          <a:lstStyle/>
+          <a:p>
+            <a:pPr algn="ctr"/>
+          </a:p>
+        </p:txBody>
+      </p:sp>
+      <p:sp>
+        <p:nvSpPr>
+          <p:cNvPr id="23" name="TextBox 22"/>
+          <p:cNvSpPr txBox="1"/>
+          <p:nvPr/>
+        </p:nvSpPr>
+        <p:spPr>
+          <a:xfrm>
+            <a:off x="6638544" y="2953512"/>
+            <a:ext cx="310896" cy="219456"/>
           </a:xfrm>
           <a:prstGeom prst="rect">
             <a:avLst/>
@@ -31599,7 +31428,7 @@
               </a:lnSpc>
             </a:pPr>
             <a:r>
-              <a:rPr sz="1200" b="1" lang="ja-JP">
+              <a:rPr sz="950" b="1" lang="ja-JP">
                 <a:solidFill>
                   <a:srgbClr val="0D7870"/>
                 </a:solidFill>
@@ -31607,21 +31436,21 @@
                 <a:ea typeface="Yu Gothic"/>
                 <a:cs typeface="Yu Gothic"/>
               </a:rPr>
-              <a:t>—</a:t>
-            </a:r>
-          </a:p>
-        </p:txBody>
-      </p:sp>
-      <p:sp>
-        <p:nvSpPr>
-          <p:cNvPr id="18" name="TextBox 17"/>
-          <p:cNvSpPr txBox="1"/>
-          <p:nvPr/>
-        </p:nvSpPr>
-        <p:spPr>
-          <a:xfrm>
-            <a:off x="6949440" y="3054096"/>
-            <a:ext cx="4498848" cy="499871"/>
+              <a:t>01</a:t>
+            </a:r>
+          </a:p>
+        </p:txBody>
+      </p:sp>
+      <p:sp>
+        <p:nvSpPr>
+          <p:cNvPr id="24" name="TextBox 23"/>
+          <p:cNvSpPr txBox="1"/>
+          <p:nvPr/>
+        </p:nvSpPr>
+        <p:spPr>
+          <a:xfrm>
+            <a:off x="7040880" y="2944368"/>
+            <a:ext cx="4206240" cy="474472"/>
           </a:xfrm>
           <a:prstGeom prst="rect">
             <a:avLst/>
@@ -31636,7 +31465,7 @@
           <a:p>
             <a:pPr algn="l">
               <a:lnSpc>
-                <a:spcPct val="120000"/>
+                <a:spcPct val="118000"/>
               </a:lnSpc>
             </a:pPr>
             <a:r>
@@ -31655,14 +31484,58 @@
       </p:sp>
       <p:sp>
         <p:nvSpPr>
-          <p:cNvPr id="19" name="TextBox 18"/>
-          <p:cNvSpPr txBox="1"/>
-          <p:nvPr/>
-        </p:nvSpPr>
-        <p:spPr>
-          <a:xfrm>
-            <a:off x="6638544" y="3764280"/>
-            <a:ext cx="219456" cy="274320"/>
+          <p:cNvPr id="25" name="Rectangle 24"/>
+          <p:cNvSpPr/>
+          <p:nvPr/>
+        </p:nvSpPr>
+        <p:spPr>
+          <a:xfrm>
+            <a:off x="7040880" y="3501136"/>
+            <a:ext cx="4206240" cy="7315"/>
+          </a:xfrm>
+          <a:prstGeom prst="rect">
+            <a:avLst/>
+          </a:prstGeom>
+          <a:solidFill>
+            <a:srgbClr val="D1CFC8"/>
+          </a:solidFill>
+          <a:ln>
+            <a:noFill/>
+          </a:ln>
+          <a:effectLst/>
+        </p:spPr>
+        <p:style>
+          <a:lnRef idx="1">
+            <a:schemeClr val="accent1"/>
+          </a:lnRef>
+          <a:fillRef idx="3">
+            <a:schemeClr val="accent1"/>
+          </a:fillRef>
+          <a:effectRef idx="2">
+            <a:schemeClr val="accent1"/>
+          </a:effectRef>
+          <a:fontRef idx="minor">
+            <a:schemeClr val="lt1"/>
+          </a:fontRef>
+        </p:style>
+        <p:txBody>
+          <a:bodyPr rtlCol="0" anchor="ctr"/>
+          <a:lstStyle/>
+          <a:p>
+            <a:pPr algn="ctr"/>
+          </a:p>
+        </p:txBody>
+      </p:sp>
+      <p:sp>
+        <p:nvSpPr>
+          <p:cNvPr id="26" name="TextBox 25"/>
+          <p:cNvSpPr txBox="1"/>
+          <p:nvPr/>
+        </p:nvSpPr>
+        <p:spPr>
+          <a:xfrm>
+            <a:off x="6638544" y="3592576"/>
+            <a:ext cx="310896" cy="219456"/>
           </a:xfrm>
           <a:prstGeom prst="rect">
             <a:avLst/>
@@ -31681,7 +31554,7 @@
               </a:lnSpc>
             </a:pPr>
             <a:r>
-              <a:rPr sz="1200" b="1" lang="ja-JP">
+              <a:rPr sz="950" b="1" lang="ja-JP">
                 <a:solidFill>
                   <a:srgbClr val="0D7870"/>
                 </a:solidFill>
@@ -31689,21 +31562,21 @@
                 <a:ea typeface="Yu Gothic"/>
                 <a:cs typeface="Yu Gothic"/>
               </a:rPr>
-              <a:t>—</a:t>
-            </a:r>
-          </a:p>
-        </p:txBody>
-      </p:sp>
-      <p:sp>
-        <p:nvSpPr>
-          <p:cNvPr id="20" name="TextBox 19"/>
-          <p:cNvSpPr txBox="1"/>
-          <p:nvPr/>
-        </p:nvSpPr>
-        <p:spPr>
-          <a:xfrm>
-            <a:off x="6949440" y="3773424"/>
-            <a:ext cx="4498848" cy="499871"/>
+              <a:t>02</a:t>
+            </a:r>
+          </a:p>
+        </p:txBody>
+      </p:sp>
+      <p:sp>
+        <p:nvSpPr>
+          <p:cNvPr id="27" name="TextBox 26"/>
+          <p:cNvSpPr txBox="1"/>
+          <p:nvPr/>
+        </p:nvSpPr>
+        <p:spPr>
+          <a:xfrm>
+            <a:off x="7040880" y="3583432"/>
+            <a:ext cx="4206240" cy="474472"/>
           </a:xfrm>
           <a:prstGeom prst="rect">
             <a:avLst/>
@@ -31718,7 +31591,7 @@
           <a:p>
             <a:pPr algn="l">
               <a:lnSpc>
-                <a:spcPct val="120000"/>
+                <a:spcPct val="118000"/>
               </a:lnSpc>
             </a:pPr>
             <a:r>
@@ -31737,14 +31610,58 @@
       </p:sp>
       <p:sp>
         <p:nvSpPr>
-          <p:cNvPr id="21" name="TextBox 20"/>
-          <p:cNvSpPr txBox="1"/>
-          <p:nvPr/>
-        </p:nvSpPr>
-        <p:spPr>
-          <a:xfrm>
-            <a:off x="6638544" y="4483608"/>
-            <a:ext cx="219456" cy="274320"/>
+          <p:cNvPr id="28" name="Rectangle 27"/>
+          <p:cNvSpPr/>
+          <p:nvPr/>
+        </p:nvSpPr>
+        <p:spPr>
+          <a:xfrm>
+            <a:off x="7040880" y="4140200"/>
+            <a:ext cx="4206240" cy="7315"/>
+          </a:xfrm>
+          <a:prstGeom prst="rect">
+            <a:avLst/>
+          </a:prstGeom>
+          <a:solidFill>
+            <a:srgbClr val="D1CFC8"/>
+          </a:solidFill>
+          <a:ln>
+            <a:noFill/>
+          </a:ln>
+          <a:effectLst/>
+        </p:spPr>
+        <p:style>
+          <a:lnRef idx="1">
+            <a:schemeClr val="accent1"/>
+          </a:lnRef>
+          <a:fillRef idx="3">
+            <a:schemeClr val="accent1"/>
+          </a:fillRef>
+          <a:effectRef idx="2">
+            <a:schemeClr val="accent1"/>
+          </a:effectRef>
+          <a:fontRef idx="minor">
+            <a:schemeClr val="lt1"/>
+          </a:fontRef>
+        </p:style>
+        <p:txBody>
+          <a:bodyPr rtlCol="0" anchor="ctr"/>
+          <a:lstStyle/>
+          <a:p>
+            <a:pPr algn="ctr"/>
+          </a:p>
+        </p:txBody>
+      </p:sp>
+      <p:sp>
+        <p:nvSpPr>
+          <p:cNvPr id="29" name="TextBox 28"/>
+          <p:cNvSpPr txBox="1"/>
+          <p:nvPr/>
+        </p:nvSpPr>
+        <p:spPr>
+          <a:xfrm>
+            <a:off x="6638544" y="4231640"/>
+            <a:ext cx="310896" cy="219456"/>
           </a:xfrm>
           <a:prstGeom prst="rect">
             <a:avLst/>
@@ -31763,7 +31680,7 @@
               </a:lnSpc>
             </a:pPr>
             <a:r>
-              <a:rPr sz="1200" b="1" lang="ja-JP">
+              <a:rPr sz="950" b="1" lang="ja-JP">
                 <a:solidFill>
                   <a:srgbClr val="0D7870"/>
                 </a:solidFill>
@@ -31771,21 +31688,21 @@
                 <a:ea typeface="Yu Gothic"/>
                 <a:cs typeface="Yu Gothic"/>
               </a:rPr>
-              <a:t>—</a:t>
-            </a:r>
-          </a:p>
-        </p:txBody>
-      </p:sp>
-      <p:sp>
-        <p:nvSpPr>
-          <p:cNvPr id="22" name="TextBox 21"/>
-          <p:cNvSpPr txBox="1"/>
-          <p:nvPr/>
-        </p:nvSpPr>
-        <p:spPr>
-          <a:xfrm>
-            <a:off x="6949440" y="4492752"/>
-            <a:ext cx="4498848" cy="499871"/>
+              <a:t>03</a:t>
+            </a:r>
+          </a:p>
+        </p:txBody>
+      </p:sp>
+      <p:sp>
+        <p:nvSpPr>
+          <p:cNvPr id="30" name="TextBox 29"/>
+          <p:cNvSpPr txBox="1"/>
+          <p:nvPr/>
+        </p:nvSpPr>
+        <p:spPr>
+          <a:xfrm>
+            <a:off x="7040880" y="4222496"/>
+            <a:ext cx="4206240" cy="474472"/>
           </a:xfrm>
           <a:prstGeom prst="rect">
             <a:avLst/>
@@ -31800,7 +31717,7 @@
           <a:p>
             <a:pPr algn="l">
               <a:lnSpc>
-                <a:spcPct val="120000"/>
+                <a:spcPct val="118000"/>
               </a:lnSpc>
             </a:pPr>
             <a:r>
@@ -31819,7 +31736,48 @@
       </p:sp>
       <p:sp>
         <p:nvSpPr>
-          <p:cNvPr id="23" name="Rectangle 22"/>
+          <p:cNvPr id="31" name="TextBox 30"/>
+          <p:cNvSpPr txBox="1"/>
+          <p:nvPr/>
+        </p:nvSpPr>
+        <p:spPr>
+          <a:xfrm>
+            <a:off x="5934456" y="3203448"/>
+            <a:ext cx="329184" cy="274320"/>
+          </a:xfrm>
+          <a:prstGeom prst="rect">
+            <a:avLst/>
+          </a:prstGeom>
+          <a:noFill/>
+        </p:spPr>
+        <p:txBody>
+          <a:bodyPr wrap="square" anchor="ctr" lIns="0" rIns="0" tIns="0" bIns="0">
+            <a:spAutoFit/>
+          </a:bodyPr>
+          <a:lstStyle/>
+          <a:p>
+            <a:pPr algn="ctr">
+              <a:lnSpc>
+                <a:spcPct val="130000"/>
+              </a:lnSpc>
+            </a:pPr>
+            <a:r>
+              <a:rPr sz="1500" b="1" lang="ja-JP">
+                <a:solidFill>
+                  <a:srgbClr val="0D7870"/>
+                </a:solidFill>
+                <a:latin typeface="Yu Gothic"/>
+                <a:ea typeface="Yu Gothic"/>
+                <a:cs typeface="Yu Gothic"/>
+              </a:rPr>
+              <a:t>→</a:t>
+            </a:r>
+          </a:p>
+        </p:txBody>
+      </p:sp>
+      <p:sp>
+        <p:nvSpPr>
+          <p:cNvPr id="32" name="Rectangle 31"/>
           <p:cNvSpPr/>
           <p:nvPr/>
         </p:nvSpPr>
@@ -31863,7 +31821,7 @@
       </p:sp>
       <p:sp>
         <p:nvSpPr>
-          <p:cNvPr id="24" name="TextBox 23"/>
+          <p:cNvPr id="33" name="TextBox 32"/>
           <p:cNvSpPr txBox="1"/>
           <p:nvPr/>
         </p:nvSpPr>
@@ -31904,7 +31862,7 @@
       </p:sp>
       <p:sp>
         <p:nvSpPr>
-          <p:cNvPr id="25" name="TextBox 24"/>
+          <p:cNvPr id="34" name="TextBox 33"/>
           <p:cNvSpPr txBox="1"/>
           <p:nvPr/>
         </p:nvSpPr>
@@ -31945,7 +31903,7 @@
       </p:sp>
       <p:sp>
         <p:nvSpPr>
-          <p:cNvPr id="26" name="TextBox 25"/>
+          <p:cNvPr id="35" name="TextBox 34"/>
           <p:cNvSpPr txBox="1"/>
           <p:nvPr/>
         </p:nvSpPr>

--- a/examples/gallery/pattern_gallery.pptx
+++ b/examples/gallery/pattern_gallery.pptx
@@ -6250,7 +6250,7 @@
         </p:nvCxnSpPr>
         <p:spPr>
           <a:xfrm>
-            <a:off x="2424988" y="2487168"/>
+            <a:off x="2424988" y="2221992"/>
             <a:ext cx="512064" cy="0"/>
           </a:xfrm>
           <a:prstGeom prst="line">
@@ -6287,7 +6287,7 @@
         </p:nvCxnSpPr>
         <p:spPr>
           <a:xfrm>
-            <a:off x="4703673" y="2487168"/>
+            <a:off x="4703673" y="2221992"/>
             <a:ext cx="512064" cy="0"/>
           </a:xfrm>
           <a:prstGeom prst="line">
@@ -6324,7 +6324,7 @@
         </p:nvCxnSpPr>
         <p:spPr>
           <a:xfrm>
-            <a:off x="6982358" y="2487168"/>
+            <a:off x="6982358" y="2221992"/>
             <a:ext cx="512064" cy="0"/>
           </a:xfrm>
           <a:prstGeom prst="line">
@@ -6361,7 +6361,7 @@
         </p:nvCxnSpPr>
         <p:spPr>
           <a:xfrm>
-            <a:off x="6982358" y="2487168"/>
+            <a:off x="6982358" y="2221992"/>
             <a:ext cx="256032" cy="0"/>
           </a:xfrm>
           <a:prstGeom prst="line">
@@ -6397,7 +6397,7 @@
         </p:nvCxnSpPr>
         <p:spPr>
           <a:xfrm>
-            <a:off x="7238390" y="2487168"/>
+            <a:off x="7238390" y="2221992"/>
             <a:ext cx="0" cy="1243584"/>
           </a:xfrm>
           <a:prstGeom prst="line">
@@ -6433,7 +6433,7 @@
         </p:nvCxnSpPr>
         <p:spPr>
           <a:xfrm>
-            <a:off x="7238390" y="3730752"/>
+            <a:off x="7238390" y="3465576"/>
             <a:ext cx="256032" cy="0"/>
           </a:xfrm>
           <a:prstGeom prst="line">
@@ -6470,7 +6470,7 @@
         </p:nvCxnSpPr>
         <p:spPr>
           <a:xfrm>
-            <a:off x="9261043" y="2487168"/>
+            <a:off x="9261043" y="2221992"/>
             <a:ext cx="512064" cy="0"/>
           </a:xfrm>
           <a:prstGeom prst="line">
@@ -6507,8 +6507,8 @@
         </p:nvCxnSpPr>
         <p:spPr>
           <a:xfrm>
-            <a:off x="8377732" y="4197096"/>
-            <a:ext cx="0" cy="402336"/>
+            <a:off x="8377732" y="3931920"/>
+            <a:ext cx="0" cy="438912"/>
           </a:xfrm>
           <a:prstGeom prst="line">
             <a:avLst/>
@@ -6544,7 +6544,7 @@
         </p:nvCxnSpPr>
         <p:spPr>
           <a:xfrm flipH="1">
-            <a:off x="3820363" y="4599432"/>
+            <a:off x="3820363" y="4370832"/>
             <a:ext cx="4557369" cy="0"/>
           </a:xfrm>
           <a:prstGeom prst="line">
@@ -6581,8 +6581,8 @@
         </p:nvCxnSpPr>
         <p:spPr>
           <a:xfrm flipV="1">
-            <a:off x="3820363" y="2953512"/>
-            <a:ext cx="0" cy="1645920"/>
+            <a:off x="3820363" y="2688336"/>
+            <a:ext cx="0" cy="1682496"/>
           </a:xfrm>
           <a:prstGeom prst="line">
             <a:avLst/>
@@ -6619,7 +6619,7 @@
         </p:nvSpPr>
         <p:spPr>
           <a:xfrm>
-            <a:off x="658368" y="2020824"/>
+            <a:off x="658368" y="1755648"/>
             <a:ext cx="1766620" cy="932688"/>
           </a:xfrm>
           <a:prstGeom prst="rect">
@@ -6665,7 +6665,7 @@
         </p:nvSpPr>
         <p:spPr>
           <a:xfrm>
-            <a:off x="786384" y="2139696"/>
+            <a:off x="786384" y="1874520"/>
             <a:ext cx="1510588" cy="292608"/>
           </a:xfrm>
           <a:prstGeom prst="rect">
@@ -6706,7 +6706,7 @@
         </p:nvSpPr>
         <p:spPr>
           <a:xfrm>
-            <a:off x="795528" y="2478024"/>
+            <a:off x="795528" y="2212848"/>
             <a:ext cx="1492300" cy="310896"/>
           </a:xfrm>
           <a:prstGeom prst="rect">
@@ -6747,7 +6747,7 @@
         </p:nvSpPr>
         <p:spPr>
           <a:xfrm>
-            <a:off x="795528" y="2706624"/>
+            <a:off x="795528" y="2441448"/>
             <a:ext cx="1492300" cy="201168"/>
           </a:xfrm>
           <a:prstGeom prst="rect">
@@ -6788,7 +6788,7 @@
         </p:nvSpPr>
         <p:spPr>
           <a:xfrm>
-            <a:off x="2937052" y="2020824"/>
+            <a:off x="2937052" y="1755648"/>
             <a:ext cx="1766620" cy="932688"/>
           </a:xfrm>
           <a:prstGeom prst="rect">
@@ -6834,7 +6834,7 @@
         </p:nvSpPr>
         <p:spPr>
           <a:xfrm>
-            <a:off x="3065068" y="2139696"/>
+            <a:off x="3065068" y="1874520"/>
             <a:ext cx="1510588" cy="292608"/>
           </a:xfrm>
           <a:prstGeom prst="rect">
@@ -6875,7 +6875,7 @@
         </p:nvSpPr>
         <p:spPr>
           <a:xfrm>
-            <a:off x="3074212" y="2478024"/>
+            <a:off x="3074212" y="2212848"/>
             <a:ext cx="1492300" cy="310896"/>
           </a:xfrm>
           <a:prstGeom prst="rect">
@@ -6916,7 +6916,7 @@
         </p:nvSpPr>
         <p:spPr>
           <a:xfrm>
-            <a:off x="3074212" y="2706624"/>
+            <a:off x="3074212" y="2441448"/>
             <a:ext cx="1492300" cy="201168"/>
           </a:xfrm>
           <a:prstGeom prst="rect">
@@ -6957,176 +6957,7 @@
         </p:nvSpPr>
         <p:spPr>
           <a:xfrm>
-            <a:off x="5215737" y="2020824"/>
-            <a:ext cx="1766620" cy="932688"/>
-          </a:xfrm>
-          <a:prstGeom prst="rect">
-            <a:avLst/>
-          </a:prstGeom>
-          <a:solidFill>
-            <a:srgbClr val="182C43"/>
-          </a:solidFill>
-          <a:ln w="9525">
-            <a:solidFill>
-              <a:srgbClr val="182C43"/>
-            </a:solidFill>
-          </a:ln>
-          <a:effectLst/>
-        </p:spPr>
-        <p:style>
-          <a:lnRef idx="1">
-            <a:schemeClr val="accent1"/>
-          </a:lnRef>
-          <a:fillRef idx="3">
-            <a:schemeClr val="accent1"/>
-          </a:fillRef>
-          <a:effectRef idx="2">
-            <a:schemeClr val="accent1"/>
-          </a:effectRef>
-          <a:fontRef idx="minor">
-            <a:schemeClr val="lt1"/>
-          </a:fontRef>
-        </p:style>
-        <p:txBody>
-          <a:bodyPr rtlCol="0" anchor="ctr"/>
-          <a:lstStyle/>
-          <a:p>
-            <a:pPr algn="ctr"/>
-          </a:p>
-        </p:txBody>
-      </p:sp>
-      <p:sp>
-        <p:nvSpPr>
-          <p:cNvPr id="24" name="TextBox 23"/>
-          <p:cNvSpPr txBox="1"/>
-          <p:nvPr/>
-        </p:nvSpPr>
-        <p:spPr>
-          <a:xfrm>
-            <a:off x="5343753" y="2139696"/>
-            <a:ext cx="1510588" cy="292608"/>
-          </a:xfrm>
-          <a:prstGeom prst="rect">
-            <a:avLst/>
-          </a:prstGeom>
-          <a:noFill/>
-        </p:spPr>
-        <p:txBody>
-          <a:bodyPr wrap="square" anchor="t" lIns="0" rIns="0" tIns="0" bIns="0">
-            <a:spAutoFit/>
-          </a:bodyPr>
-          <a:lstStyle/>
-          <a:p>
-            <a:pPr algn="ctr">
-              <a:lnSpc>
-                <a:spcPct val="130000"/>
-              </a:lnSpc>
-            </a:pPr>
-            <a:r>
-              <a:rPr sz="1400" b="1" lang="ja-JP">
-                <a:solidFill>
-                  <a:srgbClr val="FFFFFC"/>
-                </a:solidFill>
-                <a:latin typeface="Yu Gothic"/>
-                <a:ea typeface="Yu Gothic"/>
-                <a:cs typeface="Yu Gothic"/>
-              </a:rPr>
-              <a:t>内容審査</a:t>
-            </a:r>
-          </a:p>
-        </p:txBody>
-      </p:sp>
-      <p:sp>
-        <p:nvSpPr>
-          <p:cNvPr id="25" name="TextBox 24"/>
-          <p:cNvSpPr txBox="1"/>
-          <p:nvPr/>
-        </p:nvSpPr>
-        <p:spPr>
-          <a:xfrm>
-            <a:off x="5352897" y="2478024"/>
-            <a:ext cx="1492300" cy="310896"/>
-          </a:xfrm>
-          <a:prstGeom prst="rect">
-            <a:avLst/>
-          </a:prstGeom>
-          <a:noFill/>
-        </p:spPr>
-        <p:txBody>
-          <a:bodyPr wrap="square" anchor="t" lIns="0" rIns="0" tIns="0" bIns="0">
-            <a:spAutoFit/>
-          </a:bodyPr>
-          <a:lstStyle/>
-          <a:p>
-            <a:pPr algn="ctr">
-              <a:lnSpc>
-                <a:spcPct val="112000"/>
-              </a:lnSpc>
-            </a:pPr>
-            <a:r>
-              <a:rPr sz="1200" b="0" lang="ja-JP">
-                <a:solidFill>
-                  <a:srgbClr val="DFEBE8"/>
-                </a:solidFill>
-                <a:latin typeface="Yu Gothic"/>
-                <a:ea typeface="Yu Gothic"/>
-                <a:cs typeface="Yu Gothic"/>
-              </a:rPr>
-              <a:t>リスクと効果を評価</a:t>
-            </a:r>
-          </a:p>
-        </p:txBody>
-      </p:sp>
-      <p:sp>
-        <p:nvSpPr>
-          <p:cNvPr id="26" name="TextBox 25"/>
-          <p:cNvSpPr txBox="1"/>
-          <p:nvPr/>
-        </p:nvSpPr>
-        <p:spPr>
-          <a:xfrm>
-            <a:off x="5352897" y="2706624"/>
-            <a:ext cx="1492300" cy="201168"/>
-          </a:xfrm>
-          <a:prstGeom prst="rect">
-            <a:avLst/>
-          </a:prstGeom>
-          <a:noFill/>
-        </p:spPr>
-        <p:txBody>
-          <a:bodyPr wrap="square" anchor="t" lIns="0" rIns="0" tIns="0" bIns="0">
-            <a:spAutoFit/>
-          </a:bodyPr>
-          <a:lstStyle/>
-          <a:p>
-            <a:pPr algn="ctr">
-              <a:lnSpc>
-                <a:spcPct val="130000"/>
-              </a:lnSpc>
-            </a:pPr>
-            <a:r>
-              <a:rPr sz="950" b="1" lang="ja-JP">
-                <a:solidFill>
-                  <a:srgbClr val="FFFFFC"/>
-                </a:solidFill>
-                <a:latin typeface="Yu Gothic"/>
-                <a:ea typeface="Yu Gothic"/>
-                <a:cs typeface="Yu Gothic"/>
-              </a:rPr>
-              <a:t>審査会</a:t>
-            </a:r>
-          </a:p>
-        </p:txBody>
-      </p:sp>
-      <p:sp>
-        <p:nvSpPr>
-          <p:cNvPr id="27" name="Rectangle 26"/>
-          <p:cNvSpPr/>
-          <p:nvPr/>
-        </p:nvSpPr>
-        <p:spPr>
-          <a:xfrm>
-            <a:off x="7494422" y="2020824"/>
+            <a:off x="5215737" y="1755648"/>
             <a:ext cx="1766620" cy="932688"/>
           </a:xfrm>
           <a:prstGeom prst="rect">
@@ -7166,13 +6997,182 @@
       </p:sp>
       <p:sp>
         <p:nvSpPr>
+          <p:cNvPr id="24" name="TextBox 23"/>
+          <p:cNvSpPr txBox="1"/>
+          <p:nvPr/>
+        </p:nvSpPr>
+        <p:spPr>
+          <a:xfrm>
+            <a:off x="5343753" y="1874520"/>
+            <a:ext cx="1510588" cy="292608"/>
+          </a:xfrm>
+          <a:prstGeom prst="rect">
+            <a:avLst/>
+          </a:prstGeom>
+          <a:noFill/>
+        </p:spPr>
+        <p:txBody>
+          <a:bodyPr wrap="square" anchor="t" lIns="0" rIns="0" tIns="0" bIns="0">
+            <a:spAutoFit/>
+          </a:bodyPr>
+          <a:lstStyle/>
+          <a:p>
+            <a:pPr algn="ctr">
+              <a:lnSpc>
+                <a:spcPct val="130000"/>
+              </a:lnSpc>
+            </a:pPr>
+            <a:r>
+              <a:rPr sz="1400" b="1" lang="ja-JP">
+                <a:solidFill>
+                  <a:srgbClr val="182C43"/>
+                </a:solidFill>
+                <a:latin typeface="Yu Gothic"/>
+                <a:ea typeface="Yu Gothic"/>
+                <a:cs typeface="Yu Gothic"/>
+              </a:rPr>
+              <a:t>内容審査</a:t>
+            </a:r>
+          </a:p>
+        </p:txBody>
+      </p:sp>
+      <p:sp>
+        <p:nvSpPr>
+          <p:cNvPr id="25" name="TextBox 24"/>
+          <p:cNvSpPr txBox="1"/>
+          <p:nvPr/>
+        </p:nvSpPr>
+        <p:spPr>
+          <a:xfrm>
+            <a:off x="5352897" y="2212848"/>
+            <a:ext cx="1492300" cy="310896"/>
+          </a:xfrm>
+          <a:prstGeom prst="rect">
+            <a:avLst/>
+          </a:prstGeom>
+          <a:noFill/>
+        </p:spPr>
+        <p:txBody>
+          <a:bodyPr wrap="square" anchor="t" lIns="0" rIns="0" tIns="0" bIns="0">
+            <a:spAutoFit/>
+          </a:bodyPr>
+          <a:lstStyle/>
+          <a:p>
+            <a:pPr algn="ctr">
+              <a:lnSpc>
+                <a:spcPct val="112000"/>
+              </a:lnSpc>
+            </a:pPr>
+            <a:r>
+              <a:rPr sz="1200" b="0" lang="ja-JP">
+                <a:solidFill>
+                  <a:srgbClr val="202729"/>
+                </a:solidFill>
+                <a:latin typeface="Yu Gothic"/>
+                <a:ea typeface="Yu Gothic"/>
+                <a:cs typeface="Yu Gothic"/>
+              </a:rPr>
+              <a:t>リスクと効果を評価</a:t>
+            </a:r>
+          </a:p>
+        </p:txBody>
+      </p:sp>
+      <p:sp>
+        <p:nvSpPr>
+          <p:cNvPr id="26" name="TextBox 25"/>
+          <p:cNvSpPr txBox="1"/>
+          <p:nvPr/>
+        </p:nvSpPr>
+        <p:spPr>
+          <a:xfrm>
+            <a:off x="5352897" y="2441448"/>
+            <a:ext cx="1492300" cy="201168"/>
+          </a:xfrm>
+          <a:prstGeom prst="rect">
+            <a:avLst/>
+          </a:prstGeom>
+          <a:noFill/>
+        </p:spPr>
+        <p:txBody>
+          <a:bodyPr wrap="square" anchor="t" lIns="0" rIns="0" tIns="0" bIns="0">
+            <a:spAutoFit/>
+          </a:bodyPr>
+          <a:lstStyle/>
+          <a:p>
+            <a:pPr algn="ctr">
+              <a:lnSpc>
+                <a:spcPct val="130000"/>
+              </a:lnSpc>
+            </a:pPr>
+            <a:r>
+              <a:rPr sz="950" b="1" lang="ja-JP">
+                <a:solidFill>
+                  <a:srgbClr val="0D7870"/>
+                </a:solidFill>
+                <a:latin typeface="Yu Gothic"/>
+                <a:ea typeface="Yu Gothic"/>
+                <a:cs typeface="Yu Gothic"/>
+              </a:rPr>
+              <a:t>審査会</a:t>
+            </a:r>
+          </a:p>
+        </p:txBody>
+      </p:sp>
+      <p:sp>
+        <p:nvSpPr>
+          <p:cNvPr id="27" name="Rectangle 26"/>
+          <p:cNvSpPr/>
+          <p:nvPr/>
+        </p:nvSpPr>
+        <p:spPr>
+          <a:xfrm>
+            <a:off x="7494422" y="1755648"/>
+            <a:ext cx="1766620" cy="932688"/>
+          </a:xfrm>
+          <a:prstGeom prst="rect">
+            <a:avLst/>
+          </a:prstGeom>
+          <a:solidFill>
+            <a:srgbClr val="FFFFFC"/>
+          </a:solidFill>
+          <a:ln w="9525">
+            <a:solidFill>
+              <a:srgbClr val="0D7870"/>
+            </a:solidFill>
+          </a:ln>
+          <a:effectLst/>
+        </p:spPr>
+        <p:style>
+          <a:lnRef idx="1">
+            <a:schemeClr val="accent1"/>
+          </a:lnRef>
+          <a:fillRef idx="3">
+            <a:schemeClr val="accent1"/>
+          </a:fillRef>
+          <a:effectRef idx="2">
+            <a:schemeClr val="accent1"/>
+          </a:effectRef>
+          <a:fontRef idx="minor">
+            <a:schemeClr val="lt1"/>
+          </a:fontRef>
+        </p:style>
+        <p:txBody>
+          <a:bodyPr rtlCol="0" anchor="ctr"/>
+          <a:lstStyle/>
+          <a:p>
+            <a:pPr algn="ctr"/>
+          </a:p>
+        </p:txBody>
+      </p:sp>
+      <p:sp>
+        <p:nvSpPr>
           <p:cNvPr id="28" name="TextBox 27"/>
           <p:cNvSpPr txBox="1"/>
           <p:nvPr/>
         </p:nvSpPr>
         <p:spPr>
           <a:xfrm>
-            <a:off x="7622438" y="2139696"/>
+            <a:off x="7622438" y="1874520"/>
             <a:ext cx="1510588" cy="292608"/>
           </a:xfrm>
           <a:prstGeom prst="rect">
@@ -7213,7 +7213,7 @@
         </p:nvSpPr>
         <p:spPr>
           <a:xfrm>
-            <a:off x="7631582" y="2478024"/>
+            <a:off x="7631582" y="2212848"/>
             <a:ext cx="1492300" cy="457200"/>
           </a:xfrm>
           <a:prstGeom prst="rect">
@@ -7254,7 +7254,7 @@
         </p:nvSpPr>
         <p:spPr>
           <a:xfrm>
-            <a:off x="7494422" y="3264408"/>
+            <a:off x="7494422" y="2999232"/>
             <a:ext cx="1766620" cy="932688"/>
           </a:xfrm>
           <a:prstGeom prst="rect">
@@ -7300,7 +7300,7 @@
         </p:nvSpPr>
         <p:spPr>
           <a:xfrm>
-            <a:off x="7622438" y="3383280"/>
+            <a:off x="7622438" y="3118104"/>
             <a:ext cx="1510588" cy="292608"/>
           </a:xfrm>
           <a:prstGeom prst="rect">
@@ -7341,7 +7341,7 @@
         </p:nvSpPr>
         <p:spPr>
           <a:xfrm>
-            <a:off x="7631582" y="3721608"/>
+            <a:off x="7631582" y="3456432"/>
             <a:ext cx="1492300" cy="310896"/>
           </a:xfrm>
           <a:prstGeom prst="rect">
@@ -7382,7 +7382,7 @@
         </p:nvSpPr>
         <p:spPr>
           <a:xfrm>
-            <a:off x="7631582" y="3950208"/>
+            <a:off x="7631582" y="3685032"/>
             <a:ext cx="1492300" cy="201168"/>
           </a:xfrm>
           <a:prstGeom prst="rect">
@@ -7423,7 +7423,7 @@
         </p:nvSpPr>
         <p:spPr>
           <a:xfrm>
-            <a:off x="9773107" y="2020824"/>
+            <a:off x="9773107" y="1755648"/>
             <a:ext cx="1766620" cy="932688"/>
           </a:xfrm>
           <a:prstGeom prst="rect">
@@ -7469,7 +7469,7 @@
         </p:nvSpPr>
         <p:spPr>
           <a:xfrm>
-            <a:off x="9901123" y="2139696"/>
+            <a:off x="9901123" y="1874520"/>
             <a:ext cx="1510588" cy="292608"/>
           </a:xfrm>
           <a:prstGeom prst="rect">
@@ -7510,7 +7510,7 @@
         </p:nvSpPr>
         <p:spPr>
           <a:xfrm>
-            <a:off x="9910267" y="2478024"/>
+            <a:off x="9910267" y="2212848"/>
             <a:ext cx="1492300" cy="310896"/>
           </a:xfrm>
           <a:prstGeom prst="rect">
@@ -7551,7 +7551,7 @@
         </p:nvSpPr>
         <p:spPr>
           <a:xfrm>
-            <a:off x="9910267" y="2706624"/>
+            <a:off x="9910267" y="2441448"/>
             <a:ext cx="1492300" cy="201168"/>
           </a:xfrm>
           <a:prstGeom prst="rect">
@@ -7592,7 +7592,7 @@
         </p:nvSpPr>
         <p:spPr>
           <a:xfrm>
-            <a:off x="7079513" y="2409507"/>
+            <a:off x="7079513" y="2144331"/>
             <a:ext cx="317754" cy="155321"/>
           </a:xfrm>
           <a:prstGeom prst="rect">
@@ -7635,7 +7635,7 @@
         </p:nvSpPr>
         <p:spPr>
           <a:xfrm>
-            <a:off x="7022934" y="3653091"/>
+            <a:off x="7022934" y="3387915"/>
             <a:ext cx="430911" cy="155321"/>
           </a:xfrm>
           <a:prstGeom prst="rect">
@@ -7678,7 +7678,7 @@
         </p:nvSpPr>
         <p:spPr>
           <a:xfrm>
-            <a:off x="5883592" y="4521771"/>
+            <a:off x="5883592" y="4293171"/>
             <a:ext cx="430911" cy="155321"/>
           </a:xfrm>
           <a:prstGeom prst="rect">
@@ -18015,13 +18015,13 @@
         </p:nvCxnSpPr>
         <p:spPr>
           <a:xfrm>
-            <a:off x="3267379" y="2441448"/>
-            <a:ext cx="6648527" cy="0"/>
+            <a:off x="3267379" y="2286000"/>
+            <a:ext cx="0" cy="155448"/>
           </a:xfrm>
           <a:prstGeom prst="line">
             <a:avLst/>
           </a:prstGeom>
-          <a:ln w="13970">
+          <a:ln w="15875">
             <a:solidFill>
               <a:srgbClr val="6C7372"/>
             </a:solidFill>
@@ -18051,13 +18051,13 @@
         </p:nvCxnSpPr>
         <p:spPr>
           <a:xfrm>
-            <a:off x="3267379" y="2286000"/>
-            <a:ext cx="0" cy="155448"/>
+            <a:off x="3267379" y="2441448"/>
+            <a:ext cx="2828468" cy="0"/>
           </a:xfrm>
           <a:prstGeom prst="line">
             <a:avLst/>
           </a:prstGeom>
-          <a:ln w="13970">
+          <a:ln w="15875">
             <a:solidFill>
               <a:srgbClr val="6C7372"/>
             </a:solidFill>
@@ -18087,16 +18087,17 @@
         </p:nvCxnSpPr>
         <p:spPr>
           <a:xfrm>
-            <a:off x="8924315" y="2286000"/>
+            <a:off x="6095847" y="2441448"/>
             <a:ext cx="0" cy="155448"/>
           </a:xfrm>
           <a:prstGeom prst="line">
             <a:avLst/>
           </a:prstGeom>
-          <a:ln w="13970">
+          <a:ln w="15875">
             <a:solidFill>
               <a:srgbClr val="6C7372"/>
             </a:solidFill>
+            <a:tailEnd type="triangle" w="med" len="med"/>
           </a:ln>
           <a:effectLst/>
         </p:spPr>
@@ -18123,17 +18124,16 @@
         </p:nvCxnSpPr>
         <p:spPr>
           <a:xfrm>
-            <a:off x="6095847" y="2441448"/>
+            <a:off x="8924315" y="2286000"/>
             <a:ext cx="0" cy="155448"/>
           </a:xfrm>
           <a:prstGeom prst="line">
             <a:avLst/>
           </a:prstGeom>
-          <a:ln w="13970">
+          <a:ln w="15875">
             <a:solidFill>
               <a:srgbClr val="6C7372"/>
             </a:solidFill>
-            <a:tailEnd type="triangle" w="med" len="med"/>
           </a:ln>
           <a:effectLst/>
         </p:spPr>
@@ -18159,18 +18159,17 @@
           <p:nvPr/>
         </p:nvCxnSpPr>
         <p:spPr>
-          <a:xfrm>
-            <a:off x="9915906" y="2441448"/>
-            <a:ext cx="0" cy="155448"/>
+          <a:xfrm flipH="1">
+            <a:off x="6095847" y="2441448"/>
+            <a:ext cx="2828468" cy="0"/>
           </a:xfrm>
           <a:prstGeom prst="line">
             <a:avLst/>
           </a:prstGeom>
-          <a:ln w="13970">
+          <a:ln w="15875">
             <a:solidFill>
               <a:srgbClr val="6C7372"/>
             </a:solidFill>
-            <a:tailEnd type="triangle" w="med" len="med"/>
           </a:ln>
           <a:effectLst/>
         </p:spPr>
@@ -18197,16 +18196,17 @@
         </p:nvCxnSpPr>
         <p:spPr>
           <a:xfrm>
-            <a:off x="2324557" y="3520439"/>
-            <a:ext cx="7591349" cy="0"/>
+            <a:off x="6095847" y="2441448"/>
+            <a:ext cx="0" cy="155448"/>
           </a:xfrm>
           <a:prstGeom prst="line">
             <a:avLst/>
           </a:prstGeom>
-          <a:ln w="13970">
+          <a:ln w="15875">
             <a:solidFill>
               <a:srgbClr val="6C7372"/>
             </a:solidFill>
+            <a:tailEnd type="triangle" w="med" len="med"/>
           </a:ln>
           <a:effectLst/>
         </p:spPr>
@@ -18233,13 +18233,13 @@
         </p:nvCxnSpPr>
         <p:spPr>
           <a:xfrm>
-            <a:off x="6095847" y="3364991"/>
+            <a:off x="8924315" y="2286000"/>
             <a:ext cx="0" cy="155448"/>
           </a:xfrm>
           <a:prstGeom prst="line">
             <a:avLst/>
           </a:prstGeom>
-          <a:ln w="13970">
+          <a:ln w="15875">
             <a:solidFill>
               <a:srgbClr val="6C7372"/>
             </a:solidFill>
@@ -18269,13 +18269,13 @@
         </p:nvCxnSpPr>
         <p:spPr>
           <a:xfrm>
-            <a:off x="9915906" y="3364991"/>
-            <a:ext cx="0" cy="155448"/>
+            <a:off x="8924315" y="2441448"/>
+            <a:ext cx="991591" cy="0"/>
           </a:xfrm>
           <a:prstGeom prst="line">
             <a:avLst/>
           </a:prstGeom>
-          <a:ln w="13970">
+          <a:ln w="15875">
             <a:solidFill>
               <a:srgbClr val="6C7372"/>
             </a:solidFill>
@@ -18305,13 +18305,13 @@
         </p:nvCxnSpPr>
         <p:spPr>
           <a:xfrm>
-            <a:off x="2324557" y="3520439"/>
+            <a:off x="9915906" y="2441448"/>
             <a:ext cx="0" cy="155448"/>
           </a:xfrm>
           <a:prstGeom prst="line">
             <a:avLst/>
           </a:prstGeom>
-          <a:ln w="13970">
+          <a:ln w="15875">
             <a:solidFill>
               <a:srgbClr val="6C7372"/>
             </a:solidFill>
@@ -18342,17 +18342,16 @@
         </p:nvCxnSpPr>
         <p:spPr>
           <a:xfrm>
-            <a:off x="6095847" y="3520439"/>
+            <a:off x="6095847" y="3364991"/>
             <a:ext cx="0" cy="155448"/>
           </a:xfrm>
           <a:prstGeom prst="line">
             <a:avLst/>
           </a:prstGeom>
-          <a:ln w="13970">
+          <a:ln w="15875">
             <a:solidFill>
               <a:srgbClr val="6C7372"/>
             </a:solidFill>
-            <a:tailEnd type="triangle" w="med" len="med"/>
           </a:ln>
           <a:effectLst/>
         </p:spPr>
@@ -18378,18 +18377,17 @@
           <p:nvPr/>
         </p:nvCxnSpPr>
         <p:spPr>
-          <a:xfrm>
-            <a:off x="9867138" y="3520439"/>
-            <a:ext cx="0" cy="155448"/>
+          <a:xfrm flipH="1">
+            <a:off x="2324557" y="3520439"/>
+            <a:ext cx="3771290" cy="0"/>
           </a:xfrm>
           <a:prstGeom prst="line">
             <a:avLst/>
           </a:prstGeom>
-          <a:ln w="13970">
+          <a:ln w="15875">
             <a:solidFill>
               <a:srgbClr val="6C7372"/>
             </a:solidFill>
-            <a:tailEnd type="triangle" w="med" len="med"/>
           </a:ln>
           <a:effectLst/>
         </p:spPr>
@@ -18416,16 +18414,17 @@
         </p:nvCxnSpPr>
         <p:spPr>
           <a:xfrm>
-            <a:off x="3207943" y="4983479"/>
-            <a:ext cx="6659195" cy="0"/>
+            <a:off x="2324557" y="3520439"/>
+            <a:ext cx="0" cy="155448"/>
           </a:xfrm>
           <a:prstGeom prst="line">
             <a:avLst/>
           </a:prstGeom>
-          <a:ln w="13970">
+          <a:ln w="15875">
             <a:solidFill>
               <a:srgbClr val="6C7372"/>
             </a:solidFill>
+            <a:tailEnd type="triangle" w="med" len="med"/>
           </a:ln>
           <a:effectLst/>
         </p:spPr>
@@ -18452,13 +18451,13 @@
         </p:nvCxnSpPr>
         <p:spPr>
           <a:xfrm>
-            <a:off x="6095847" y="4828031"/>
+            <a:off x="6095847" y="3364991"/>
             <a:ext cx="0" cy="155448"/>
           </a:xfrm>
           <a:prstGeom prst="line">
             <a:avLst/>
           </a:prstGeom>
-          <a:ln w="13970">
+          <a:ln w="15875">
             <a:solidFill>
               <a:srgbClr val="6C7372"/>
             </a:solidFill>
@@ -18488,13 +18487,13 @@
         </p:nvCxnSpPr>
         <p:spPr>
           <a:xfrm>
-            <a:off x="9867138" y="4828031"/>
-            <a:ext cx="0" cy="155448"/>
+            <a:off x="6095847" y="3520439"/>
+            <a:ext cx="0" cy="0"/>
           </a:xfrm>
           <a:prstGeom prst="line">
             <a:avLst/>
           </a:prstGeom>
-          <a:ln w="13970">
+          <a:ln w="15875">
             <a:solidFill>
               <a:srgbClr val="6C7372"/>
             </a:solidFill>
@@ -18524,13 +18523,13 @@
         </p:nvCxnSpPr>
         <p:spPr>
           <a:xfrm>
-            <a:off x="3207943" y="4983479"/>
+            <a:off x="6095847" y="3520439"/>
             <a:ext cx="0" cy="155448"/>
           </a:xfrm>
           <a:prstGeom prst="line">
             <a:avLst/>
           </a:prstGeom>
-          <a:ln w="13970">
+          <a:ln w="15875">
             <a:solidFill>
               <a:srgbClr val="6C7372"/>
             </a:solidFill>
@@ -18553,9 +18552,445 @@
           </a:fontRef>
         </p:style>
       </p:cxnSp>
-      <p:sp>
-        <p:nvSpPr>
-          <p:cNvPr id="20" name="Rectangle 19"/>
+      <p:cxnSp>
+        <p:nvCxnSpPr>
+          <p:cNvPr id="20" name="Connector 19"/>
+          <p:cNvCxnSpPr/>
+          <p:nvPr/>
+        </p:nvCxnSpPr>
+        <p:spPr>
+          <a:xfrm>
+            <a:off x="6095847" y="3364991"/>
+            <a:ext cx="0" cy="155448"/>
+          </a:xfrm>
+          <a:prstGeom prst="line">
+            <a:avLst/>
+          </a:prstGeom>
+          <a:ln w="15875">
+            <a:solidFill>
+              <a:srgbClr val="6C7372"/>
+            </a:solidFill>
+          </a:ln>
+          <a:effectLst/>
+        </p:spPr>
+        <p:style>
+          <a:lnRef idx="2">
+            <a:schemeClr val="accent1"/>
+          </a:lnRef>
+          <a:fillRef idx="0">
+            <a:schemeClr val="accent1"/>
+          </a:fillRef>
+          <a:effectRef idx="1">
+            <a:schemeClr val="accent1"/>
+          </a:effectRef>
+          <a:fontRef idx="minor">
+            <a:schemeClr val="tx1"/>
+          </a:fontRef>
+        </p:style>
+      </p:cxnSp>
+      <p:cxnSp>
+        <p:nvCxnSpPr>
+          <p:cNvPr id="21" name="Connector 20"/>
+          <p:cNvCxnSpPr/>
+          <p:nvPr/>
+        </p:nvCxnSpPr>
+        <p:spPr>
+          <a:xfrm>
+            <a:off x="6095847" y="3520439"/>
+            <a:ext cx="3771291" cy="0"/>
+          </a:xfrm>
+          <a:prstGeom prst="line">
+            <a:avLst/>
+          </a:prstGeom>
+          <a:ln w="15875">
+            <a:solidFill>
+              <a:srgbClr val="6C7372"/>
+            </a:solidFill>
+          </a:ln>
+          <a:effectLst/>
+        </p:spPr>
+        <p:style>
+          <a:lnRef idx="2">
+            <a:schemeClr val="accent1"/>
+          </a:lnRef>
+          <a:fillRef idx="0">
+            <a:schemeClr val="accent1"/>
+          </a:fillRef>
+          <a:effectRef idx="1">
+            <a:schemeClr val="accent1"/>
+          </a:effectRef>
+          <a:fontRef idx="minor">
+            <a:schemeClr val="tx1"/>
+          </a:fontRef>
+        </p:style>
+      </p:cxnSp>
+      <p:cxnSp>
+        <p:nvCxnSpPr>
+          <p:cNvPr id="22" name="Connector 21"/>
+          <p:cNvCxnSpPr/>
+          <p:nvPr/>
+        </p:nvCxnSpPr>
+        <p:spPr>
+          <a:xfrm>
+            <a:off x="9867138" y="3520439"/>
+            <a:ext cx="0" cy="155448"/>
+          </a:xfrm>
+          <a:prstGeom prst="line">
+            <a:avLst/>
+          </a:prstGeom>
+          <a:ln w="15875">
+            <a:solidFill>
+              <a:srgbClr val="6C7372"/>
+            </a:solidFill>
+            <a:tailEnd type="triangle" w="med" len="med"/>
+          </a:ln>
+          <a:effectLst/>
+        </p:spPr>
+        <p:style>
+          <a:lnRef idx="2">
+            <a:schemeClr val="accent1"/>
+          </a:lnRef>
+          <a:fillRef idx="0">
+            <a:schemeClr val="accent1"/>
+          </a:fillRef>
+          <a:effectRef idx="1">
+            <a:schemeClr val="accent1"/>
+          </a:effectRef>
+          <a:fontRef idx="minor">
+            <a:schemeClr val="tx1"/>
+          </a:fontRef>
+        </p:style>
+      </p:cxnSp>
+      <p:cxnSp>
+        <p:nvCxnSpPr>
+          <p:cNvPr id="23" name="Connector 22"/>
+          <p:cNvCxnSpPr/>
+          <p:nvPr/>
+        </p:nvCxnSpPr>
+        <p:spPr>
+          <a:xfrm>
+            <a:off x="9915906" y="3364991"/>
+            <a:ext cx="0" cy="155448"/>
+          </a:xfrm>
+          <a:prstGeom prst="line">
+            <a:avLst/>
+          </a:prstGeom>
+          <a:ln w="15875">
+            <a:solidFill>
+              <a:srgbClr val="6C7372"/>
+            </a:solidFill>
+          </a:ln>
+          <a:effectLst/>
+        </p:spPr>
+        <p:style>
+          <a:lnRef idx="2">
+            <a:schemeClr val="accent1"/>
+          </a:lnRef>
+          <a:fillRef idx="0">
+            <a:schemeClr val="accent1"/>
+          </a:fillRef>
+          <a:effectRef idx="1">
+            <a:schemeClr val="accent1"/>
+          </a:effectRef>
+          <a:fontRef idx="minor">
+            <a:schemeClr val="tx1"/>
+          </a:fontRef>
+        </p:style>
+      </p:cxnSp>
+      <p:cxnSp>
+        <p:nvCxnSpPr>
+          <p:cNvPr id="24" name="Connector 23"/>
+          <p:cNvCxnSpPr/>
+          <p:nvPr/>
+        </p:nvCxnSpPr>
+        <p:spPr>
+          <a:xfrm flipH="1">
+            <a:off x="6095847" y="3520439"/>
+            <a:ext cx="3820059" cy="0"/>
+          </a:xfrm>
+          <a:prstGeom prst="line">
+            <a:avLst/>
+          </a:prstGeom>
+          <a:ln w="15875">
+            <a:solidFill>
+              <a:srgbClr val="6C7372"/>
+            </a:solidFill>
+          </a:ln>
+          <a:effectLst/>
+        </p:spPr>
+        <p:style>
+          <a:lnRef idx="2">
+            <a:schemeClr val="accent1"/>
+          </a:lnRef>
+          <a:fillRef idx="0">
+            <a:schemeClr val="accent1"/>
+          </a:fillRef>
+          <a:effectRef idx="1">
+            <a:schemeClr val="accent1"/>
+          </a:effectRef>
+          <a:fontRef idx="minor">
+            <a:schemeClr val="tx1"/>
+          </a:fontRef>
+        </p:style>
+      </p:cxnSp>
+      <p:cxnSp>
+        <p:nvCxnSpPr>
+          <p:cNvPr id="25" name="Connector 24"/>
+          <p:cNvCxnSpPr/>
+          <p:nvPr/>
+        </p:nvCxnSpPr>
+        <p:spPr>
+          <a:xfrm>
+            <a:off x="6095847" y="3520439"/>
+            <a:ext cx="0" cy="155448"/>
+          </a:xfrm>
+          <a:prstGeom prst="line">
+            <a:avLst/>
+          </a:prstGeom>
+          <a:ln w="15875">
+            <a:solidFill>
+              <a:srgbClr val="6C7372"/>
+            </a:solidFill>
+            <a:tailEnd type="triangle" w="med" len="med"/>
+          </a:ln>
+          <a:effectLst/>
+        </p:spPr>
+        <p:style>
+          <a:lnRef idx="2">
+            <a:schemeClr val="accent1"/>
+          </a:lnRef>
+          <a:fillRef idx="0">
+            <a:schemeClr val="accent1"/>
+          </a:fillRef>
+          <a:effectRef idx="1">
+            <a:schemeClr val="accent1"/>
+          </a:effectRef>
+          <a:fontRef idx="minor">
+            <a:schemeClr val="tx1"/>
+          </a:fontRef>
+        </p:style>
+      </p:cxnSp>
+      <p:cxnSp>
+        <p:nvCxnSpPr>
+          <p:cNvPr id="26" name="Connector 25"/>
+          <p:cNvCxnSpPr/>
+          <p:nvPr/>
+        </p:nvCxnSpPr>
+        <p:spPr>
+          <a:xfrm>
+            <a:off x="6095847" y="4828031"/>
+            <a:ext cx="0" cy="155448"/>
+          </a:xfrm>
+          <a:prstGeom prst="line">
+            <a:avLst/>
+          </a:prstGeom>
+          <a:ln w="15875">
+            <a:solidFill>
+              <a:srgbClr val="6C7372"/>
+            </a:solidFill>
+          </a:ln>
+          <a:effectLst/>
+        </p:spPr>
+        <p:style>
+          <a:lnRef idx="2">
+            <a:schemeClr val="accent1"/>
+          </a:lnRef>
+          <a:fillRef idx="0">
+            <a:schemeClr val="accent1"/>
+          </a:fillRef>
+          <a:effectRef idx="1">
+            <a:schemeClr val="accent1"/>
+          </a:effectRef>
+          <a:fontRef idx="minor">
+            <a:schemeClr val="tx1"/>
+          </a:fontRef>
+        </p:style>
+      </p:cxnSp>
+      <p:cxnSp>
+        <p:nvCxnSpPr>
+          <p:cNvPr id="27" name="Connector 26"/>
+          <p:cNvCxnSpPr/>
+          <p:nvPr/>
+        </p:nvCxnSpPr>
+        <p:spPr>
+          <a:xfrm flipH="1">
+            <a:off x="3207943" y="4983479"/>
+            <a:ext cx="2887904" cy="0"/>
+          </a:xfrm>
+          <a:prstGeom prst="line">
+            <a:avLst/>
+          </a:prstGeom>
+          <a:ln w="15875">
+            <a:solidFill>
+              <a:srgbClr val="6C7372"/>
+            </a:solidFill>
+          </a:ln>
+          <a:effectLst/>
+        </p:spPr>
+        <p:style>
+          <a:lnRef idx="2">
+            <a:schemeClr val="accent1"/>
+          </a:lnRef>
+          <a:fillRef idx="0">
+            <a:schemeClr val="accent1"/>
+          </a:fillRef>
+          <a:effectRef idx="1">
+            <a:schemeClr val="accent1"/>
+          </a:effectRef>
+          <a:fontRef idx="minor">
+            <a:schemeClr val="tx1"/>
+          </a:fontRef>
+        </p:style>
+      </p:cxnSp>
+      <p:cxnSp>
+        <p:nvCxnSpPr>
+          <p:cNvPr id="28" name="Connector 27"/>
+          <p:cNvCxnSpPr/>
+          <p:nvPr/>
+        </p:nvCxnSpPr>
+        <p:spPr>
+          <a:xfrm>
+            <a:off x="3207943" y="4983479"/>
+            <a:ext cx="0" cy="155448"/>
+          </a:xfrm>
+          <a:prstGeom prst="line">
+            <a:avLst/>
+          </a:prstGeom>
+          <a:ln w="15875">
+            <a:solidFill>
+              <a:srgbClr val="6C7372"/>
+            </a:solidFill>
+            <a:tailEnd type="triangle" w="med" len="med"/>
+          </a:ln>
+          <a:effectLst/>
+        </p:spPr>
+        <p:style>
+          <a:lnRef idx="2">
+            <a:schemeClr val="accent1"/>
+          </a:lnRef>
+          <a:fillRef idx="0">
+            <a:schemeClr val="accent1"/>
+          </a:fillRef>
+          <a:effectRef idx="1">
+            <a:schemeClr val="accent1"/>
+          </a:effectRef>
+          <a:fontRef idx="minor">
+            <a:schemeClr val="tx1"/>
+          </a:fontRef>
+        </p:style>
+      </p:cxnSp>
+      <p:cxnSp>
+        <p:nvCxnSpPr>
+          <p:cNvPr id="29" name="Connector 28"/>
+          <p:cNvCxnSpPr/>
+          <p:nvPr/>
+        </p:nvCxnSpPr>
+        <p:spPr>
+          <a:xfrm>
+            <a:off x="9867138" y="4828031"/>
+            <a:ext cx="0" cy="155448"/>
+          </a:xfrm>
+          <a:prstGeom prst="line">
+            <a:avLst/>
+          </a:prstGeom>
+          <a:ln w="15875">
+            <a:solidFill>
+              <a:srgbClr val="6C7372"/>
+            </a:solidFill>
+          </a:ln>
+          <a:effectLst/>
+        </p:spPr>
+        <p:style>
+          <a:lnRef idx="2">
+            <a:schemeClr val="accent1"/>
+          </a:lnRef>
+          <a:fillRef idx="0">
+            <a:schemeClr val="accent1"/>
+          </a:fillRef>
+          <a:effectRef idx="1">
+            <a:schemeClr val="accent1"/>
+          </a:effectRef>
+          <a:fontRef idx="minor">
+            <a:schemeClr val="tx1"/>
+          </a:fontRef>
+        </p:style>
+      </p:cxnSp>
+      <p:cxnSp>
+        <p:nvCxnSpPr>
+          <p:cNvPr id="30" name="Connector 29"/>
+          <p:cNvCxnSpPr/>
+          <p:nvPr/>
+        </p:nvCxnSpPr>
+        <p:spPr>
+          <a:xfrm flipH="1">
+            <a:off x="3207943" y="4983479"/>
+            <a:ext cx="6659195" cy="0"/>
+          </a:xfrm>
+          <a:prstGeom prst="line">
+            <a:avLst/>
+          </a:prstGeom>
+          <a:ln w="15875">
+            <a:solidFill>
+              <a:srgbClr val="6C7372"/>
+            </a:solidFill>
+          </a:ln>
+          <a:effectLst/>
+        </p:spPr>
+        <p:style>
+          <a:lnRef idx="2">
+            <a:schemeClr val="accent1"/>
+          </a:lnRef>
+          <a:fillRef idx="0">
+            <a:schemeClr val="accent1"/>
+          </a:fillRef>
+          <a:effectRef idx="1">
+            <a:schemeClr val="accent1"/>
+          </a:effectRef>
+          <a:fontRef idx="minor">
+            <a:schemeClr val="tx1"/>
+          </a:fontRef>
+        </p:style>
+      </p:cxnSp>
+      <p:cxnSp>
+        <p:nvCxnSpPr>
+          <p:cNvPr id="31" name="Connector 30"/>
+          <p:cNvCxnSpPr/>
+          <p:nvPr/>
+        </p:nvCxnSpPr>
+        <p:spPr>
+          <a:xfrm>
+            <a:off x="3207943" y="4983479"/>
+            <a:ext cx="0" cy="155448"/>
+          </a:xfrm>
+          <a:prstGeom prst="line">
+            <a:avLst/>
+          </a:prstGeom>
+          <a:ln w="15875">
+            <a:solidFill>
+              <a:srgbClr val="6C7372"/>
+            </a:solidFill>
+            <a:tailEnd type="triangle" w="med" len="med"/>
+          </a:ln>
+          <a:effectLst/>
+        </p:spPr>
+        <p:style>
+          <a:lnRef idx="2">
+            <a:schemeClr val="accent1"/>
+          </a:lnRef>
+          <a:fillRef idx="0">
+            <a:schemeClr val="accent1"/>
+          </a:fillRef>
+          <a:effectRef idx="1">
+            <a:schemeClr val="accent1"/>
+          </a:effectRef>
+          <a:fontRef idx="minor">
+            <a:schemeClr val="tx1"/>
+          </a:fontRef>
+        </p:style>
+      </p:cxnSp>
+      <p:sp>
+        <p:nvSpPr>
+          <p:cNvPr id="32" name="Rectangle 31"/>
           <p:cNvSpPr/>
           <p:nvPr/>
         </p:nvSpPr>
@@ -18601,7 +19036,7 @@
       </p:sp>
       <p:sp>
         <p:nvSpPr>
-          <p:cNvPr id="21" name="TextBox 20"/>
+          <p:cNvPr id="33" name="TextBox 32"/>
           <p:cNvSpPr txBox="1"/>
           <p:nvPr/>
         </p:nvSpPr>
@@ -18642,7 +19077,7 @@
       </p:sp>
       <p:sp>
         <p:nvSpPr>
-          <p:cNvPr id="22" name="TextBox 21"/>
+          <p:cNvPr id="34" name="TextBox 33"/>
           <p:cNvSpPr txBox="1"/>
           <p:nvPr/>
         </p:nvSpPr>
@@ -18683,7 +19118,7 @@
       </p:sp>
       <p:sp>
         <p:nvSpPr>
-          <p:cNvPr id="23" name="Rectangle 22"/>
+          <p:cNvPr id="35" name="Rectangle 34"/>
           <p:cNvSpPr/>
           <p:nvPr/>
         </p:nvSpPr>
@@ -18729,7 +19164,7 @@
       </p:sp>
       <p:sp>
         <p:nvSpPr>
-          <p:cNvPr id="24" name="TextBox 23"/>
+          <p:cNvPr id="36" name="TextBox 35"/>
           <p:cNvSpPr txBox="1"/>
           <p:nvPr/>
         </p:nvSpPr>
@@ -18770,7 +19205,7 @@
       </p:sp>
       <p:sp>
         <p:nvSpPr>
-          <p:cNvPr id="25" name="TextBox 24"/>
+          <p:cNvPr id="37" name="TextBox 36"/>
           <p:cNvSpPr txBox="1"/>
           <p:nvPr/>
         </p:nvSpPr>
@@ -18811,7 +19246,7 @@
       </p:sp>
       <p:sp>
         <p:nvSpPr>
-          <p:cNvPr id="26" name="Rectangle 25"/>
+          <p:cNvPr id="38" name="Rectangle 37"/>
           <p:cNvSpPr/>
           <p:nvPr/>
         </p:nvSpPr>
@@ -18857,7 +19292,7 @@
       </p:sp>
       <p:sp>
         <p:nvSpPr>
-          <p:cNvPr id="27" name="TextBox 26"/>
+          <p:cNvPr id="39" name="TextBox 38"/>
           <p:cNvSpPr txBox="1"/>
           <p:nvPr/>
         </p:nvSpPr>
@@ -18898,7 +19333,7 @@
       </p:sp>
       <p:sp>
         <p:nvSpPr>
-          <p:cNvPr id="28" name="TextBox 27"/>
+          <p:cNvPr id="40" name="TextBox 39"/>
           <p:cNvSpPr txBox="1"/>
           <p:nvPr/>
         </p:nvSpPr>
@@ -18939,7 +19374,7 @@
       </p:sp>
       <p:sp>
         <p:nvSpPr>
-          <p:cNvPr id="29" name="Rectangle 28"/>
+          <p:cNvPr id="41" name="Rectangle 40"/>
           <p:cNvSpPr/>
           <p:nvPr/>
         </p:nvSpPr>
@@ -18985,7 +19420,7 @@
       </p:sp>
       <p:sp>
         <p:nvSpPr>
-          <p:cNvPr id="30" name="TextBox 29"/>
+          <p:cNvPr id="42" name="TextBox 41"/>
           <p:cNvSpPr txBox="1"/>
           <p:nvPr/>
         </p:nvSpPr>
@@ -19026,7 +19461,7 @@
       </p:sp>
       <p:sp>
         <p:nvSpPr>
-          <p:cNvPr id="31" name="TextBox 30"/>
+          <p:cNvPr id="43" name="TextBox 42"/>
           <p:cNvSpPr txBox="1"/>
           <p:nvPr/>
         </p:nvSpPr>
@@ -19067,7 +19502,7 @@
       </p:sp>
       <p:sp>
         <p:nvSpPr>
-          <p:cNvPr id="32" name="Rectangle 31"/>
+          <p:cNvPr id="44" name="Rectangle 43"/>
           <p:cNvSpPr/>
           <p:nvPr/>
         </p:nvSpPr>
@@ -19113,7 +19548,7 @@
       </p:sp>
       <p:sp>
         <p:nvSpPr>
-          <p:cNvPr id="33" name="TextBox 32"/>
+          <p:cNvPr id="45" name="TextBox 44"/>
           <p:cNvSpPr txBox="1"/>
           <p:nvPr/>
         </p:nvSpPr>
@@ -19154,7 +19589,7 @@
       </p:sp>
       <p:sp>
         <p:nvSpPr>
-          <p:cNvPr id="34" name="TextBox 33"/>
+          <p:cNvPr id="46" name="TextBox 45"/>
           <p:cNvSpPr txBox="1"/>
           <p:nvPr/>
         </p:nvSpPr>
@@ -19195,7 +19630,7 @@
       </p:sp>
       <p:sp>
         <p:nvSpPr>
-          <p:cNvPr id="35" name="Rectangle 34"/>
+          <p:cNvPr id="47" name="Rectangle 46"/>
           <p:cNvSpPr/>
           <p:nvPr/>
         </p:nvSpPr>
@@ -19241,7 +19676,7 @@
       </p:sp>
       <p:sp>
         <p:nvSpPr>
-          <p:cNvPr id="36" name="TextBox 35"/>
+          <p:cNvPr id="48" name="TextBox 47"/>
           <p:cNvSpPr txBox="1"/>
           <p:nvPr/>
         </p:nvSpPr>
@@ -19282,7 +19717,7 @@
       </p:sp>
       <p:sp>
         <p:nvSpPr>
-          <p:cNvPr id="37" name="TextBox 36"/>
+          <p:cNvPr id="49" name="TextBox 48"/>
           <p:cNvSpPr txBox="1"/>
           <p:nvPr/>
         </p:nvSpPr>
@@ -19323,7 +19758,7 @@
       </p:sp>
       <p:sp>
         <p:nvSpPr>
-          <p:cNvPr id="38" name="Rectangle 37"/>
+          <p:cNvPr id="50" name="Rectangle 49"/>
           <p:cNvSpPr/>
           <p:nvPr/>
         </p:nvSpPr>
@@ -19367,7 +19802,7 @@
       </p:sp>
       <p:sp>
         <p:nvSpPr>
-          <p:cNvPr id="39" name="TextBox 38"/>
+          <p:cNvPr id="51" name="TextBox 50"/>
           <p:cNvSpPr txBox="1"/>
           <p:nvPr/>
         </p:nvSpPr>
@@ -19408,7 +19843,7 @@
       </p:sp>
       <p:sp>
         <p:nvSpPr>
-          <p:cNvPr id="40" name="Rectangle 39"/>
+          <p:cNvPr id="52" name="Rectangle 51"/>
           <p:cNvSpPr/>
           <p:nvPr/>
         </p:nvSpPr>
@@ -19454,7 +19889,7 @@
       </p:sp>
       <p:sp>
         <p:nvSpPr>
-          <p:cNvPr id="41" name="TextBox 40"/>
+          <p:cNvPr id="53" name="TextBox 52"/>
           <p:cNvSpPr txBox="1"/>
           <p:nvPr/>
         </p:nvSpPr>
@@ -19495,7 +19930,7 @@
       </p:sp>
       <p:sp>
         <p:nvSpPr>
-          <p:cNvPr id="42" name="TextBox 41"/>
+          <p:cNvPr id="54" name="TextBox 53"/>
           <p:cNvSpPr txBox="1"/>
           <p:nvPr/>
         </p:nvSpPr>
@@ -19536,7 +19971,7 @@
       </p:sp>
       <p:sp>
         <p:nvSpPr>
-          <p:cNvPr id="43" name="Rectangle 42"/>
+          <p:cNvPr id="55" name="Rectangle 54"/>
           <p:cNvSpPr/>
           <p:nvPr/>
         </p:nvSpPr>
@@ -19580,7 +20015,7 @@
       </p:sp>
       <p:sp>
         <p:nvSpPr>
-          <p:cNvPr id="44" name="TextBox 43"/>
+          <p:cNvPr id="56" name="TextBox 55"/>
           <p:cNvSpPr txBox="1"/>
           <p:nvPr/>
         </p:nvSpPr>
@@ -19621,7 +20056,7 @@
       </p:sp>
       <p:sp>
         <p:nvSpPr>
-          <p:cNvPr id="45" name="Rectangle 44"/>
+          <p:cNvPr id="57" name="Rectangle 56"/>
           <p:cNvSpPr/>
           <p:nvPr/>
         </p:nvSpPr>
@@ -19667,7 +20102,7 @@
       </p:sp>
       <p:sp>
         <p:nvSpPr>
-          <p:cNvPr id="46" name="TextBox 45"/>
+          <p:cNvPr id="58" name="TextBox 57"/>
           <p:cNvSpPr txBox="1"/>
           <p:nvPr/>
         </p:nvSpPr>
@@ -19708,7 +20143,7 @@
       </p:sp>
       <p:sp>
         <p:nvSpPr>
-          <p:cNvPr id="47" name="TextBox 46"/>
+          <p:cNvPr id="59" name="TextBox 58"/>
           <p:cNvSpPr txBox="1"/>
           <p:nvPr/>
         </p:nvSpPr>
@@ -19749,7 +20184,7 @@
       </p:sp>
       <p:sp>
         <p:nvSpPr>
-          <p:cNvPr id="48" name="Rectangle 47"/>
+          <p:cNvPr id="60" name="Rectangle 59"/>
           <p:cNvSpPr/>
           <p:nvPr/>
         </p:nvSpPr>
@@ -19793,7 +20228,7 @@
       </p:sp>
       <p:sp>
         <p:nvSpPr>
-          <p:cNvPr id="49" name="TextBox 48"/>
+          <p:cNvPr id="61" name="TextBox 60"/>
           <p:cNvSpPr txBox="1"/>
           <p:nvPr/>
         </p:nvSpPr>
@@ -19834,7 +20269,7 @@
       </p:sp>
       <p:sp>
         <p:nvSpPr>
-          <p:cNvPr id="50" name="Rectangle 49"/>
+          <p:cNvPr id="62" name="Rectangle 61"/>
           <p:cNvSpPr/>
           <p:nvPr/>
         </p:nvSpPr>
@@ -19880,7 +20315,7 @@
       </p:sp>
       <p:sp>
         <p:nvSpPr>
-          <p:cNvPr id="51" name="TextBox 50"/>
+          <p:cNvPr id="63" name="TextBox 62"/>
           <p:cNvSpPr txBox="1"/>
           <p:nvPr/>
         </p:nvSpPr>
@@ -19921,7 +20356,7 @@
       </p:sp>
       <p:sp>
         <p:nvSpPr>
-          <p:cNvPr id="52" name="TextBox 51"/>
+          <p:cNvPr id="64" name="TextBox 63"/>
           <p:cNvSpPr txBox="1"/>
           <p:nvPr/>
         </p:nvSpPr>
@@ -19962,7 +20397,7 @@
       </p:sp>
       <p:sp>
         <p:nvSpPr>
-          <p:cNvPr id="53" name="Rectangle 52"/>
+          <p:cNvPr id="65" name="Rectangle 64"/>
           <p:cNvSpPr/>
           <p:nvPr/>
         </p:nvSpPr>
@@ -20008,7 +20443,7 @@
       </p:sp>
       <p:sp>
         <p:nvSpPr>
-          <p:cNvPr id="54" name="TextBox 53"/>
+          <p:cNvPr id="66" name="TextBox 65"/>
           <p:cNvSpPr txBox="1"/>
           <p:nvPr/>
         </p:nvSpPr>
@@ -20049,7 +20484,7 @@
       </p:sp>
       <p:sp>
         <p:nvSpPr>
-          <p:cNvPr id="55" name="TextBox 54"/>
+          <p:cNvPr id="67" name="TextBox 66"/>
           <p:cNvSpPr txBox="1"/>
           <p:nvPr/>
         </p:nvSpPr>
@@ -20090,7 +20525,7 @@
       </p:sp>
       <p:cxnSp>
         <p:nvCxnSpPr>
-          <p:cNvPr id="56" name="Connector 55"/>
+          <p:cNvPr id="68" name="Connector 67"/>
           <p:cNvCxnSpPr/>
           <p:nvPr/>
         </p:nvCxnSpPr>
@@ -20102,7 +20537,7 @@
           <a:prstGeom prst="line">
             <a:avLst/>
           </a:prstGeom>
-          <a:ln w="13970">
+          <a:ln w="15875">
             <a:prstDash val="dash"/>
             <a:solidFill>
               <a:srgbClr val="6C7372"/>
@@ -20128,7 +20563,7 @@
       </p:cxnSp>
       <p:cxnSp>
         <p:nvCxnSpPr>
-          <p:cNvPr id="57" name="Connector 56"/>
+          <p:cNvPr id="69" name="Connector 68"/>
           <p:cNvCxnSpPr/>
           <p:nvPr/>
         </p:nvCxnSpPr>
@@ -20140,7 +20575,7 @@
           <a:prstGeom prst="line">
             <a:avLst/>
           </a:prstGeom>
-          <a:ln w="13970">
+          <a:ln w="15875">
             <a:prstDash val="dash"/>
             <a:solidFill>
               <a:srgbClr val="6C7372"/>
@@ -20166,7 +20601,7 @@
       </p:cxnSp>
       <p:cxnSp>
         <p:nvCxnSpPr>
-          <p:cNvPr id="58" name="Connector 57"/>
+          <p:cNvPr id="70" name="Connector 69"/>
           <p:cNvCxnSpPr/>
           <p:nvPr/>
         </p:nvCxnSpPr>
@@ -20178,7 +20613,7 @@
           <a:prstGeom prst="line">
             <a:avLst/>
           </a:prstGeom>
-          <a:ln w="13970">
+          <a:ln w="15875">
             <a:prstDash val="dash"/>
             <a:solidFill>
               <a:srgbClr val="6C7372"/>
@@ -20204,7 +20639,7 @@
       </p:cxnSp>
       <p:sp>
         <p:nvSpPr>
-          <p:cNvPr id="59" name="TextBox 58"/>
+          <p:cNvPr id="71" name="TextBox 70"/>
           <p:cNvSpPr txBox="1"/>
           <p:nvPr/>
         </p:nvSpPr>
@@ -20247,7 +20682,7 @@
       </p:sp>
       <p:sp>
         <p:nvSpPr>
-          <p:cNvPr id="60" name="TextBox 59"/>
+          <p:cNvPr id="72" name="TextBox 71"/>
           <p:cNvSpPr txBox="1"/>
           <p:nvPr/>
         </p:nvSpPr>
@@ -20290,7 +20725,7 @@
       </p:sp>
       <p:sp>
         <p:nvSpPr>
-          <p:cNvPr id="61" name="Rectangle 60"/>
+          <p:cNvPr id="73" name="Rectangle 72"/>
           <p:cNvSpPr/>
           <p:nvPr/>
         </p:nvSpPr>
@@ -20334,7 +20769,7 @@
       </p:sp>
       <p:sp>
         <p:nvSpPr>
-          <p:cNvPr id="62" name="TextBox 61"/>
+          <p:cNvPr id="74" name="TextBox 73"/>
           <p:cNvSpPr txBox="1"/>
           <p:nvPr/>
         </p:nvSpPr>
@@ -20375,7 +20810,7 @@
       </p:sp>
       <p:sp>
         <p:nvSpPr>
-          <p:cNvPr id="63" name="TextBox 62"/>
+          <p:cNvPr id="75" name="TextBox 74"/>
           <p:cNvSpPr txBox="1"/>
           <p:nvPr/>
         </p:nvSpPr>
@@ -20416,7 +20851,7 @@
       </p:sp>
       <p:sp>
         <p:nvSpPr>
-          <p:cNvPr id="64" name="TextBox 63"/>
+          <p:cNvPr id="76" name="TextBox 75"/>
           <p:cNvSpPr txBox="1"/>
           <p:nvPr/>
         </p:nvSpPr>
@@ -30684,51 +31119,7 @@
       </p:sp>
       <p:sp>
         <p:nvSpPr>
-          <p:cNvPr id="6" name="Rectangle 5"/>
-          <p:cNvSpPr/>
-          <p:nvPr/>
-        </p:nvSpPr>
-        <p:spPr>
-          <a:xfrm>
-            <a:off x="694944" y="1719072"/>
-            <a:ext cx="5212080" cy="41148"/>
-          </a:xfrm>
-          <a:prstGeom prst="rect">
-            <a:avLst/>
-          </a:prstGeom>
-          <a:solidFill>
-            <a:srgbClr val="666E70"/>
-          </a:solidFill>
-          <a:ln>
-            <a:noFill/>
-          </a:ln>
-          <a:effectLst/>
-        </p:spPr>
-        <p:style>
-          <a:lnRef idx="1">
-            <a:schemeClr val="accent1"/>
-          </a:lnRef>
-          <a:fillRef idx="3">
-            <a:schemeClr val="accent1"/>
-          </a:fillRef>
-          <a:effectRef idx="2">
-            <a:schemeClr val="accent1"/>
-          </a:effectRef>
-          <a:fontRef idx="minor">
-            <a:schemeClr val="lt1"/>
-          </a:fontRef>
-        </p:style>
-        <p:txBody>
-          <a:bodyPr rtlCol="0" anchor="ctr"/>
-          <a:lstStyle/>
-          <a:p>
-            <a:pPr algn="ctr"/>
-          </a:p>
-        </p:txBody>
-      </p:sp>
-      <p:sp>
-        <p:nvSpPr>
-          <p:cNvPr id="7" name="TextBox 6"/>
+          <p:cNvPr id="6" name="TextBox 5"/>
           <p:cNvSpPr txBox="1"/>
           <p:nvPr/>
         </p:nvSpPr>
@@ -30769,7 +31160,7 @@
       </p:sp>
       <p:sp>
         <p:nvSpPr>
-          <p:cNvPr id="8" name="TextBox 7"/>
+          <p:cNvPr id="7" name="TextBox 6"/>
           <p:cNvSpPr txBox="1"/>
           <p:nvPr/>
         </p:nvSpPr>
@@ -30810,7 +31201,7 @@
       </p:sp>
       <p:sp>
         <p:nvSpPr>
-          <p:cNvPr id="9" name="Rectangle 8"/>
+          <p:cNvPr id="8" name="Rectangle 7"/>
           <p:cNvSpPr/>
           <p:nvPr/>
         </p:nvSpPr>
@@ -30854,7 +31245,7 @@
       </p:sp>
       <p:sp>
         <p:nvSpPr>
-          <p:cNvPr id="10" name="TextBox 9"/>
+          <p:cNvPr id="9" name="TextBox 8"/>
           <p:cNvSpPr txBox="1"/>
           <p:nvPr/>
         </p:nvSpPr>
@@ -30895,7 +31286,7 @@
       </p:sp>
       <p:sp>
         <p:nvSpPr>
-          <p:cNvPr id="11" name="TextBox 10"/>
+          <p:cNvPr id="10" name="TextBox 9"/>
           <p:cNvSpPr txBox="1"/>
           <p:nvPr/>
         </p:nvSpPr>
@@ -30936,7 +31327,7 @@
       </p:sp>
       <p:sp>
         <p:nvSpPr>
-          <p:cNvPr id="12" name="Rectangle 11"/>
+          <p:cNvPr id="11" name="Rectangle 10"/>
           <p:cNvSpPr/>
           <p:nvPr/>
         </p:nvSpPr>
@@ -30980,7 +31371,7 @@
       </p:sp>
       <p:sp>
         <p:nvSpPr>
-          <p:cNvPr id="13" name="TextBox 12"/>
+          <p:cNvPr id="12" name="TextBox 11"/>
           <p:cNvSpPr txBox="1"/>
           <p:nvPr/>
         </p:nvSpPr>
@@ -31021,7 +31412,7 @@
       </p:sp>
       <p:sp>
         <p:nvSpPr>
-          <p:cNvPr id="14" name="TextBox 13"/>
+          <p:cNvPr id="13" name="TextBox 12"/>
           <p:cNvSpPr txBox="1"/>
           <p:nvPr/>
         </p:nvSpPr>
@@ -31062,7 +31453,7 @@
       </p:sp>
       <p:sp>
         <p:nvSpPr>
-          <p:cNvPr id="15" name="Rectangle 14"/>
+          <p:cNvPr id="14" name="Rectangle 13"/>
           <p:cNvSpPr/>
           <p:nvPr/>
         </p:nvSpPr>
@@ -31106,7 +31497,7 @@
       </p:sp>
       <p:sp>
         <p:nvSpPr>
-          <p:cNvPr id="16" name="TextBox 15"/>
+          <p:cNvPr id="15" name="TextBox 14"/>
           <p:cNvSpPr txBox="1"/>
           <p:nvPr/>
         </p:nvSpPr>
@@ -31147,7 +31538,7 @@
       </p:sp>
       <p:sp>
         <p:nvSpPr>
-          <p:cNvPr id="17" name="TextBox 16"/>
+          <p:cNvPr id="16" name="TextBox 15"/>
           <p:cNvSpPr txBox="1"/>
           <p:nvPr/>
         </p:nvSpPr>
@@ -31188,7 +31579,7 @@
       </p:sp>
       <p:sp>
         <p:nvSpPr>
-          <p:cNvPr id="18" name="Rectangle 17"/>
+          <p:cNvPr id="17" name="Rectangle 16"/>
           <p:cNvSpPr/>
           <p:nvPr/>
         </p:nvSpPr>
@@ -31232,51 +31623,7 @@
       </p:sp>
       <p:sp>
         <p:nvSpPr>
-          <p:cNvPr id="19" name="Rectangle 18"/>
-          <p:cNvSpPr/>
-          <p:nvPr/>
-        </p:nvSpPr>
-        <p:spPr>
-          <a:xfrm>
-            <a:off x="6291072" y="1719072"/>
-            <a:ext cx="5212080" cy="41148"/>
-          </a:xfrm>
-          <a:prstGeom prst="rect">
-            <a:avLst/>
-          </a:prstGeom>
-          <a:solidFill>
-            <a:srgbClr val="0D7870"/>
-          </a:solidFill>
-          <a:ln>
-            <a:noFill/>
-          </a:ln>
-          <a:effectLst/>
-        </p:spPr>
-        <p:style>
-          <a:lnRef idx="1">
-            <a:schemeClr val="accent1"/>
-          </a:lnRef>
-          <a:fillRef idx="3">
-            <a:schemeClr val="accent1"/>
-          </a:fillRef>
-          <a:effectRef idx="2">
-            <a:schemeClr val="accent1"/>
-          </a:effectRef>
-          <a:fontRef idx="minor">
-            <a:schemeClr val="lt1"/>
-          </a:fontRef>
-        </p:style>
-        <p:txBody>
-          <a:bodyPr rtlCol="0" anchor="ctr"/>
-          <a:lstStyle/>
-          <a:p>
-            <a:pPr algn="ctr"/>
-          </a:p>
-        </p:txBody>
-      </p:sp>
-      <p:sp>
-        <p:nvSpPr>
-          <p:cNvPr id="20" name="TextBox 19"/>
+          <p:cNvPr id="18" name="TextBox 17"/>
           <p:cNvSpPr txBox="1"/>
           <p:nvPr/>
         </p:nvSpPr>
@@ -31317,7 +31664,7 @@
       </p:sp>
       <p:sp>
         <p:nvSpPr>
-          <p:cNvPr id="21" name="TextBox 20"/>
+          <p:cNvPr id="19" name="TextBox 18"/>
           <p:cNvSpPr txBox="1"/>
           <p:nvPr/>
         </p:nvSpPr>
@@ -31358,7 +31705,7 @@
       </p:sp>
       <p:sp>
         <p:nvSpPr>
-          <p:cNvPr id="22" name="Rectangle 21"/>
+          <p:cNvPr id="20" name="Rectangle 19"/>
           <p:cNvSpPr/>
           <p:nvPr/>
         </p:nvSpPr>
@@ -31402,7 +31749,7 @@
       </p:sp>
       <p:sp>
         <p:nvSpPr>
-          <p:cNvPr id="23" name="TextBox 22"/>
+          <p:cNvPr id="21" name="TextBox 20"/>
           <p:cNvSpPr txBox="1"/>
           <p:nvPr/>
         </p:nvSpPr>
@@ -31443,7 +31790,7 @@
       </p:sp>
       <p:sp>
         <p:nvSpPr>
-          <p:cNvPr id="24" name="TextBox 23"/>
+          <p:cNvPr id="22" name="TextBox 21"/>
           <p:cNvSpPr txBox="1"/>
           <p:nvPr/>
         </p:nvSpPr>
@@ -31484,7 +31831,7 @@
       </p:sp>
       <p:sp>
         <p:nvSpPr>
-          <p:cNvPr id="25" name="Rectangle 24"/>
+          <p:cNvPr id="23" name="Rectangle 22"/>
           <p:cNvSpPr/>
           <p:nvPr/>
         </p:nvSpPr>
@@ -31528,7 +31875,7 @@
       </p:sp>
       <p:sp>
         <p:nvSpPr>
-          <p:cNvPr id="26" name="TextBox 25"/>
+          <p:cNvPr id="24" name="TextBox 23"/>
           <p:cNvSpPr txBox="1"/>
           <p:nvPr/>
         </p:nvSpPr>
@@ -31569,7 +31916,7 @@
       </p:sp>
       <p:sp>
         <p:nvSpPr>
-          <p:cNvPr id="27" name="TextBox 26"/>
+          <p:cNvPr id="25" name="TextBox 24"/>
           <p:cNvSpPr txBox="1"/>
           <p:nvPr/>
         </p:nvSpPr>
@@ -31610,7 +31957,7 @@
       </p:sp>
       <p:sp>
         <p:nvSpPr>
-          <p:cNvPr id="28" name="Rectangle 27"/>
+          <p:cNvPr id="26" name="Rectangle 25"/>
           <p:cNvSpPr/>
           <p:nvPr/>
         </p:nvSpPr>
@@ -31654,7 +32001,7 @@
       </p:sp>
       <p:sp>
         <p:nvSpPr>
-          <p:cNvPr id="29" name="TextBox 28"/>
+          <p:cNvPr id="27" name="TextBox 26"/>
           <p:cNvSpPr txBox="1"/>
           <p:nvPr/>
         </p:nvSpPr>
@@ -31695,7 +32042,7 @@
       </p:sp>
       <p:sp>
         <p:nvSpPr>
-          <p:cNvPr id="30" name="TextBox 29"/>
+          <p:cNvPr id="28" name="TextBox 27"/>
           <p:cNvSpPr txBox="1"/>
           <p:nvPr/>
         </p:nvSpPr>
@@ -31736,48 +32083,7 @@
       </p:sp>
       <p:sp>
         <p:nvSpPr>
-          <p:cNvPr id="31" name="TextBox 30"/>
-          <p:cNvSpPr txBox="1"/>
-          <p:nvPr/>
-        </p:nvSpPr>
-        <p:spPr>
-          <a:xfrm>
-            <a:off x="5934456" y="3203448"/>
-            <a:ext cx="329184" cy="274320"/>
-          </a:xfrm>
-          <a:prstGeom prst="rect">
-            <a:avLst/>
-          </a:prstGeom>
-          <a:noFill/>
-        </p:spPr>
-        <p:txBody>
-          <a:bodyPr wrap="square" anchor="ctr" lIns="0" rIns="0" tIns="0" bIns="0">
-            <a:spAutoFit/>
-          </a:bodyPr>
-          <a:lstStyle/>
-          <a:p>
-            <a:pPr algn="ctr">
-              <a:lnSpc>
-                <a:spcPct val="130000"/>
-              </a:lnSpc>
-            </a:pPr>
-            <a:r>
-              <a:rPr sz="1500" b="1" lang="ja-JP">
-                <a:solidFill>
-                  <a:srgbClr val="0D7870"/>
-                </a:solidFill>
-                <a:latin typeface="Yu Gothic"/>
-                <a:ea typeface="Yu Gothic"/>
-                <a:cs typeface="Yu Gothic"/>
-              </a:rPr>
-              <a:t>→</a:t>
-            </a:r>
-          </a:p>
-        </p:txBody>
-      </p:sp>
-      <p:sp>
-        <p:nvSpPr>
-          <p:cNvPr id="32" name="Rectangle 31"/>
+          <p:cNvPr id="29" name="Rectangle 28"/>
           <p:cNvSpPr/>
           <p:nvPr/>
         </p:nvSpPr>
@@ -31821,7 +32127,7 @@
       </p:sp>
       <p:sp>
         <p:nvSpPr>
-          <p:cNvPr id="33" name="TextBox 32"/>
+          <p:cNvPr id="30" name="TextBox 29"/>
           <p:cNvSpPr txBox="1"/>
           <p:nvPr/>
         </p:nvSpPr>
@@ -31862,7 +32168,7 @@
       </p:sp>
       <p:sp>
         <p:nvSpPr>
-          <p:cNvPr id="34" name="TextBox 33"/>
+          <p:cNvPr id="31" name="TextBox 30"/>
           <p:cNvSpPr txBox="1"/>
           <p:nvPr/>
         </p:nvSpPr>
@@ -31903,7 +32209,7 @@
       </p:sp>
       <p:sp>
         <p:nvSpPr>
-          <p:cNvPr id="35" name="TextBox 34"/>
+          <p:cNvPr id="32" name="TextBox 31"/>
           <p:cNvSpPr txBox="1"/>
           <p:nvPr/>
         </p:nvSpPr>

--- a/examples/gallery/pattern_gallery.pptx
+++ b/examples/gallery/pattern_gallery.pptx
@@ -6237,7 +6237,7 @@
                 <a:ea typeface="Yu Gothic"/>
                 <a:cs typeface="Yu Gothic"/>
               </a:rPr>
-              <a:t>審査結果に応じた分岐・差戻し・再申請を1枚で示す</a:t>
+              <a:t>通常の承認経路と差戻しを、迷わず追える形で示す</a:t>
             </a:r>
           </a:p>
         </p:txBody>
@@ -6250,7 +6250,7 @@
         </p:nvCxnSpPr>
         <p:spPr>
           <a:xfrm>
-            <a:off x="2424988" y="2221992"/>
+            <a:off x="2994660" y="2517343"/>
             <a:ext cx="512064" cy="0"/>
           </a:xfrm>
           <a:prstGeom prst="line">
@@ -6287,7 +6287,7 @@
         </p:nvCxnSpPr>
         <p:spPr>
           <a:xfrm>
-            <a:off x="4703673" y="2221992"/>
+            <a:off x="5843016" y="2517343"/>
             <a:ext cx="512064" cy="0"/>
           </a:xfrm>
           <a:prstGeom prst="line">
@@ -6324,7 +6324,7 @@
         </p:nvCxnSpPr>
         <p:spPr>
           <a:xfrm>
-            <a:off x="6982358" y="2221992"/>
+            <a:off x="8691372" y="2517343"/>
             <a:ext cx="512064" cy="0"/>
           </a:xfrm>
           <a:prstGeom prst="line">
@@ -6361,7 +6361,7 @@
         </p:nvCxnSpPr>
         <p:spPr>
           <a:xfrm>
-            <a:off x="6982358" y="2221992"/>
+            <a:off x="8691372" y="2517343"/>
             <a:ext cx="256032" cy="0"/>
           </a:xfrm>
           <a:prstGeom prst="line">
@@ -6397,8 +6397,8 @@
         </p:nvCxnSpPr>
         <p:spPr>
           <a:xfrm>
-            <a:off x="7238390" y="2221992"/>
-            <a:ext cx="0" cy="1243584"/>
+            <a:off x="8947404" y="2517343"/>
+            <a:ext cx="0" cy="1316736"/>
           </a:xfrm>
           <a:prstGeom prst="line">
             <a:avLst/>
@@ -6433,7 +6433,7 @@
         </p:nvCxnSpPr>
         <p:spPr>
           <a:xfrm>
-            <a:off x="7238390" y="3465576"/>
+            <a:off x="8947404" y="3834079"/>
             <a:ext cx="256032" cy="0"/>
           </a:xfrm>
           <a:prstGeom prst="line">
@@ -6470,17 +6470,17 @@
         </p:nvCxnSpPr>
         <p:spPr>
           <a:xfrm>
-            <a:off x="9261043" y="2221992"/>
-            <a:ext cx="512064" cy="0"/>
+            <a:off x="10371582" y="4327855"/>
+            <a:ext cx="0" cy="384048"/>
           </a:xfrm>
           <a:prstGeom prst="line">
             <a:avLst/>
           </a:prstGeom>
           <a:ln w="15875">
+            <a:prstDash val="dash"/>
             <a:solidFill>
               <a:srgbClr val="6C7372"/>
             </a:solidFill>
-            <a:tailEnd type="triangle" w="med" len="med"/>
           </a:ln>
           <a:effectLst/>
         </p:spPr>
@@ -6506,9 +6506,9 @@
           <p:nvPr/>
         </p:nvCxnSpPr>
         <p:spPr>
-          <a:xfrm>
-            <a:off x="8377732" y="3931920"/>
-            <a:ext cx="0" cy="438912"/>
+          <a:xfrm flipH="1">
+            <a:off x="4674870" y="4711903"/>
+            <a:ext cx="5696712" cy="0"/>
           </a:xfrm>
           <a:prstGeom prst="line">
             <a:avLst/>
@@ -6543,46 +6543,9 @@
           <p:nvPr/>
         </p:nvCxnSpPr>
         <p:spPr>
-          <a:xfrm flipH="1">
-            <a:off x="3820363" y="4370832"/>
-            <a:ext cx="4557369" cy="0"/>
-          </a:xfrm>
-          <a:prstGeom prst="line">
-            <a:avLst/>
-          </a:prstGeom>
-          <a:ln w="15875">
-            <a:prstDash val="dash"/>
-            <a:solidFill>
-              <a:srgbClr val="6C7372"/>
-            </a:solidFill>
-          </a:ln>
-          <a:effectLst/>
-        </p:spPr>
-        <p:style>
-          <a:lnRef idx="2">
-            <a:schemeClr val="accent1"/>
-          </a:lnRef>
-          <a:fillRef idx="0">
-            <a:schemeClr val="accent1"/>
-          </a:fillRef>
-          <a:effectRef idx="1">
-            <a:schemeClr val="accent1"/>
-          </a:effectRef>
-          <a:fontRef idx="minor">
-            <a:schemeClr val="tx1"/>
-          </a:fontRef>
-        </p:style>
-      </p:cxnSp>
-      <p:cxnSp>
-        <p:nvCxnSpPr>
-          <p:cNvPr id="14" name="Connector 13"/>
-          <p:cNvCxnSpPr/>
-          <p:nvPr/>
-        </p:nvCxnSpPr>
-        <p:spPr>
           <a:xfrm flipV="1">
-            <a:off x="3820363" y="2688336"/>
-            <a:ext cx="0" cy="1682496"/>
+            <a:off x="4674870" y="3011119"/>
+            <a:ext cx="0" cy="1700784"/>
           </a:xfrm>
           <a:prstGeom prst="line">
             <a:avLst/>
@@ -6613,14 +6576,14 @@
       </p:cxnSp>
       <p:sp>
         <p:nvSpPr>
-          <p:cNvPr id="15" name="Rectangle 14"/>
+          <p:cNvPr id="14" name="Rectangle 13"/>
           <p:cNvSpPr/>
           <p:nvPr/>
         </p:nvSpPr>
         <p:spPr>
           <a:xfrm>
-            <a:off x="658368" y="1755648"/>
-            <a:ext cx="1766620" cy="932688"/>
+            <a:off x="658368" y="2023567"/>
+            <a:ext cx="2336292" cy="987552"/>
           </a:xfrm>
           <a:prstGeom prst="rect">
             <a:avLst/>
@@ -6659,14 +6622,55 @@
       </p:sp>
       <p:sp>
         <p:nvSpPr>
+          <p:cNvPr id="15" name="TextBox 14"/>
+          <p:cNvSpPr txBox="1"/>
+          <p:nvPr/>
+        </p:nvSpPr>
+        <p:spPr>
+          <a:xfrm>
+            <a:off x="786384" y="2142439"/>
+            <a:ext cx="2080260" cy="292608"/>
+          </a:xfrm>
+          <a:prstGeom prst="rect">
+            <a:avLst/>
+          </a:prstGeom>
+          <a:noFill/>
+        </p:spPr>
+        <p:txBody>
+          <a:bodyPr wrap="square" anchor="t" lIns="0" rIns="0" tIns="0" bIns="0">
+            <a:spAutoFit/>
+          </a:bodyPr>
+          <a:lstStyle/>
+          <a:p>
+            <a:pPr algn="ctr">
+              <a:lnSpc>
+                <a:spcPct val="130000"/>
+              </a:lnSpc>
+            </a:pPr>
+            <a:r>
+              <a:rPr sz="1400" b="1" lang="ja-JP">
+                <a:solidFill>
+                  <a:srgbClr val="182C43"/>
+                </a:solidFill>
+                <a:latin typeface="Yu Gothic"/>
+                <a:ea typeface="Yu Gothic"/>
+                <a:cs typeface="Yu Gothic"/>
+              </a:rPr>
+              <a:t>申請</a:t>
+            </a:r>
+          </a:p>
+        </p:txBody>
+      </p:sp>
+      <p:sp>
+        <p:nvSpPr>
           <p:cNvPr id="16" name="TextBox 15"/>
           <p:cNvSpPr txBox="1"/>
           <p:nvPr/>
         </p:nvSpPr>
         <p:spPr>
           <a:xfrm>
-            <a:off x="786384" y="1874520"/>
-            <a:ext cx="1510588" cy="292608"/>
+            <a:off x="795528" y="2480767"/>
+            <a:ext cx="2061972" cy="310896"/>
           </a:xfrm>
           <a:prstGeom prst="rect">
             <a:avLst/>
@@ -6681,92 +6685,51 @@
           <a:p>
             <a:pPr algn="ctr">
               <a:lnSpc>
+                <a:spcPct val="112000"/>
+              </a:lnSpc>
+            </a:pPr>
+            <a:r>
+              <a:rPr sz="1250" b="0" lang="ja-JP">
+                <a:solidFill>
+                  <a:srgbClr val="202729"/>
+                </a:solidFill>
+                <a:latin typeface="Yu Gothic"/>
+                <a:ea typeface="Yu Gothic"/>
+                <a:cs typeface="Yu Gothic"/>
+              </a:rPr>
+              <a:t>必要事項を登録</a:t>
+            </a:r>
+          </a:p>
+        </p:txBody>
+      </p:sp>
+      <p:sp>
+        <p:nvSpPr>
+          <p:cNvPr id="17" name="TextBox 16"/>
+          <p:cNvSpPr txBox="1"/>
+          <p:nvPr/>
+        </p:nvSpPr>
+        <p:spPr>
+          <a:xfrm>
+            <a:off x="795528" y="2764231"/>
+            <a:ext cx="2061972" cy="201168"/>
+          </a:xfrm>
+          <a:prstGeom prst="rect">
+            <a:avLst/>
+          </a:prstGeom>
+          <a:noFill/>
+        </p:spPr>
+        <p:txBody>
+          <a:bodyPr wrap="square" anchor="t" lIns="0" rIns="0" tIns="0" bIns="0">
+            <a:spAutoFit/>
+          </a:bodyPr>
+          <a:lstStyle/>
+          <a:p>
+            <a:pPr algn="ctr">
+              <a:lnSpc>
                 <a:spcPct val="130000"/>
               </a:lnSpc>
             </a:pPr>
             <a:r>
-              <a:rPr sz="1400" b="1" lang="ja-JP">
-                <a:solidFill>
-                  <a:srgbClr val="182C43"/>
-                </a:solidFill>
-                <a:latin typeface="Yu Gothic"/>
-                <a:ea typeface="Yu Gothic"/>
-                <a:cs typeface="Yu Gothic"/>
-              </a:rPr>
-              <a:t>申請</a:t>
-            </a:r>
-          </a:p>
-        </p:txBody>
-      </p:sp>
-      <p:sp>
-        <p:nvSpPr>
-          <p:cNvPr id="17" name="TextBox 16"/>
-          <p:cNvSpPr txBox="1"/>
-          <p:nvPr/>
-        </p:nvSpPr>
-        <p:spPr>
-          <a:xfrm>
-            <a:off x="795528" y="2212848"/>
-            <a:ext cx="1492300" cy="310896"/>
-          </a:xfrm>
-          <a:prstGeom prst="rect">
-            <a:avLst/>
-          </a:prstGeom>
-          <a:noFill/>
-        </p:spPr>
-        <p:txBody>
-          <a:bodyPr wrap="square" anchor="t" lIns="0" rIns="0" tIns="0" bIns="0">
-            <a:spAutoFit/>
-          </a:bodyPr>
-          <a:lstStyle/>
-          <a:p>
-            <a:pPr algn="ctr">
-              <a:lnSpc>
-                <a:spcPct val="112000"/>
-              </a:lnSpc>
-            </a:pPr>
-            <a:r>
-              <a:rPr sz="1250" b="0" lang="ja-JP">
-                <a:solidFill>
-                  <a:srgbClr val="202729"/>
-                </a:solidFill>
-                <a:latin typeface="Yu Gothic"/>
-                <a:ea typeface="Yu Gothic"/>
-                <a:cs typeface="Yu Gothic"/>
-              </a:rPr>
-              <a:t>必要事項を登録</a:t>
-            </a:r>
-          </a:p>
-        </p:txBody>
-      </p:sp>
-      <p:sp>
-        <p:nvSpPr>
-          <p:cNvPr id="18" name="TextBox 17"/>
-          <p:cNvSpPr txBox="1"/>
-          <p:nvPr/>
-        </p:nvSpPr>
-        <p:spPr>
-          <a:xfrm>
-            <a:off x="795528" y="2441448"/>
-            <a:ext cx="1492300" cy="201168"/>
-          </a:xfrm>
-          <a:prstGeom prst="rect">
-            <a:avLst/>
-          </a:prstGeom>
-          <a:noFill/>
-        </p:spPr>
-        <p:txBody>
-          <a:bodyPr wrap="square" anchor="t" lIns="0" rIns="0" tIns="0" bIns="0">
-            <a:spAutoFit/>
-          </a:bodyPr>
-          <a:lstStyle/>
-          <a:p>
-            <a:pPr algn="ctr">
-              <a:lnSpc>
-                <a:spcPct val="130000"/>
-              </a:lnSpc>
-            </a:pPr>
-            <a:r>
               <a:rPr sz="950" b="1" lang="ja-JP">
                 <a:solidFill>
                   <a:srgbClr val="0D7870"/>
@@ -6782,14 +6745,14 @@
       </p:sp>
       <p:sp>
         <p:nvSpPr>
-          <p:cNvPr id="19" name="Rectangle 18"/>
+          <p:cNvPr id="18" name="Rectangle 17"/>
           <p:cNvSpPr/>
           <p:nvPr/>
         </p:nvSpPr>
         <p:spPr>
           <a:xfrm>
-            <a:off x="2937052" y="1755648"/>
-            <a:ext cx="1766620" cy="932688"/>
+            <a:off x="3506724" y="2023567"/>
+            <a:ext cx="2336292" cy="987552"/>
           </a:xfrm>
           <a:prstGeom prst="rect">
             <a:avLst/>
@@ -6828,14 +6791,55 @@
       </p:sp>
       <p:sp>
         <p:nvSpPr>
+          <p:cNvPr id="19" name="TextBox 18"/>
+          <p:cNvSpPr txBox="1"/>
+          <p:nvPr/>
+        </p:nvSpPr>
+        <p:spPr>
+          <a:xfrm>
+            <a:off x="3634740" y="2142439"/>
+            <a:ext cx="2080260" cy="292608"/>
+          </a:xfrm>
+          <a:prstGeom prst="rect">
+            <a:avLst/>
+          </a:prstGeom>
+          <a:noFill/>
+        </p:spPr>
+        <p:txBody>
+          <a:bodyPr wrap="square" anchor="t" lIns="0" rIns="0" tIns="0" bIns="0">
+            <a:spAutoFit/>
+          </a:bodyPr>
+          <a:lstStyle/>
+          <a:p>
+            <a:pPr algn="ctr">
+              <a:lnSpc>
+                <a:spcPct val="130000"/>
+              </a:lnSpc>
+            </a:pPr>
+            <a:r>
+              <a:rPr sz="1400" b="1" lang="ja-JP">
+                <a:solidFill>
+                  <a:srgbClr val="182C43"/>
+                </a:solidFill>
+                <a:latin typeface="Yu Gothic"/>
+                <a:ea typeface="Yu Gothic"/>
+                <a:cs typeface="Yu Gothic"/>
+              </a:rPr>
+              <a:t>形式確認</a:t>
+            </a:r>
+          </a:p>
+        </p:txBody>
+      </p:sp>
+      <p:sp>
+        <p:nvSpPr>
           <p:cNvPr id="20" name="TextBox 19"/>
           <p:cNvSpPr txBox="1"/>
           <p:nvPr/>
         </p:nvSpPr>
         <p:spPr>
           <a:xfrm>
-            <a:off x="3065068" y="1874520"/>
-            <a:ext cx="1510588" cy="292608"/>
+            <a:off x="3643884" y="2480767"/>
+            <a:ext cx="2061972" cy="310896"/>
           </a:xfrm>
           <a:prstGeom prst="rect">
             <a:avLst/>
@@ -6850,92 +6854,51 @@
           <a:p>
             <a:pPr algn="ctr">
               <a:lnSpc>
+                <a:spcPct val="112000"/>
+              </a:lnSpc>
+            </a:pPr>
+            <a:r>
+              <a:rPr sz="1250" b="0" lang="ja-JP">
+                <a:solidFill>
+                  <a:srgbClr val="202729"/>
+                </a:solidFill>
+                <a:latin typeface="Yu Gothic"/>
+                <a:ea typeface="Yu Gothic"/>
+                <a:cs typeface="Yu Gothic"/>
+              </a:rPr>
+              <a:t>不足項目を確認</a:t>
+            </a:r>
+          </a:p>
+        </p:txBody>
+      </p:sp>
+      <p:sp>
+        <p:nvSpPr>
+          <p:cNvPr id="21" name="TextBox 20"/>
+          <p:cNvSpPr txBox="1"/>
+          <p:nvPr/>
+        </p:nvSpPr>
+        <p:spPr>
+          <a:xfrm>
+            <a:off x="3643884" y="2764231"/>
+            <a:ext cx="2061972" cy="201168"/>
+          </a:xfrm>
+          <a:prstGeom prst="rect">
+            <a:avLst/>
+          </a:prstGeom>
+          <a:noFill/>
+        </p:spPr>
+        <p:txBody>
+          <a:bodyPr wrap="square" anchor="t" lIns="0" rIns="0" tIns="0" bIns="0">
+            <a:spAutoFit/>
+          </a:bodyPr>
+          <a:lstStyle/>
+          <a:p>
+            <a:pPr algn="ctr">
+              <a:lnSpc>
                 <a:spcPct val="130000"/>
               </a:lnSpc>
             </a:pPr>
             <a:r>
-              <a:rPr sz="1400" b="1" lang="ja-JP">
-                <a:solidFill>
-                  <a:srgbClr val="182C43"/>
-                </a:solidFill>
-                <a:latin typeface="Yu Gothic"/>
-                <a:ea typeface="Yu Gothic"/>
-                <a:cs typeface="Yu Gothic"/>
-              </a:rPr>
-              <a:t>形式確認</a:t>
-            </a:r>
-          </a:p>
-        </p:txBody>
-      </p:sp>
-      <p:sp>
-        <p:nvSpPr>
-          <p:cNvPr id="21" name="TextBox 20"/>
-          <p:cNvSpPr txBox="1"/>
-          <p:nvPr/>
-        </p:nvSpPr>
-        <p:spPr>
-          <a:xfrm>
-            <a:off x="3074212" y="2212848"/>
-            <a:ext cx="1492300" cy="310896"/>
-          </a:xfrm>
-          <a:prstGeom prst="rect">
-            <a:avLst/>
-          </a:prstGeom>
-          <a:noFill/>
-        </p:spPr>
-        <p:txBody>
-          <a:bodyPr wrap="square" anchor="t" lIns="0" rIns="0" tIns="0" bIns="0">
-            <a:spAutoFit/>
-          </a:bodyPr>
-          <a:lstStyle/>
-          <a:p>
-            <a:pPr algn="ctr">
-              <a:lnSpc>
-                <a:spcPct val="112000"/>
-              </a:lnSpc>
-            </a:pPr>
-            <a:r>
-              <a:rPr sz="1250" b="0" lang="ja-JP">
-                <a:solidFill>
-                  <a:srgbClr val="202729"/>
-                </a:solidFill>
-                <a:latin typeface="Yu Gothic"/>
-                <a:ea typeface="Yu Gothic"/>
-                <a:cs typeface="Yu Gothic"/>
-              </a:rPr>
-              <a:t>不足項目を確認</a:t>
-            </a:r>
-          </a:p>
-        </p:txBody>
-      </p:sp>
-      <p:sp>
-        <p:nvSpPr>
-          <p:cNvPr id="22" name="TextBox 21"/>
-          <p:cNvSpPr txBox="1"/>
-          <p:nvPr/>
-        </p:nvSpPr>
-        <p:spPr>
-          <a:xfrm>
-            <a:off x="3074212" y="2441448"/>
-            <a:ext cx="1492300" cy="201168"/>
-          </a:xfrm>
-          <a:prstGeom prst="rect">
-            <a:avLst/>
-          </a:prstGeom>
-          <a:noFill/>
-        </p:spPr>
-        <p:txBody>
-          <a:bodyPr wrap="square" anchor="t" lIns="0" rIns="0" tIns="0" bIns="0">
-            <a:spAutoFit/>
-          </a:bodyPr>
-          <a:lstStyle/>
-          <a:p>
-            <a:pPr algn="ctr">
-              <a:lnSpc>
-                <a:spcPct val="130000"/>
-              </a:lnSpc>
-            </a:pPr>
-            <a:r>
               <a:rPr sz="950" b="1" lang="ja-JP">
                 <a:solidFill>
                   <a:srgbClr val="0D7870"/>
@@ -6951,14 +6914,14 @@
       </p:sp>
       <p:sp>
         <p:nvSpPr>
-          <p:cNvPr id="23" name="Rectangle 22"/>
+          <p:cNvPr id="22" name="Rectangle 21"/>
           <p:cNvSpPr/>
           <p:nvPr/>
         </p:nvSpPr>
         <p:spPr>
           <a:xfrm>
-            <a:off x="5215737" y="1755648"/>
-            <a:ext cx="1766620" cy="932688"/>
+            <a:off x="6355080" y="2023567"/>
+            <a:ext cx="2336292" cy="987552"/>
           </a:xfrm>
           <a:prstGeom prst="rect">
             <a:avLst/>
@@ -6997,14 +6960,55 @@
       </p:sp>
       <p:sp>
         <p:nvSpPr>
+          <p:cNvPr id="23" name="TextBox 22"/>
+          <p:cNvSpPr txBox="1"/>
+          <p:nvPr/>
+        </p:nvSpPr>
+        <p:spPr>
+          <a:xfrm>
+            <a:off x="6483096" y="2142439"/>
+            <a:ext cx="2080260" cy="292608"/>
+          </a:xfrm>
+          <a:prstGeom prst="rect">
+            <a:avLst/>
+          </a:prstGeom>
+          <a:noFill/>
+        </p:spPr>
+        <p:txBody>
+          <a:bodyPr wrap="square" anchor="t" lIns="0" rIns="0" tIns="0" bIns="0">
+            <a:spAutoFit/>
+          </a:bodyPr>
+          <a:lstStyle/>
+          <a:p>
+            <a:pPr algn="ctr">
+              <a:lnSpc>
+                <a:spcPct val="130000"/>
+              </a:lnSpc>
+            </a:pPr>
+            <a:r>
+              <a:rPr sz="1400" b="1" lang="ja-JP">
+                <a:solidFill>
+                  <a:srgbClr val="182C43"/>
+                </a:solidFill>
+                <a:latin typeface="Yu Gothic"/>
+                <a:ea typeface="Yu Gothic"/>
+                <a:cs typeface="Yu Gothic"/>
+              </a:rPr>
+              <a:t>内容審査</a:t>
+            </a:r>
+          </a:p>
+        </p:txBody>
+      </p:sp>
+      <p:sp>
+        <p:nvSpPr>
           <p:cNvPr id="24" name="TextBox 23"/>
           <p:cNvSpPr txBox="1"/>
           <p:nvPr/>
         </p:nvSpPr>
         <p:spPr>
           <a:xfrm>
-            <a:off x="5343753" y="1874520"/>
-            <a:ext cx="1510588" cy="292608"/>
+            <a:off x="6492240" y="2480767"/>
+            <a:ext cx="2061972" cy="310896"/>
           </a:xfrm>
           <a:prstGeom prst="rect">
             <a:avLst/>
@@ -7019,92 +7023,51 @@
           <a:p>
             <a:pPr algn="ctr">
               <a:lnSpc>
+                <a:spcPct val="112000"/>
+              </a:lnSpc>
+            </a:pPr>
+            <a:r>
+              <a:rPr sz="1250" b="0" lang="ja-JP">
+                <a:solidFill>
+                  <a:srgbClr val="202729"/>
+                </a:solidFill>
+                <a:latin typeface="Yu Gothic"/>
+                <a:ea typeface="Yu Gothic"/>
+                <a:cs typeface="Yu Gothic"/>
+              </a:rPr>
+              <a:t>妥当性とリスクを確認</a:t>
+            </a:r>
+          </a:p>
+        </p:txBody>
+      </p:sp>
+      <p:sp>
+        <p:nvSpPr>
+          <p:cNvPr id="25" name="TextBox 24"/>
+          <p:cNvSpPr txBox="1"/>
+          <p:nvPr/>
+        </p:nvSpPr>
+        <p:spPr>
+          <a:xfrm>
+            <a:off x="6492240" y="2764231"/>
+            <a:ext cx="2061972" cy="201168"/>
+          </a:xfrm>
+          <a:prstGeom prst="rect">
+            <a:avLst/>
+          </a:prstGeom>
+          <a:noFill/>
+        </p:spPr>
+        <p:txBody>
+          <a:bodyPr wrap="square" anchor="t" lIns="0" rIns="0" tIns="0" bIns="0">
+            <a:spAutoFit/>
+          </a:bodyPr>
+          <a:lstStyle/>
+          <a:p>
+            <a:pPr algn="ctr">
+              <a:lnSpc>
                 <a:spcPct val="130000"/>
               </a:lnSpc>
             </a:pPr>
             <a:r>
-              <a:rPr sz="1400" b="1" lang="ja-JP">
-                <a:solidFill>
-                  <a:srgbClr val="182C43"/>
-                </a:solidFill>
-                <a:latin typeface="Yu Gothic"/>
-                <a:ea typeface="Yu Gothic"/>
-                <a:cs typeface="Yu Gothic"/>
-              </a:rPr>
-              <a:t>内容審査</a:t>
-            </a:r>
-          </a:p>
-        </p:txBody>
-      </p:sp>
-      <p:sp>
-        <p:nvSpPr>
-          <p:cNvPr id="25" name="TextBox 24"/>
-          <p:cNvSpPr txBox="1"/>
-          <p:nvPr/>
-        </p:nvSpPr>
-        <p:spPr>
-          <a:xfrm>
-            <a:off x="5352897" y="2212848"/>
-            <a:ext cx="1492300" cy="310896"/>
-          </a:xfrm>
-          <a:prstGeom prst="rect">
-            <a:avLst/>
-          </a:prstGeom>
-          <a:noFill/>
-        </p:spPr>
-        <p:txBody>
-          <a:bodyPr wrap="square" anchor="t" lIns="0" rIns="0" tIns="0" bIns="0">
-            <a:spAutoFit/>
-          </a:bodyPr>
-          <a:lstStyle/>
-          <a:p>
-            <a:pPr algn="ctr">
-              <a:lnSpc>
-                <a:spcPct val="112000"/>
-              </a:lnSpc>
-            </a:pPr>
-            <a:r>
-              <a:rPr sz="1200" b="0" lang="ja-JP">
-                <a:solidFill>
-                  <a:srgbClr val="202729"/>
-                </a:solidFill>
-                <a:latin typeface="Yu Gothic"/>
-                <a:ea typeface="Yu Gothic"/>
-                <a:cs typeface="Yu Gothic"/>
-              </a:rPr>
-              <a:t>リスクと効果を評価</a:t>
-            </a:r>
-          </a:p>
-        </p:txBody>
-      </p:sp>
-      <p:sp>
-        <p:nvSpPr>
-          <p:cNvPr id="26" name="TextBox 25"/>
-          <p:cNvSpPr txBox="1"/>
-          <p:nvPr/>
-        </p:nvSpPr>
-        <p:spPr>
-          <a:xfrm>
-            <a:off x="5352897" y="2441448"/>
-            <a:ext cx="1492300" cy="201168"/>
-          </a:xfrm>
-          <a:prstGeom prst="rect">
-            <a:avLst/>
-          </a:prstGeom>
-          <a:noFill/>
-        </p:spPr>
-        <p:txBody>
-          <a:bodyPr wrap="square" anchor="t" lIns="0" rIns="0" tIns="0" bIns="0">
-            <a:spAutoFit/>
-          </a:bodyPr>
-          <a:lstStyle/>
-          <a:p>
-            <a:pPr algn="ctr">
-              <a:lnSpc>
-                <a:spcPct val="130000"/>
-              </a:lnSpc>
-            </a:pPr>
-            <a:r>
               <a:rPr sz="950" b="1" lang="ja-JP">
                 <a:solidFill>
                   <a:srgbClr val="0D7870"/>
@@ -7113,21 +7076,21 @@
                 <a:ea typeface="Yu Gothic"/>
                 <a:cs typeface="Yu Gothic"/>
               </a:rPr>
-              <a:t>審査会</a:t>
-            </a:r>
-          </a:p>
-        </p:txBody>
-      </p:sp>
-      <p:sp>
-        <p:nvSpPr>
-          <p:cNvPr id="27" name="Rectangle 26"/>
+              <a:t>審査部門</a:t>
+            </a:r>
+          </a:p>
+        </p:txBody>
+      </p:sp>
+      <p:sp>
+        <p:nvSpPr>
+          <p:cNvPr id="26" name="Rectangle 25"/>
           <p:cNvSpPr/>
           <p:nvPr/>
         </p:nvSpPr>
         <p:spPr>
           <a:xfrm>
-            <a:off x="7494422" y="1755648"/>
-            <a:ext cx="1766620" cy="932688"/>
+            <a:off x="9203436" y="2023567"/>
+            <a:ext cx="2336292" cy="987552"/>
           </a:xfrm>
           <a:prstGeom prst="rect">
             <a:avLst/>
@@ -7166,14 +7129,55 @@
       </p:sp>
       <p:sp>
         <p:nvSpPr>
+          <p:cNvPr id="27" name="TextBox 26"/>
+          <p:cNvSpPr txBox="1"/>
+          <p:nvPr/>
+        </p:nvSpPr>
+        <p:spPr>
+          <a:xfrm>
+            <a:off x="9331452" y="2142439"/>
+            <a:ext cx="2080260" cy="292608"/>
+          </a:xfrm>
+          <a:prstGeom prst="rect">
+            <a:avLst/>
+          </a:prstGeom>
+          <a:noFill/>
+        </p:spPr>
+        <p:txBody>
+          <a:bodyPr wrap="square" anchor="t" lIns="0" rIns="0" tIns="0" bIns="0">
+            <a:spAutoFit/>
+          </a:bodyPr>
+          <a:lstStyle/>
+          <a:p>
+            <a:pPr algn="ctr">
+              <a:lnSpc>
+                <a:spcPct val="130000"/>
+              </a:lnSpc>
+            </a:pPr>
+            <a:r>
+              <a:rPr sz="1400" b="1" lang="ja-JP">
+                <a:solidFill>
+                  <a:srgbClr val="182C43"/>
+                </a:solidFill>
+                <a:latin typeface="Yu Gothic"/>
+                <a:ea typeface="Yu Gothic"/>
+                <a:cs typeface="Yu Gothic"/>
+              </a:rPr>
+              <a:t>実施</a:t>
+            </a:r>
+          </a:p>
+        </p:txBody>
+      </p:sp>
+      <p:sp>
+        <p:nvSpPr>
           <p:cNvPr id="28" name="TextBox 27"/>
           <p:cNvSpPr txBox="1"/>
           <p:nvPr/>
         </p:nvSpPr>
         <p:spPr>
           <a:xfrm>
-            <a:off x="7622438" y="1874520"/>
-            <a:ext cx="1510588" cy="292608"/>
+            <a:off x="9340596" y="2480767"/>
+            <a:ext cx="2061972" cy="310896"/>
           </a:xfrm>
           <a:prstGeom prst="rect">
             <a:avLst/>
@@ -7188,60 +7192,60 @@
           <a:p>
             <a:pPr algn="ctr">
               <a:lnSpc>
+                <a:spcPct val="112000"/>
+              </a:lnSpc>
+            </a:pPr>
+            <a:r>
+              <a:rPr sz="1250" b="0" lang="ja-JP">
+                <a:solidFill>
+                  <a:srgbClr val="202729"/>
+                </a:solidFill>
+                <a:latin typeface="Yu Gothic"/>
+                <a:ea typeface="Yu Gothic"/>
+                <a:cs typeface="Yu Gothic"/>
+              </a:rPr>
+              <a:t>承認内容に沿って着手</a:t>
+            </a:r>
+          </a:p>
+        </p:txBody>
+      </p:sp>
+      <p:sp>
+        <p:nvSpPr>
+          <p:cNvPr id="29" name="TextBox 28"/>
+          <p:cNvSpPr txBox="1"/>
+          <p:nvPr/>
+        </p:nvSpPr>
+        <p:spPr>
+          <a:xfrm>
+            <a:off x="9340596" y="2764231"/>
+            <a:ext cx="2061972" cy="201168"/>
+          </a:xfrm>
+          <a:prstGeom prst="rect">
+            <a:avLst/>
+          </a:prstGeom>
+          <a:noFill/>
+        </p:spPr>
+        <p:txBody>
+          <a:bodyPr wrap="square" anchor="t" lIns="0" rIns="0" tIns="0" bIns="0">
+            <a:spAutoFit/>
+          </a:bodyPr>
+          <a:lstStyle/>
+          <a:p>
+            <a:pPr algn="ctr">
+              <a:lnSpc>
                 <a:spcPct val="130000"/>
               </a:lnSpc>
             </a:pPr>
             <a:r>
-              <a:rPr sz="1400" b="1" lang="ja-JP">
-                <a:solidFill>
-                  <a:srgbClr val="182C43"/>
-                </a:solidFill>
-                <a:latin typeface="Yu Gothic"/>
-                <a:ea typeface="Yu Gothic"/>
-                <a:cs typeface="Yu Gothic"/>
-              </a:rPr>
-              <a:t>承認</a:t>
-            </a:r>
-          </a:p>
-        </p:txBody>
-      </p:sp>
-      <p:sp>
-        <p:nvSpPr>
-          <p:cNvPr id="29" name="TextBox 28"/>
-          <p:cNvSpPr txBox="1"/>
-          <p:nvPr/>
-        </p:nvSpPr>
-        <p:spPr>
-          <a:xfrm>
-            <a:off x="7631582" y="2212848"/>
-            <a:ext cx="1492300" cy="457200"/>
-          </a:xfrm>
-          <a:prstGeom prst="rect">
-            <a:avLst/>
-          </a:prstGeom>
-          <a:noFill/>
-        </p:spPr>
-        <p:txBody>
-          <a:bodyPr wrap="square" anchor="t" lIns="0" rIns="0" tIns="0" bIns="0">
-            <a:spAutoFit/>
-          </a:bodyPr>
-          <a:lstStyle/>
-          <a:p>
-            <a:pPr algn="ctr">
-              <a:lnSpc>
-                <a:spcPct val="112000"/>
-              </a:lnSpc>
-            </a:pPr>
-            <a:r>
-              <a:rPr sz="1250" b="0" lang="ja-JP">
-                <a:solidFill>
-                  <a:srgbClr val="202729"/>
-                </a:solidFill>
-                <a:latin typeface="Yu Gothic"/>
-                <a:ea typeface="Yu Gothic"/>
-                <a:cs typeface="Yu Gothic"/>
-              </a:rPr>
-              <a:t>実施条件を確定</a:t>
+              <a:rPr sz="950" b="1" lang="ja-JP">
+                <a:solidFill>
+                  <a:srgbClr val="0D7870"/>
+                </a:solidFill>
+                <a:latin typeface="Yu Gothic"/>
+                <a:ea typeface="Yu Gothic"/>
+                <a:cs typeface="Yu Gothic"/>
+              </a:rPr>
+              <a:t>実施部門</a:t>
             </a:r>
           </a:p>
         </p:txBody>
@@ -7254,8 +7258,8 @@
         </p:nvSpPr>
         <p:spPr>
           <a:xfrm>
-            <a:off x="7494422" y="2999232"/>
-            <a:ext cx="1766620" cy="932688"/>
+            <a:off x="9203436" y="3340303"/>
+            <a:ext cx="2336292" cy="987552"/>
           </a:xfrm>
           <a:prstGeom prst="rect">
             <a:avLst/>
@@ -7300,8 +7304,8 @@
         </p:nvSpPr>
         <p:spPr>
           <a:xfrm>
-            <a:off x="7622438" y="3118104"/>
-            <a:ext cx="1510588" cy="292608"/>
+            <a:off x="9331452" y="3459175"/>
+            <a:ext cx="2080260" cy="292608"/>
           </a:xfrm>
           <a:prstGeom prst="rect">
             <a:avLst/>
@@ -7341,8 +7345,8 @@
         </p:nvSpPr>
         <p:spPr>
           <a:xfrm>
-            <a:off x="7631582" y="3456432"/>
-            <a:ext cx="1492300" cy="310896"/>
+            <a:off x="9340596" y="3797503"/>
+            <a:ext cx="2061972" cy="310896"/>
           </a:xfrm>
           <a:prstGeom prst="rect">
             <a:avLst/>
@@ -7382,8 +7386,8 @@
         </p:nvSpPr>
         <p:spPr>
           <a:xfrm>
-            <a:off x="7631582" y="3685032"/>
-            <a:ext cx="1492300" cy="201168"/>
+            <a:off x="9340596" y="4080967"/>
+            <a:ext cx="2061972" cy="201168"/>
           </a:xfrm>
           <a:prstGeom prst="rect">
             <a:avLst/>
@@ -7417,182 +7421,13 @@
       </p:sp>
       <p:sp>
         <p:nvSpPr>
-          <p:cNvPr id="34" name="Rectangle 33"/>
-          <p:cNvSpPr/>
-          <p:nvPr/>
-        </p:nvSpPr>
-        <p:spPr>
-          <a:xfrm>
-            <a:off x="9773107" y="1755648"/>
-            <a:ext cx="1766620" cy="932688"/>
-          </a:xfrm>
-          <a:prstGeom prst="rect">
-            <a:avLst/>
-          </a:prstGeom>
-          <a:solidFill>
-            <a:srgbClr val="FFFFFC"/>
-          </a:solidFill>
-          <a:ln w="9525">
-            <a:solidFill>
-              <a:srgbClr val="D1CFC8"/>
-            </a:solidFill>
-          </a:ln>
-          <a:effectLst/>
-        </p:spPr>
-        <p:style>
-          <a:lnRef idx="1">
-            <a:schemeClr val="accent1"/>
-          </a:lnRef>
-          <a:fillRef idx="3">
-            <a:schemeClr val="accent1"/>
-          </a:fillRef>
-          <a:effectRef idx="2">
-            <a:schemeClr val="accent1"/>
-          </a:effectRef>
-          <a:fontRef idx="minor">
-            <a:schemeClr val="lt1"/>
-          </a:fontRef>
-        </p:style>
-        <p:txBody>
-          <a:bodyPr rtlCol="0" anchor="ctr"/>
-          <a:lstStyle/>
-          <a:p>
-            <a:pPr algn="ctr"/>
-          </a:p>
-        </p:txBody>
-      </p:sp>
-      <p:sp>
-        <p:nvSpPr>
-          <p:cNvPr id="35" name="TextBox 34"/>
-          <p:cNvSpPr txBox="1"/>
-          <p:nvPr/>
-        </p:nvSpPr>
-        <p:spPr>
-          <a:xfrm>
-            <a:off x="9901123" y="1874520"/>
-            <a:ext cx="1510588" cy="292608"/>
-          </a:xfrm>
-          <a:prstGeom prst="rect">
-            <a:avLst/>
-          </a:prstGeom>
-          <a:noFill/>
-        </p:spPr>
-        <p:txBody>
-          <a:bodyPr wrap="square" anchor="t" lIns="0" rIns="0" tIns="0" bIns="0">
-            <a:spAutoFit/>
-          </a:bodyPr>
-          <a:lstStyle/>
-          <a:p>
-            <a:pPr algn="ctr">
-              <a:lnSpc>
-                <a:spcPct val="130000"/>
-              </a:lnSpc>
-            </a:pPr>
-            <a:r>
-              <a:rPr sz="1400" b="1" lang="ja-JP">
-                <a:solidFill>
-                  <a:srgbClr val="182C43"/>
-                </a:solidFill>
-                <a:latin typeface="Yu Gothic"/>
-                <a:ea typeface="Yu Gothic"/>
-                <a:cs typeface="Yu Gothic"/>
-              </a:rPr>
-              <a:t>実施</a:t>
-            </a:r>
-          </a:p>
-        </p:txBody>
-      </p:sp>
-      <p:sp>
-        <p:nvSpPr>
-          <p:cNvPr id="36" name="TextBox 35"/>
-          <p:cNvSpPr txBox="1"/>
-          <p:nvPr/>
-        </p:nvSpPr>
-        <p:spPr>
-          <a:xfrm>
-            <a:off x="9910267" y="2212848"/>
-            <a:ext cx="1492300" cy="310896"/>
-          </a:xfrm>
-          <a:prstGeom prst="rect">
-            <a:avLst/>
-          </a:prstGeom>
-          <a:noFill/>
-        </p:spPr>
-        <p:txBody>
-          <a:bodyPr wrap="square" anchor="t" lIns="0" rIns="0" tIns="0" bIns="0">
-            <a:spAutoFit/>
-          </a:bodyPr>
-          <a:lstStyle/>
-          <a:p>
-            <a:pPr algn="ctr">
-              <a:lnSpc>
-                <a:spcPct val="112000"/>
-              </a:lnSpc>
-            </a:pPr>
-            <a:r>
-              <a:rPr sz="1250" b="0" lang="ja-JP">
-                <a:solidFill>
-                  <a:srgbClr val="202729"/>
-                </a:solidFill>
-                <a:latin typeface="Yu Gothic"/>
-                <a:ea typeface="Yu Gothic"/>
-                <a:cs typeface="Yu Gothic"/>
-              </a:rPr>
-              <a:t>計画に沿って着手</a:t>
-            </a:r>
-          </a:p>
-        </p:txBody>
-      </p:sp>
-      <p:sp>
-        <p:nvSpPr>
-          <p:cNvPr id="37" name="TextBox 36"/>
-          <p:cNvSpPr txBox="1"/>
-          <p:nvPr/>
-        </p:nvSpPr>
-        <p:spPr>
-          <a:xfrm>
-            <a:off x="9910267" y="2441448"/>
-            <a:ext cx="1492300" cy="201168"/>
-          </a:xfrm>
-          <a:prstGeom prst="rect">
-            <a:avLst/>
-          </a:prstGeom>
-          <a:noFill/>
-        </p:spPr>
-        <p:txBody>
-          <a:bodyPr wrap="square" anchor="t" lIns="0" rIns="0" tIns="0" bIns="0">
-            <a:spAutoFit/>
-          </a:bodyPr>
-          <a:lstStyle/>
-          <a:p>
-            <a:pPr algn="ctr">
-              <a:lnSpc>
-                <a:spcPct val="130000"/>
-              </a:lnSpc>
-            </a:pPr>
-            <a:r>
-              <a:rPr sz="950" b="1" lang="ja-JP">
-                <a:solidFill>
-                  <a:srgbClr val="0D7870"/>
-                </a:solidFill>
-                <a:latin typeface="Yu Gothic"/>
-                <a:ea typeface="Yu Gothic"/>
-                <a:cs typeface="Yu Gothic"/>
-              </a:rPr>
-              <a:t>実行責任者</a:t>
-            </a:r>
-          </a:p>
-        </p:txBody>
-      </p:sp>
-      <p:sp>
-        <p:nvSpPr>
-          <p:cNvPr id="38" name="TextBox 37"/>
-          <p:cNvSpPr txBox="1"/>
-          <p:nvPr/>
-        </p:nvSpPr>
-        <p:spPr>
-          <a:xfrm>
-            <a:off x="7079513" y="2144331"/>
+          <p:cNvPr id="34" name="TextBox 33"/>
+          <p:cNvSpPr txBox="1"/>
+          <p:nvPr/>
+        </p:nvSpPr>
+        <p:spPr>
+          <a:xfrm>
+            <a:off x="8788527" y="2439682"/>
             <a:ext cx="317754" cy="155321"/>
           </a:xfrm>
           <a:prstGeom prst="rect">
@@ -7629,13 +7464,13 @@
       </p:sp>
       <p:sp>
         <p:nvSpPr>
-          <p:cNvPr id="39" name="TextBox 38"/>
-          <p:cNvSpPr txBox="1"/>
-          <p:nvPr/>
-        </p:nvSpPr>
-        <p:spPr>
-          <a:xfrm>
-            <a:off x="7022934" y="3387915"/>
+          <p:cNvPr id="35" name="TextBox 34"/>
+          <p:cNvSpPr txBox="1"/>
+          <p:nvPr/>
+        </p:nvSpPr>
+        <p:spPr>
+          <a:xfrm>
+            <a:off x="8731948" y="3756418"/>
             <a:ext cx="430911" cy="155321"/>
           </a:xfrm>
           <a:prstGeom prst="rect">
@@ -7672,13 +7507,13 @@
       </p:sp>
       <p:sp>
         <p:nvSpPr>
-          <p:cNvPr id="40" name="TextBox 39"/>
-          <p:cNvSpPr txBox="1"/>
-          <p:nvPr/>
-        </p:nvSpPr>
-        <p:spPr>
-          <a:xfrm>
-            <a:off x="5883592" y="4293171"/>
+          <p:cNvPr id="36" name="TextBox 35"/>
+          <p:cNvSpPr txBox="1"/>
+          <p:nvPr/>
+        </p:nvSpPr>
+        <p:spPr>
+          <a:xfrm>
+            <a:off x="7307770" y="4634242"/>
             <a:ext cx="430911" cy="155321"/>
           </a:xfrm>
           <a:prstGeom prst="rect">
@@ -7715,7 +7550,7 @@
       </p:sp>
       <p:sp>
         <p:nvSpPr>
-          <p:cNvPr id="41" name="Rectangle 40"/>
+          <p:cNvPr id="37" name="Rectangle 36"/>
           <p:cNvSpPr/>
           <p:nvPr/>
         </p:nvSpPr>
@@ -7759,7 +7594,7 @@
       </p:sp>
       <p:sp>
         <p:nvSpPr>
-          <p:cNvPr id="42" name="TextBox 41"/>
+          <p:cNvPr id="38" name="TextBox 37"/>
           <p:cNvSpPr txBox="1"/>
           <p:nvPr/>
         </p:nvSpPr>
@@ -7800,7 +7635,7 @@
       </p:sp>
       <p:sp>
         <p:nvSpPr>
-          <p:cNvPr id="43" name="TextBox 42"/>
+          <p:cNvPr id="39" name="TextBox 38"/>
           <p:cNvSpPr txBox="1"/>
           <p:nvPr/>
         </p:nvSpPr>
@@ -7841,7 +7676,7 @@
       </p:sp>
       <p:sp>
         <p:nvSpPr>
-          <p:cNvPr id="44" name="TextBox 43"/>
+          <p:cNvPr id="40" name="TextBox 39"/>
           <p:cNvSpPr txBox="1"/>
           <p:nvPr/>
         </p:nvSpPr>
@@ -18002,7 +17837,7 @@
                 <a:ea typeface="Yu Gothic"/>
                 <a:cs typeface="Yu Gothic"/>
               </a:rPr>
-              <a:t>事業・技術の共同責任者から、実行組織へ権限をつなぐ</a:t>
+              <a:t>責任者から各チームまで、指揮系統を明確にする</a:t>
             </a:r>
           </a:p>
         </p:txBody>
@@ -18015,13 +17850,13 @@
         </p:nvCxnSpPr>
         <p:spPr>
           <a:xfrm>
-            <a:off x="3267379" y="2286000"/>
-            <a:ext cx="0" cy="155448"/>
+            <a:off x="3974439" y="2880360"/>
+            <a:ext cx="4242816" cy="0"/>
           </a:xfrm>
           <a:prstGeom prst="line">
             <a:avLst/>
           </a:prstGeom>
-          <a:ln w="15875">
+          <a:ln w="13970">
             <a:solidFill>
               <a:srgbClr val="6C7372"/>
             </a:solidFill>
@@ -18051,13 +17886,13 @@
         </p:nvCxnSpPr>
         <p:spPr>
           <a:xfrm>
-            <a:off x="3267379" y="2441448"/>
-            <a:ext cx="2828468" cy="0"/>
+            <a:off x="3974439" y="2596896"/>
+            <a:ext cx="0" cy="283464"/>
           </a:xfrm>
           <a:prstGeom prst="line">
             <a:avLst/>
           </a:prstGeom>
-          <a:ln w="15875">
+          <a:ln w="13970">
             <a:solidFill>
               <a:srgbClr val="6C7372"/>
             </a:solidFill>
@@ -18087,17 +17922,16 @@
         </p:nvCxnSpPr>
         <p:spPr>
           <a:xfrm>
-            <a:off x="6095847" y="2441448"/>
-            <a:ext cx="0" cy="155448"/>
+            <a:off x="8217255" y="2596896"/>
+            <a:ext cx="0" cy="283464"/>
           </a:xfrm>
           <a:prstGeom prst="line">
             <a:avLst/>
           </a:prstGeom>
-          <a:ln w="15875">
+          <a:ln w="13970">
             <a:solidFill>
               <a:srgbClr val="6C7372"/>
             </a:solidFill>
-            <a:tailEnd type="triangle" w="med" len="med"/>
           </a:ln>
           <a:effectLst/>
         </p:spPr>
@@ -18124,16 +17958,17 @@
         </p:nvCxnSpPr>
         <p:spPr>
           <a:xfrm>
-            <a:off x="8924315" y="2286000"/>
-            <a:ext cx="0" cy="155448"/>
+            <a:off x="6095847" y="2880360"/>
+            <a:ext cx="0" cy="283464"/>
           </a:xfrm>
           <a:prstGeom prst="line">
             <a:avLst/>
           </a:prstGeom>
-          <a:ln w="15875">
+          <a:ln w="13970">
             <a:solidFill>
               <a:srgbClr val="6C7372"/>
             </a:solidFill>
+            <a:tailEnd type="triangle" w="med" len="med"/>
           </a:ln>
           <a:effectLst/>
         </p:spPr>
@@ -18159,14 +17994,14 @@
           <p:nvPr/>
         </p:nvCxnSpPr>
         <p:spPr>
-          <a:xfrm flipH="1">
-            <a:off x="6095847" y="2441448"/>
-            <a:ext cx="2828468" cy="0"/>
+          <a:xfrm>
+            <a:off x="1853145" y="4215383"/>
+            <a:ext cx="8485404" cy="0"/>
           </a:xfrm>
           <a:prstGeom prst="line">
             <a:avLst/>
           </a:prstGeom>
-          <a:ln w="15875">
+          <a:ln w="13970">
             <a:solidFill>
               <a:srgbClr val="6C7372"/>
             </a:solidFill>
@@ -18196,17 +18031,16 @@
         </p:nvCxnSpPr>
         <p:spPr>
           <a:xfrm>
-            <a:off x="6095847" y="2441448"/>
-            <a:ext cx="0" cy="155448"/>
+            <a:off x="6095847" y="3931920"/>
+            <a:ext cx="0" cy="283463"/>
           </a:xfrm>
           <a:prstGeom prst="line">
             <a:avLst/>
           </a:prstGeom>
-          <a:ln w="15875">
+          <a:ln w="13970">
             <a:solidFill>
               <a:srgbClr val="6C7372"/>
             </a:solidFill>
-            <a:tailEnd type="triangle" w="med" len="med"/>
           </a:ln>
           <a:effectLst/>
         </p:spPr>
@@ -18233,16 +18067,17 @@
         </p:nvCxnSpPr>
         <p:spPr>
           <a:xfrm>
-            <a:off x="8924315" y="2286000"/>
-            <a:ext cx="0" cy="155448"/>
+            <a:off x="1853145" y="4215383"/>
+            <a:ext cx="0" cy="283465"/>
           </a:xfrm>
           <a:prstGeom prst="line">
             <a:avLst/>
           </a:prstGeom>
-          <a:ln w="15875">
+          <a:ln w="13970">
             <a:solidFill>
               <a:srgbClr val="6C7372"/>
             </a:solidFill>
+            <a:tailEnd type="triangle" w="med" len="med"/>
           </a:ln>
           <a:effectLst/>
         </p:spPr>
@@ -18269,16 +18104,17 @@
         </p:nvCxnSpPr>
         <p:spPr>
           <a:xfrm>
-            <a:off x="8924315" y="2441448"/>
-            <a:ext cx="991591" cy="0"/>
+            <a:off x="4681613" y="4215383"/>
+            <a:ext cx="0" cy="283465"/>
           </a:xfrm>
           <a:prstGeom prst="line">
             <a:avLst/>
           </a:prstGeom>
-          <a:ln w="15875">
+          <a:ln w="13970">
             <a:solidFill>
               <a:srgbClr val="6C7372"/>
             </a:solidFill>
+            <a:tailEnd type="triangle" w="med" len="med"/>
           </a:ln>
           <a:effectLst/>
         </p:spPr>
@@ -18305,13 +18141,13 @@
         </p:nvCxnSpPr>
         <p:spPr>
           <a:xfrm>
-            <a:off x="9915906" y="2441448"/>
-            <a:ext cx="0" cy="155448"/>
+            <a:off x="7510081" y="4215383"/>
+            <a:ext cx="0" cy="283465"/>
           </a:xfrm>
           <a:prstGeom prst="line">
             <a:avLst/>
           </a:prstGeom>
-          <a:ln w="15875">
+          <a:ln w="13970">
             <a:solidFill>
               <a:srgbClr val="6C7372"/>
             </a:solidFill>
@@ -18342,16 +18178,17 @@
         </p:nvCxnSpPr>
         <p:spPr>
           <a:xfrm>
-            <a:off x="6095847" y="3364991"/>
-            <a:ext cx="0" cy="155448"/>
+            <a:off x="10338549" y="4215383"/>
+            <a:ext cx="0" cy="283465"/>
           </a:xfrm>
           <a:prstGeom prst="line">
             <a:avLst/>
           </a:prstGeom>
-          <a:ln w="15875">
+          <a:ln w="13970">
             <a:solidFill>
               <a:srgbClr val="6C7372"/>
             </a:solidFill>
+            <a:tailEnd type="triangle" w="med" len="med"/>
           </a:ln>
           <a:effectLst/>
         </p:spPr>
@@ -18370,634 +18207,16 @@
           </a:fontRef>
         </p:style>
       </p:cxnSp>
-      <p:cxnSp>
-        <p:nvCxnSpPr>
-          <p:cNvPr id="15" name="Connector 14"/>
-          <p:cNvCxnSpPr/>
-          <p:nvPr/>
-        </p:nvCxnSpPr>
-        <p:spPr>
-          <a:xfrm flipH="1">
-            <a:off x="2324557" y="3520439"/>
-            <a:ext cx="3771290" cy="0"/>
-          </a:xfrm>
-          <a:prstGeom prst="line">
-            <a:avLst/>
-          </a:prstGeom>
-          <a:ln w="15875">
-            <a:solidFill>
-              <a:srgbClr val="6C7372"/>
-            </a:solidFill>
-          </a:ln>
-          <a:effectLst/>
-        </p:spPr>
-        <p:style>
-          <a:lnRef idx="2">
-            <a:schemeClr val="accent1"/>
-          </a:lnRef>
-          <a:fillRef idx="0">
-            <a:schemeClr val="accent1"/>
-          </a:fillRef>
-          <a:effectRef idx="1">
-            <a:schemeClr val="accent1"/>
-          </a:effectRef>
-          <a:fontRef idx="minor">
-            <a:schemeClr val="tx1"/>
-          </a:fontRef>
-        </p:style>
-      </p:cxnSp>
-      <p:cxnSp>
-        <p:nvCxnSpPr>
-          <p:cNvPr id="16" name="Connector 15"/>
-          <p:cNvCxnSpPr/>
-          <p:nvPr/>
-        </p:nvCxnSpPr>
-        <p:spPr>
-          <a:xfrm>
-            <a:off x="2324557" y="3520439"/>
-            <a:ext cx="0" cy="155448"/>
-          </a:xfrm>
-          <a:prstGeom prst="line">
-            <a:avLst/>
-          </a:prstGeom>
-          <a:ln w="15875">
-            <a:solidFill>
-              <a:srgbClr val="6C7372"/>
-            </a:solidFill>
-            <a:tailEnd type="triangle" w="med" len="med"/>
-          </a:ln>
-          <a:effectLst/>
-        </p:spPr>
-        <p:style>
-          <a:lnRef idx="2">
-            <a:schemeClr val="accent1"/>
-          </a:lnRef>
-          <a:fillRef idx="0">
-            <a:schemeClr val="accent1"/>
-          </a:fillRef>
-          <a:effectRef idx="1">
-            <a:schemeClr val="accent1"/>
-          </a:effectRef>
-          <a:fontRef idx="minor">
-            <a:schemeClr val="tx1"/>
-          </a:fontRef>
-        </p:style>
-      </p:cxnSp>
-      <p:cxnSp>
-        <p:nvCxnSpPr>
-          <p:cNvPr id="17" name="Connector 16"/>
-          <p:cNvCxnSpPr/>
-          <p:nvPr/>
-        </p:nvCxnSpPr>
-        <p:spPr>
-          <a:xfrm>
-            <a:off x="6095847" y="3364991"/>
-            <a:ext cx="0" cy="155448"/>
-          </a:xfrm>
-          <a:prstGeom prst="line">
-            <a:avLst/>
-          </a:prstGeom>
-          <a:ln w="15875">
-            <a:solidFill>
-              <a:srgbClr val="6C7372"/>
-            </a:solidFill>
-          </a:ln>
-          <a:effectLst/>
-        </p:spPr>
-        <p:style>
-          <a:lnRef idx="2">
-            <a:schemeClr val="accent1"/>
-          </a:lnRef>
-          <a:fillRef idx="0">
-            <a:schemeClr val="accent1"/>
-          </a:fillRef>
-          <a:effectRef idx="1">
-            <a:schemeClr val="accent1"/>
-          </a:effectRef>
-          <a:fontRef idx="minor">
-            <a:schemeClr val="tx1"/>
-          </a:fontRef>
-        </p:style>
-      </p:cxnSp>
-      <p:cxnSp>
-        <p:nvCxnSpPr>
-          <p:cNvPr id="18" name="Connector 17"/>
-          <p:cNvCxnSpPr/>
-          <p:nvPr/>
-        </p:nvCxnSpPr>
-        <p:spPr>
-          <a:xfrm>
-            <a:off x="6095847" y="3520439"/>
-            <a:ext cx="0" cy="0"/>
-          </a:xfrm>
-          <a:prstGeom prst="line">
-            <a:avLst/>
-          </a:prstGeom>
-          <a:ln w="15875">
-            <a:solidFill>
-              <a:srgbClr val="6C7372"/>
-            </a:solidFill>
-          </a:ln>
-          <a:effectLst/>
-        </p:spPr>
-        <p:style>
-          <a:lnRef idx="2">
-            <a:schemeClr val="accent1"/>
-          </a:lnRef>
-          <a:fillRef idx="0">
-            <a:schemeClr val="accent1"/>
-          </a:fillRef>
-          <a:effectRef idx="1">
-            <a:schemeClr val="accent1"/>
-          </a:effectRef>
-          <a:fontRef idx="minor">
-            <a:schemeClr val="tx1"/>
-          </a:fontRef>
-        </p:style>
-      </p:cxnSp>
-      <p:cxnSp>
-        <p:nvCxnSpPr>
-          <p:cNvPr id="19" name="Connector 18"/>
-          <p:cNvCxnSpPr/>
-          <p:nvPr/>
-        </p:nvCxnSpPr>
-        <p:spPr>
-          <a:xfrm>
-            <a:off x="6095847" y="3520439"/>
-            <a:ext cx="0" cy="155448"/>
-          </a:xfrm>
-          <a:prstGeom prst="line">
-            <a:avLst/>
-          </a:prstGeom>
-          <a:ln w="15875">
-            <a:solidFill>
-              <a:srgbClr val="6C7372"/>
-            </a:solidFill>
-            <a:tailEnd type="triangle" w="med" len="med"/>
-          </a:ln>
-          <a:effectLst/>
-        </p:spPr>
-        <p:style>
-          <a:lnRef idx="2">
-            <a:schemeClr val="accent1"/>
-          </a:lnRef>
-          <a:fillRef idx="0">
-            <a:schemeClr val="accent1"/>
-          </a:fillRef>
-          <a:effectRef idx="1">
-            <a:schemeClr val="accent1"/>
-          </a:effectRef>
-          <a:fontRef idx="minor">
-            <a:schemeClr val="tx1"/>
-          </a:fontRef>
-        </p:style>
-      </p:cxnSp>
-      <p:cxnSp>
-        <p:nvCxnSpPr>
-          <p:cNvPr id="20" name="Connector 19"/>
-          <p:cNvCxnSpPr/>
-          <p:nvPr/>
-        </p:nvCxnSpPr>
-        <p:spPr>
-          <a:xfrm>
-            <a:off x="6095847" y="3364991"/>
-            <a:ext cx="0" cy="155448"/>
-          </a:xfrm>
-          <a:prstGeom prst="line">
-            <a:avLst/>
-          </a:prstGeom>
-          <a:ln w="15875">
-            <a:solidFill>
-              <a:srgbClr val="6C7372"/>
-            </a:solidFill>
-          </a:ln>
-          <a:effectLst/>
-        </p:spPr>
-        <p:style>
-          <a:lnRef idx="2">
-            <a:schemeClr val="accent1"/>
-          </a:lnRef>
-          <a:fillRef idx="0">
-            <a:schemeClr val="accent1"/>
-          </a:fillRef>
-          <a:effectRef idx="1">
-            <a:schemeClr val="accent1"/>
-          </a:effectRef>
-          <a:fontRef idx="minor">
-            <a:schemeClr val="tx1"/>
-          </a:fontRef>
-        </p:style>
-      </p:cxnSp>
-      <p:cxnSp>
-        <p:nvCxnSpPr>
-          <p:cNvPr id="21" name="Connector 20"/>
-          <p:cNvCxnSpPr/>
-          <p:nvPr/>
-        </p:nvCxnSpPr>
-        <p:spPr>
-          <a:xfrm>
-            <a:off x="6095847" y="3520439"/>
-            <a:ext cx="3771291" cy="0"/>
-          </a:xfrm>
-          <a:prstGeom prst="line">
-            <a:avLst/>
-          </a:prstGeom>
-          <a:ln w="15875">
-            <a:solidFill>
-              <a:srgbClr val="6C7372"/>
-            </a:solidFill>
-          </a:ln>
-          <a:effectLst/>
-        </p:spPr>
-        <p:style>
-          <a:lnRef idx="2">
-            <a:schemeClr val="accent1"/>
-          </a:lnRef>
-          <a:fillRef idx="0">
-            <a:schemeClr val="accent1"/>
-          </a:fillRef>
-          <a:effectRef idx="1">
-            <a:schemeClr val="accent1"/>
-          </a:effectRef>
-          <a:fontRef idx="minor">
-            <a:schemeClr val="tx1"/>
-          </a:fontRef>
-        </p:style>
-      </p:cxnSp>
-      <p:cxnSp>
-        <p:nvCxnSpPr>
-          <p:cNvPr id="22" name="Connector 21"/>
-          <p:cNvCxnSpPr/>
-          <p:nvPr/>
-        </p:nvCxnSpPr>
-        <p:spPr>
-          <a:xfrm>
-            <a:off x="9867138" y="3520439"/>
-            <a:ext cx="0" cy="155448"/>
-          </a:xfrm>
-          <a:prstGeom prst="line">
-            <a:avLst/>
-          </a:prstGeom>
-          <a:ln w="15875">
-            <a:solidFill>
-              <a:srgbClr val="6C7372"/>
-            </a:solidFill>
-            <a:tailEnd type="triangle" w="med" len="med"/>
-          </a:ln>
-          <a:effectLst/>
-        </p:spPr>
-        <p:style>
-          <a:lnRef idx="2">
-            <a:schemeClr val="accent1"/>
-          </a:lnRef>
-          <a:fillRef idx="0">
-            <a:schemeClr val="accent1"/>
-          </a:fillRef>
-          <a:effectRef idx="1">
-            <a:schemeClr val="accent1"/>
-          </a:effectRef>
-          <a:fontRef idx="minor">
-            <a:schemeClr val="tx1"/>
-          </a:fontRef>
-        </p:style>
-      </p:cxnSp>
-      <p:cxnSp>
-        <p:nvCxnSpPr>
-          <p:cNvPr id="23" name="Connector 22"/>
-          <p:cNvCxnSpPr/>
-          <p:nvPr/>
-        </p:nvCxnSpPr>
-        <p:spPr>
-          <a:xfrm>
-            <a:off x="9915906" y="3364991"/>
-            <a:ext cx="0" cy="155448"/>
-          </a:xfrm>
-          <a:prstGeom prst="line">
-            <a:avLst/>
-          </a:prstGeom>
-          <a:ln w="15875">
-            <a:solidFill>
-              <a:srgbClr val="6C7372"/>
-            </a:solidFill>
-          </a:ln>
-          <a:effectLst/>
-        </p:spPr>
-        <p:style>
-          <a:lnRef idx="2">
-            <a:schemeClr val="accent1"/>
-          </a:lnRef>
-          <a:fillRef idx="0">
-            <a:schemeClr val="accent1"/>
-          </a:fillRef>
-          <a:effectRef idx="1">
-            <a:schemeClr val="accent1"/>
-          </a:effectRef>
-          <a:fontRef idx="minor">
-            <a:schemeClr val="tx1"/>
-          </a:fontRef>
-        </p:style>
-      </p:cxnSp>
-      <p:cxnSp>
-        <p:nvCxnSpPr>
-          <p:cNvPr id="24" name="Connector 23"/>
-          <p:cNvCxnSpPr/>
-          <p:nvPr/>
-        </p:nvCxnSpPr>
-        <p:spPr>
-          <a:xfrm flipH="1">
-            <a:off x="6095847" y="3520439"/>
-            <a:ext cx="3820059" cy="0"/>
-          </a:xfrm>
-          <a:prstGeom prst="line">
-            <a:avLst/>
-          </a:prstGeom>
-          <a:ln w="15875">
-            <a:solidFill>
-              <a:srgbClr val="6C7372"/>
-            </a:solidFill>
-          </a:ln>
-          <a:effectLst/>
-        </p:spPr>
-        <p:style>
-          <a:lnRef idx="2">
-            <a:schemeClr val="accent1"/>
-          </a:lnRef>
-          <a:fillRef idx="0">
-            <a:schemeClr val="accent1"/>
-          </a:fillRef>
-          <a:effectRef idx="1">
-            <a:schemeClr val="accent1"/>
-          </a:effectRef>
-          <a:fontRef idx="minor">
-            <a:schemeClr val="tx1"/>
-          </a:fontRef>
-        </p:style>
-      </p:cxnSp>
-      <p:cxnSp>
-        <p:nvCxnSpPr>
-          <p:cNvPr id="25" name="Connector 24"/>
-          <p:cNvCxnSpPr/>
-          <p:nvPr/>
-        </p:nvCxnSpPr>
-        <p:spPr>
-          <a:xfrm>
-            <a:off x="6095847" y="3520439"/>
-            <a:ext cx="0" cy="155448"/>
-          </a:xfrm>
-          <a:prstGeom prst="line">
-            <a:avLst/>
-          </a:prstGeom>
-          <a:ln w="15875">
-            <a:solidFill>
-              <a:srgbClr val="6C7372"/>
-            </a:solidFill>
-            <a:tailEnd type="triangle" w="med" len="med"/>
-          </a:ln>
-          <a:effectLst/>
-        </p:spPr>
-        <p:style>
-          <a:lnRef idx="2">
-            <a:schemeClr val="accent1"/>
-          </a:lnRef>
-          <a:fillRef idx="0">
-            <a:schemeClr val="accent1"/>
-          </a:fillRef>
-          <a:effectRef idx="1">
-            <a:schemeClr val="accent1"/>
-          </a:effectRef>
-          <a:fontRef idx="minor">
-            <a:schemeClr val="tx1"/>
-          </a:fontRef>
-        </p:style>
-      </p:cxnSp>
-      <p:cxnSp>
-        <p:nvCxnSpPr>
-          <p:cNvPr id="26" name="Connector 25"/>
-          <p:cNvCxnSpPr/>
-          <p:nvPr/>
-        </p:nvCxnSpPr>
-        <p:spPr>
-          <a:xfrm>
-            <a:off x="6095847" y="4828031"/>
-            <a:ext cx="0" cy="155448"/>
-          </a:xfrm>
-          <a:prstGeom prst="line">
-            <a:avLst/>
-          </a:prstGeom>
-          <a:ln w="15875">
-            <a:solidFill>
-              <a:srgbClr val="6C7372"/>
-            </a:solidFill>
-          </a:ln>
-          <a:effectLst/>
-        </p:spPr>
-        <p:style>
-          <a:lnRef idx="2">
-            <a:schemeClr val="accent1"/>
-          </a:lnRef>
-          <a:fillRef idx="0">
-            <a:schemeClr val="accent1"/>
-          </a:fillRef>
-          <a:effectRef idx="1">
-            <a:schemeClr val="accent1"/>
-          </a:effectRef>
-          <a:fontRef idx="minor">
-            <a:schemeClr val="tx1"/>
-          </a:fontRef>
-        </p:style>
-      </p:cxnSp>
-      <p:cxnSp>
-        <p:nvCxnSpPr>
-          <p:cNvPr id="27" name="Connector 26"/>
-          <p:cNvCxnSpPr/>
-          <p:nvPr/>
-        </p:nvCxnSpPr>
-        <p:spPr>
-          <a:xfrm flipH="1">
-            <a:off x="3207943" y="4983479"/>
-            <a:ext cx="2887904" cy="0"/>
-          </a:xfrm>
-          <a:prstGeom prst="line">
-            <a:avLst/>
-          </a:prstGeom>
-          <a:ln w="15875">
-            <a:solidFill>
-              <a:srgbClr val="6C7372"/>
-            </a:solidFill>
-          </a:ln>
-          <a:effectLst/>
-        </p:spPr>
-        <p:style>
-          <a:lnRef idx="2">
-            <a:schemeClr val="accent1"/>
-          </a:lnRef>
-          <a:fillRef idx="0">
-            <a:schemeClr val="accent1"/>
-          </a:fillRef>
-          <a:effectRef idx="1">
-            <a:schemeClr val="accent1"/>
-          </a:effectRef>
-          <a:fontRef idx="minor">
-            <a:schemeClr val="tx1"/>
-          </a:fontRef>
-        </p:style>
-      </p:cxnSp>
-      <p:cxnSp>
-        <p:nvCxnSpPr>
-          <p:cNvPr id="28" name="Connector 27"/>
-          <p:cNvCxnSpPr/>
-          <p:nvPr/>
-        </p:nvCxnSpPr>
-        <p:spPr>
-          <a:xfrm>
-            <a:off x="3207943" y="4983479"/>
-            <a:ext cx="0" cy="155448"/>
-          </a:xfrm>
-          <a:prstGeom prst="line">
-            <a:avLst/>
-          </a:prstGeom>
-          <a:ln w="15875">
-            <a:solidFill>
-              <a:srgbClr val="6C7372"/>
-            </a:solidFill>
-            <a:tailEnd type="triangle" w="med" len="med"/>
-          </a:ln>
-          <a:effectLst/>
-        </p:spPr>
-        <p:style>
-          <a:lnRef idx="2">
-            <a:schemeClr val="accent1"/>
-          </a:lnRef>
-          <a:fillRef idx="0">
-            <a:schemeClr val="accent1"/>
-          </a:fillRef>
-          <a:effectRef idx="1">
-            <a:schemeClr val="accent1"/>
-          </a:effectRef>
-          <a:fontRef idx="minor">
-            <a:schemeClr val="tx1"/>
-          </a:fontRef>
-        </p:style>
-      </p:cxnSp>
-      <p:cxnSp>
-        <p:nvCxnSpPr>
-          <p:cNvPr id="29" name="Connector 28"/>
-          <p:cNvCxnSpPr/>
-          <p:nvPr/>
-        </p:nvCxnSpPr>
-        <p:spPr>
-          <a:xfrm>
-            <a:off x="9867138" y="4828031"/>
-            <a:ext cx="0" cy="155448"/>
-          </a:xfrm>
-          <a:prstGeom prst="line">
-            <a:avLst/>
-          </a:prstGeom>
-          <a:ln w="15875">
-            <a:solidFill>
-              <a:srgbClr val="6C7372"/>
-            </a:solidFill>
-          </a:ln>
-          <a:effectLst/>
-        </p:spPr>
-        <p:style>
-          <a:lnRef idx="2">
-            <a:schemeClr val="accent1"/>
-          </a:lnRef>
-          <a:fillRef idx="0">
-            <a:schemeClr val="accent1"/>
-          </a:fillRef>
-          <a:effectRef idx="1">
-            <a:schemeClr val="accent1"/>
-          </a:effectRef>
-          <a:fontRef idx="minor">
-            <a:schemeClr val="tx1"/>
-          </a:fontRef>
-        </p:style>
-      </p:cxnSp>
-      <p:cxnSp>
-        <p:nvCxnSpPr>
-          <p:cNvPr id="30" name="Connector 29"/>
-          <p:cNvCxnSpPr/>
-          <p:nvPr/>
-        </p:nvCxnSpPr>
-        <p:spPr>
-          <a:xfrm flipH="1">
-            <a:off x="3207943" y="4983479"/>
-            <a:ext cx="6659195" cy="0"/>
-          </a:xfrm>
-          <a:prstGeom prst="line">
-            <a:avLst/>
-          </a:prstGeom>
-          <a:ln w="15875">
-            <a:solidFill>
-              <a:srgbClr val="6C7372"/>
-            </a:solidFill>
-          </a:ln>
-          <a:effectLst/>
-        </p:spPr>
-        <p:style>
-          <a:lnRef idx="2">
-            <a:schemeClr val="accent1"/>
-          </a:lnRef>
-          <a:fillRef idx="0">
-            <a:schemeClr val="accent1"/>
-          </a:fillRef>
-          <a:effectRef idx="1">
-            <a:schemeClr val="accent1"/>
-          </a:effectRef>
-          <a:fontRef idx="minor">
-            <a:schemeClr val="tx1"/>
-          </a:fontRef>
-        </p:style>
-      </p:cxnSp>
-      <p:cxnSp>
-        <p:nvCxnSpPr>
-          <p:cNvPr id="31" name="Connector 30"/>
-          <p:cNvCxnSpPr/>
-          <p:nvPr/>
-        </p:nvCxnSpPr>
-        <p:spPr>
-          <a:xfrm>
-            <a:off x="3207943" y="4983479"/>
-            <a:ext cx="0" cy="155448"/>
-          </a:xfrm>
-          <a:prstGeom prst="line">
-            <a:avLst/>
-          </a:prstGeom>
-          <a:ln w="15875">
-            <a:solidFill>
-              <a:srgbClr val="6C7372"/>
-            </a:solidFill>
-            <a:tailEnd type="triangle" w="med" len="med"/>
-          </a:ln>
-          <a:effectLst/>
-        </p:spPr>
-        <p:style>
-          <a:lnRef idx="2">
-            <a:schemeClr val="accent1"/>
-          </a:lnRef>
-          <a:fillRef idx="0">
-            <a:schemeClr val="accent1"/>
-          </a:fillRef>
-          <a:effectRef idx="1">
-            <a:schemeClr val="accent1"/>
-          </a:effectRef>
-          <a:fontRef idx="minor">
-            <a:schemeClr val="tx1"/>
-          </a:fontRef>
-        </p:style>
-      </p:cxnSp>
-      <p:sp>
-        <p:nvSpPr>
-          <p:cNvPr id="32" name="Rectangle 31"/>
+      <p:sp>
+        <p:nvSpPr>
+          <p:cNvPr id="15" name="Rectangle 14"/>
           <p:cNvSpPr/>
           <p:nvPr/>
         </p:nvSpPr>
         <p:spPr>
           <a:xfrm>
-            <a:off x="594360" y="1517904"/>
-            <a:ext cx="5346039" cy="768096"/>
+            <a:off x="2008479" y="1828800"/>
+            <a:ext cx="3931920" cy="768096"/>
           </a:xfrm>
           <a:prstGeom prst="rect">
             <a:avLst/>
@@ -19036,14 +18255,14 @@
       </p:sp>
       <p:sp>
         <p:nvSpPr>
-          <p:cNvPr id="33" name="TextBox 32"/>
-          <p:cNvSpPr txBox="1"/>
-          <p:nvPr/>
-        </p:nvSpPr>
-        <p:spPr>
-          <a:xfrm>
-            <a:off x="722376" y="1581912"/>
-            <a:ext cx="5090007" cy="228600"/>
+          <p:cNvPr id="16" name="TextBox 15"/>
+          <p:cNvSpPr txBox="1"/>
+          <p:nvPr/>
+        </p:nvSpPr>
+        <p:spPr>
+          <a:xfrm>
+            <a:off x="2136495" y="1892807"/>
+            <a:ext cx="3675887" cy="228600"/>
           </a:xfrm>
           <a:prstGeom prst="rect">
             <a:avLst/>
@@ -19070,21 +18289,21 @@
                 <a:ea typeface="Yu Gothic"/>
                 <a:cs typeface="Yu Gothic"/>
               </a:rPr>
-              <a:t>事業責任者</a:t>
-            </a:r>
-          </a:p>
-        </p:txBody>
-      </p:sp>
-      <p:sp>
-        <p:nvSpPr>
-          <p:cNvPr id="34" name="TextBox 33"/>
-          <p:cNvSpPr txBox="1"/>
-          <p:nvPr/>
-        </p:nvSpPr>
-        <p:spPr>
-          <a:xfrm>
-            <a:off x="722376" y="1847088"/>
-            <a:ext cx="5090007" cy="402336"/>
+              <a:t>プロジェクト責任者</a:t>
+            </a:r>
+          </a:p>
+        </p:txBody>
+      </p:sp>
+      <p:sp>
+        <p:nvSpPr>
+          <p:cNvPr id="17" name="TextBox 16"/>
+          <p:cNvSpPr txBox="1"/>
+          <p:nvPr/>
+        </p:nvSpPr>
+        <p:spPr>
+          <a:xfrm>
+            <a:off x="2136495" y="2157984"/>
+            <a:ext cx="3675887" cy="402336"/>
           </a:xfrm>
           <a:prstGeom prst="rect">
             <a:avLst/>
@@ -19111,21 +18330,21 @@
                 <a:ea typeface="Yu Gothic"/>
                 <a:cs typeface="Yu Gothic"/>
               </a:rPr>
-              <a:t>投資・優先度を決定</a:t>
-            </a:r>
-          </a:p>
-        </p:txBody>
-      </p:sp>
-      <p:sp>
-        <p:nvSpPr>
-          <p:cNvPr id="35" name="Rectangle 34"/>
+              <a:t>方針・予算を決定</a:t>
+            </a:r>
+          </a:p>
+        </p:txBody>
+      </p:sp>
+      <p:sp>
+        <p:nvSpPr>
+          <p:cNvPr id="18" name="Rectangle 17"/>
           <p:cNvSpPr/>
           <p:nvPr/>
         </p:nvSpPr>
         <p:spPr>
           <a:xfrm>
-            <a:off x="6251295" y="1517904"/>
-            <a:ext cx="5346039" cy="768096"/>
+            <a:off x="6251295" y="1828800"/>
+            <a:ext cx="3931920" cy="768096"/>
           </a:xfrm>
           <a:prstGeom prst="rect">
             <a:avLst/>
@@ -19164,14 +18383,14 @@
       </p:sp>
       <p:sp>
         <p:nvSpPr>
-          <p:cNvPr id="36" name="TextBox 35"/>
-          <p:cNvSpPr txBox="1"/>
-          <p:nvPr/>
-        </p:nvSpPr>
-        <p:spPr>
-          <a:xfrm>
-            <a:off x="6379311" y="1581912"/>
-            <a:ext cx="5090007" cy="228600"/>
+          <p:cNvPr id="19" name="TextBox 18"/>
+          <p:cNvSpPr txBox="1"/>
+          <p:nvPr/>
+        </p:nvSpPr>
+        <p:spPr>
+          <a:xfrm>
+            <a:off x="6379311" y="1892807"/>
+            <a:ext cx="3675887" cy="228600"/>
           </a:xfrm>
           <a:prstGeom prst="rect">
             <a:avLst/>
@@ -19198,21 +18417,21 @@
                 <a:ea typeface="Yu Gothic"/>
                 <a:cs typeface="Yu Gothic"/>
               </a:rPr>
-              <a:t>技術責任者</a:t>
-            </a:r>
-          </a:p>
-        </p:txBody>
-      </p:sp>
-      <p:sp>
-        <p:nvSpPr>
-          <p:cNvPr id="37" name="TextBox 36"/>
-          <p:cNvSpPr txBox="1"/>
-          <p:nvPr/>
-        </p:nvSpPr>
-        <p:spPr>
-          <a:xfrm>
-            <a:off x="6379311" y="1847088"/>
-            <a:ext cx="5090007" cy="402336"/>
+              <a:t>システム責任者</a:t>
+            </a:r>
+          </a:p>
+        </p:txBody>
+      </p:sp>
+      <p:sp>
+        <p:nvSpPr>
+          <p:cNvPr id="20" name="TextBox 19"/>
+          <p:cNvSpPr txBox="1"/>
+          <p:nvPr/>
+        </p:nvSpPr>
+        <p:spPr>
+          <a:xfrm>
+            <a:off x="6379311" y="2157984"/>
+            <a:ext cx="3675887" cy="402336"/>
           </a:xfrm>
           <a:prstGeom prst="rect">
             <a:avLst/>
@@ -19239,149 +18458,21 @@
                 <a:ea typeface="Yu Gothic"/>
                 <a:cs typeface="Yu Gothic"/>
               </a:rPr>
-              <a:t>技術方針・品質を決定</a:t>
-            </a:r>
-          </a:p>
-        </p:txBody>
-      </p:sp>
-      <p:sp>
-        <p:nvSpPr>
-          <p:cNvPr id="38" name="Rectangle 37"/>
+              <a:t>システム方針を決定</a:t>
+            </a:r>
+          </a:p>
+        </p:txBody>
+      </p:sp>
+      <p:sp>
+        <p:nvSpPr>
+          <p:cNvPr id="21" name="Rectangle 20"/>
           <p:cNvSpPr/>
           <p:nvPr/>
         </p:nvSpPr>
         <p:spPr>
           <a:xfrm>
-            <a:off x="594360" y="2596896"/>
-            <a:ext cx="3362858" cy="768096"/>
-          </a:xfrm>
-          <a:prstGeom prst="rect">
-            <a:avLst/>
-          </a:prstGeom>
-          <a:solidFill>
-            <a:srgbClr val="ECEAE4"/>
-          </a:solidFill>
-          <a:ln w="9525">
-            <a:solidFill>
-              <a:srgbClr val="D1CFC8"/>
-            </a:solidFill>
-          </a:ln>
-          <a:effectLst/>
-        </p:spPr>
-        <p:style>
-          <a:lnRef idx="1">
-            <a:schemeClr val="accent1"/>
-          </a:lnRef>
-          <a:fillRef idx="3">
-            <a:schemeClr val="accent1"/>
-          </a:fillRef>
-          <a:effectRef idx="2">
-            <a:schemeClr val="accent1"/>
-          </a:effectRef>
-          <a:fontRef idx="minor">
-            <a:schemeClr val="lt1"/>
-          </a:fontRef>
-        </p:style>
-        <p:txBody>
-          <a:bodyPr rtlCol="0" anchor="ctr"/>
-          <a:lstStyle/>
-          <a:p>
-            <a:pPr algn="ctr"/>
-          </a:p>
-        </p:txBody>
-      </p:sp>
-      <p:sp>
-        <p:nvSpPr>
-          <p:cNvPr id="39" name="TextBox 38"/>
-          <p:cNvSpPr txBox="1"/>
-          <p:nvPr/>
-        </p:nvSpPr>
-        <p:spPr>
-          <a:xfrm>
-            <a:off x="722376" y="2660903"/>
-            <a:ext cx="3106826" cy="228600"/>
-          </a:xfrm>
-          <a:prstGeom prst="rect">
-            <a:avLst/>
-          </a:prstGeom>
-          <a:noFill/>
-        </p:spPr>
-        <p:txBody>
-          <a:bodyPr wrap="square" anchor="t" lIns="0" rIns="0" tIns="0" bIns="0">
-            <a:spAutoFit/>
-          </a:bodyPr>
-          <a:lstStyle/>
-          <a:p>
-            <a:pPr algn="ctr">
-              <a:lnSpc>
-                <a:spcPct val="105000"/>
-              </a:lnSpc>
-            </a:pPr>
-            <a:r>
-              <a:rPr sz="1250" b="1" lang="ja-JP">
-                <a:solidFill>
-                  <a:srgbClr val="182C43"/>
-                </a:solidFill>
-                <a:latin typeface="Yu Gothic"/>
-                <a:ea typeface="Yu Gothic"/>
-                <a:cs typeface="Yu Gothic"/>
-              </a:rPr>
-              <a:t>外部アドバイザー</a:t>
-            </a:r>
-          </a:p>
-        </p:txBody>
-      </p:sp>
-      <p:sp>
-        <p:nvSpPr>
-          <p:cNvPr id="40" name="TextBox 39"/>
-          <p:cNvSpPr txBox="1"/>
-          <p:nvPr/>
-        </p:nvSpPr>
-        <p:spPr>
-          <a:xfrm>
-            <a:off x="722376" y="2926079"/>
-            <a:ext cx="3106826" cy="402336"/>
-          </a:xfrm>
-          <a:prstGeom prst="rect">
-            <a:avLst/>
-          </a:prstGeom>
-          <a:noFill/>
-        </p:spPr>
-        <p:txBody>
-          <a:bodyPr wrap="square" anchor="ctr" lIns="0" rIns="0" tIns="0" bIns="0">
-            <a:spAutoFit/>
-          </a:bodyPr>
-          <a:lstStyle/>
-          <a:p>
-            <a:pPr algn="ctr">
-              <a:lnSpc>
-                <a:spcPct val="105000"/>
-              </a:lnSpc>
-            </a:pPr>
-            <a:r>
-              <a:rPr sz="950" b="0" lang="ja-JP">
-                <a:solidFill>
-                  <a:srgbClr val="666E70"/>
-                </a:solidFill>
-                <a:latin typeface="Yu Gothic"/>
-                <a:ea typeface="Yu Gothic"/>
-                <a:cs typeface="Yu Gothic"/>
-              </a:rPr>
-              <a:t>専門知見を提供</a:t>
-            </a:r>
-          </a:p>
-        </p:txBody>
-      </p:sp>
-      <p:sp>
-        <p:nvSpPr>
-          <p:cNvPr id="41" name="Rectangle 40"/>
-          <p:cNvSpPr/>
-          <p:nvPr/>
-        </p:nvSpPr>
-        <p:spPr>
-          <a:xfrm>
-            <a:off x="4414418" y="2596896"/>
-            <a:ext cx="3362858" cy="768096"/>
+            <a:off x="4221327" y="3163824"/>
+            <a:ext cx="3749039" cy="768096"/>
           </a:xfrm>
           <a:prstGeom prst="rect">
             <a:avLst/>
@@ -19420,14 +18511,14 @@
       </p:sp>
       <p:sp>
         <p:nvSpPr>
-          <p:cNvPr id="42" name="TextBox 41"/>
-          <p:cNvSpPr txBox="1"/>
-          <p:nvPr/>
-        </p:nvSpPr>
-        <p:spPr>
-          <a:xfrm>
-            <a:off x="4542434" y="2660903"/>
-            <a:ext cx="3106826" cy="228600"/>
+          <p:cNvPr id="22" name="TextBox 21"/>
+          <p:cNvSpPr txBox="1"/>
+          <p:nvPr/>
+        </p:nvSpPr>
+        <p:spPr>
+          <a:xfrm>
+            <a:off x="4349343" y="3227832"/>
+            <a:ext cx="3493007" cy="228600"/>
           </a:xfrm>
           <a:prstGeom prst="rect">
             <a:avLst/>
@@ -19454,21 +18545,21 @@
                 <a:ea typeface="Yu Gothic"/>
                 <a:cs typeface="Yu Gothic"/>
               </a:rPr>
-              <a:t>プログラムPM</a:t>
-            </a:r>
-          </a:p>
-        </p:txBody>
-      </p:sp>
-      <p:sp>
-        <p:nvSpPr>
-          <p:cNvPr id="43" name="TextBox 42"/>
-          <p:cNvSpPr txBox="1"/>
-          <p:nvPr/>
-        </p:nvSpPr>
-        <p:spPr>
-          <a:xfrm>
-            <a:off x="4542434" y="2926079"/>
-            <a:ext cx="3106826" cy="402336"/>
+              <a:t>プロジェクトマネージャー</a:t>
+            </a:r>
+          </a:p>
+        </p:txBody>
+      </p:sp>
+      <p:sp>
+        <p:nvSpPr>
+          <p:cNvPr id="23" name="TextBox 22"/>
+          <p:cNvSpPr txBox="1"/>
+          <p:nvPr/>
+        </p:nvSpPr>
+        <p:spPr>
+          <a:xfrm>
+            <a:off x="4349343" y="3493008"/>
+            <a:ext cx="3493007" cy="402336"/>
           </a:xfrm>
           <a:prstGeom prst="rect">
             <a:avLst/>
@@ -19495,149 +18586,21 @@
                 <a:ea typeface="Yu Gothic"/>
                 <a:cs typeface="Yu Gothic"/>
               </a:rPr>
-              <a:t>全体計画と課題を統括</a:t>
-            </a:r>
-          </a:p>
-        </p:txBody>
-      </p:sp>
-      <p:sp>
-        <p:nvSpPr>
-          <p:cNvPr id="44" name="Rectangle 43"/>
+              <a:t>計画・課題・品質を統括</a:t>
+            </a:r>
+          </a:p>
+        </p:txBody>
+      </p:sp>
+      <p:sp>
+        <p:nvSpPr>
+          <p:cNvPr id="24" name="Rectangle 23"/>
           <p:cNvSpPr/>
           <p:nvPr/>
         </p:nvSpPr>
         <p:spPr>
           <a:xfrm>
-            <a:off x="8234476" y="2596896"/>
-            <a:ext cx="3362858" cy="768096"/>
-          </a:xfrm>
-          <a:prstGeom prst="rect">
-            <a:avLst/>
-          </a:prstGeom>
-          <a:solidFill>
-            <a:srgbClr val="FFFFFC"/>
-          </a:solidFill>
-          <a:ln w="9525">
-            <a:solidFill>
-              <a:srgbClr val="0D7870"/>
-            </a:solidFill>
-          </a:ln>
-          <a:effectLst/>
-        </p:spPr>
-        <p:style>
-          <a:lnRef idx="1">
-            <a:schemeClr val="accent1"/>
-          </a:lnRef>
-          <a:fillRef idx="3">
-            <a:schemeClr val="accent1"/>
-          </a:fillRef>
-          <a:effectRef idx="2">
-            <a:schemeClr val="accent1"/>
-          </a:effectRef>
-          <a:fontRef idx="minor">
-            <a:schemeClr val="lt1"/>
-          </a:fontRef>
-        </p:style>
-        <p:txBody>
-          <a:bodyPr rtlCol="0" anchor="ctr"/>
-          <a:lstStyle/>
-          <a:p>
-            <a:pPr algn="ctr"/>
-          </a:p>
-        </p:txBody>
-      </p:sp>
-      <p:sp>
-        <p:nvSpPr>
-          <p:cNvPr id="45" name="TextBox 44"/>
-          <p:cNvSpPr txBox="1"/>
-          <p:nvPr/>
-        </p:nvSpPr>
-        <p:spPr>
-          <a:xfrm>
-            <a:off x="8362492" y="2660903"/>
-            <a:ext cx="3106826" cy="228600"/>
-          </a:xfrm>
-          <a:prstGeom prst="rect">
-            <a:avLst/>
-          </a:prstGeom>
-          <a:noFill/>
-        </p:spPr>
-        <p:txBody>
-          <a:bodyPr wrap="square" anchor="t" lIns="0" rIns="0" tIns="0" bIns="0">
-            <a:spAutoFit/>
-          </a:bodyPr>
-          <a:lstStyle/>
-          <a:p>
-            <a:pPr algn="ctr">
-              <a:lnSpc>
-                <a:spcPct val="105000"/>
-              </a:lnSpc>
-            </a:pPr>
-            <a:r>
-              <a:rPr sz="1250" b="1" lang="ja-JP">
-                <a:solidFill>
-                  <a:srgbClr val="182C43"/>
-                </a:solidFill>
-                <a:latin typeface="Yu Gothic"/>
-                <a:ea typeface="Yu Gothic"/>
-                <a:cs typeface="Yu Gothic"/>
-              </a:rPr>
-              <a:t>アーキテクト</a:t>
-            </a:r>
-          </a:p>
-        </p:txBody>
-      </p:sp>
-      <p:sp>
-        <p:nvSpPr>
-          <p:cNvPr id="46" name="TextBox 45"/>
-          <p:cNvSpPr txBox="1"/>
-          <p:nvPr/>
-        </p:nvSpPr>
-        <p:spPr>
-          <a:xfrm>
-            <a:off x="8362492" y="2926079"/>
-            <a:ext cx="3106826" cy="402336"/>
-          </a:xfrm>
-          <a:prstGeom prst="rect">
-            <a:avLst/>
-          </a:prstGeom>
-          <a:noFill/>
-        </p:spPr>
-        <p:txBody>
-          <a:bodyPr wrap="square" anchor="ctr" lIns="0" rIns="0" tIns="0" bIns="0">
-            <a:spAutoFit/>
-          </a:bodyPr>
-          <a:lstStyle/>
-          <a:p>
-            <a:pPr algn="ctr">
-              <a:lnSpc>
-                <a:spcPct val="105000"/>
-              </a:lnSpc>
-            </a:pPr>
-            <a:r>
-              <a:rPr sz="950" b="0" lang="ja-JP">
-                <a:solidFill>
-                  <a:srgbClr val="666E70"/>
-                </a:solidFill>
-                <a:latin typeface="Yu Gothic"/>
-                <a:ea typeface="Yu Gothic"/>
-                <a:cs typeface="Yu Gothic"/>
-              </a:rPr>
-              <a:t>方式・非機能を統括</a:t>
-            </a:r>
-          </a:p>
-        </p:txBody>
-      </p:sp>
-      <p:sp>
-        <p:nvSpPr>
-          <p:cNvPr id="47" name="Rectangle 46"/>
-          <p:cNvSpPr/>
-          <p:nvPr/>
-        </p:nvSpPr>
-        <p:spPr>
-          <a:xfrm>
-            <a:off x="594360" y="3675887"/>
-            <a:ext cx="3460394" cy="1152144"/>
+            <a:off x="594360" y="4498848"/>
+            <a:ext cx="2517571" cy="768096"/>
           </a:xfrm>
           <a:prstGeom prst="rect">
             <a:avLst/>
@@ -19676,14 +18639,14 @@
       </p:sp>
       <p:sp>
         <p:nvSpPr>
-          <p:cNvPr id="48" name="TextBox 47"/>
-          <p:cNvSpPr txBox="1"/>
-          <p:nvPr/>
-        </p:nvSpPr>
-        <p:spPr>
-          <a:xfrm>
-            <a:off x="722376" y="3739896"/>
-            <a:ext cx="3204362" cy="228600"/>
+          <p:cNvPr id="25" name="TextBox 24"/>
+          <p:cNvSpPr txBox="1"/>
+          <p:nvPr/>
+        </p:nvSpPr>
+        <p:spPr>
+          <a:xfrm>
+            <a:off x="722376" y="4562856"/>
+            <a:ext cx="2261539" cy="228600"/>
           </a:xfrm>
           <a:prstGeom prst="rect">
             <a:avLst/>
@@ -19710,21 +18673,21 @@
                 <a:ea typeface="Yu Gothic"/>
                 <a:cs typeface="Yu Gothic"/>
               </a:rPr>
-              <a:t>業務設計</a:t>
-            </a:r>
-          </a:p>
-        </p:txBody>
-      </p:sp>
-      <p:sp>
-        <p:nvSpPr>
-          <p:cNvPr id="49" name="TextBox 48"/>
-          <p:cNvSpPr txBox="1"/>
-          <p:nvPr/>
-        </p:nvSpPr>
-        <p:spPr>
-          <a:xfrm>
-            <a:off x="722376" y="4005072"/>
-            <a:ext cx="3204362" cy="448055"/>
+              <a:t>業務チーム</a:t>
+            </a:r>
+          </a:p>
+        </p:txBody>
+      </p:sp>
+      <p:sp>
+        <p:nvSpPr>
+          <p:cNvPr id="26" name="TextBox 25"/>
+          <p:cNvSpPr txBox="1"/>
+          <p:nvPr/>
+        </p:nvSpPr>
+        <p:spPr>
+          <a:xfrm>
+            <a:off x="722376" y="4828032"/>
+            <a:ext cx="2261539" cy="402335"/>
           </a:xfrm>
           <a:prstGeom prst="rect">
             <a:avLst/>
@@ -19751,106 +18714,21 @@
                 <a:ea typeface="Yu Gothic"/>
                 <a:cs typeface="Yu Gothic"/>
               </a:rPr>
-              <a:t>要件・運用設計</a:t>
-            </a:r>
-          </a:p>
-        </p:txBody>
-      </p:sp>
-      <p:sp>
-        <p:nvSpPr>
-          <p:cNvPr id="50" name="Rectangle 49"/>
+              <a:t>業務要件・受入を担当</a:t>
+            </a:r>
+          </a:p>
+        </p:txBody>
+      </p:sp>
+      <p:sp>
+        <p:nvSpPr>
+          <p:cNvPr id="27" name="Rectangle 26"/>
           <p:cNvSpPr/>
           <p:nvPr/>
         </p:nvSpPr>
         <p:spPr>
           <a:xfrm>
-            <a:off x="740664" y="4489703"/>
-            <a:ext cx="3167786" cy="9144"/>
-          </a:xfrm>
-          <a:prstGeom prst="rect">
-            <a:avLst/>
-          </a:prstGeom>
-          <a:solidFill>
-            <a:srgbClr val="D1CFC8"/>
-          </a:solidFill>
-          <a:ln>
-            <a:noFill/>
-          </a:ln>
-          <a:effectLst/>
-        </p:spPr>
-        <p:style>
-          <a:lnRef idx="1">
-            <a:schemeClr val="accent1"/>
-          </a:lnRef>
-          <a:fillRef idx="3">
-            <a:schemeClr val="accent1"/>
-          </a:fillRef>
-          <a:effectRef idx="2">
-            <a:schemeClr val="accent1"/>
-          </a:effectRef>
-          <a:fontRef idx="minor">
-            <a:schemeClr val="lt1"/>
-          </a:fontRef>
-        </p:style>
-        <p:txBody>
-          <a:bodyPr rtlCol="0" anchor="ctr"/>
-          <a:lstStyle/>
-          <a:p>
-            <a:pPr algn="ctr"/>
-          </a:p>
-        </p:txBody>
-      </p:sp>
-      <p:sp>
-        <p:nvSpPr>
-          <p:cNvPr id="51" name="TextBox 50"/>
-          <p:cNvSpPr txBox="1"/>
-          <p:nvPr/>
-        </p:nvSpPr>
-        <p:spPr>
-          <a:xfrm>
-            <a:off x="731520" y="4553712"/>
-            <a:ext cx="3186074" cy="219456"/>
-          </a:xfrm>
-          <a:prstGeom prst="rect">
-            <a:avLst/>
-          </a:prstGeom>
-          <a:noFill/>
-        </p:spPr>
-        <p:txBody>
-          <a:bodyPr wrap="square" anchor="ctr" lIns="0" rIns="0" tIns="0" bIns="0">
-            <a:spAutoFit/>
-          </a:bodyPr>
-          <a:lstStyle/>
-          <a:p>
-            <a:pPr algn="ctr">
-              <a:lnSpc>
-                <a:spcPct val="105000"/>
-              </a:lnSpc>
-            </a:pPr>
-            <a:r>
-              <a:rPr sz="950" b="0" lang="ja-JP">
-                <a:solidFill>
-                  <a:srgbClr val="202729"/>
-                </a:solidFill>
-                <a:latin typeface="Yu Gothic"/>
-                <a:ea typeface="Yu Gothic"/>
-                <a:cs typeface="Yu Gothic"/>
-              </a:rPr>
-              <a:t>企画 / 現場代表</a:t>
-            </a:r>
-          </a:p>
-        </p:txBody>
-      </p:sp>
-      <p:sp>
-        <p:nvSpPr>
-          <p:cNvPr id="52" name="Rectangle 51"/>
-          <p:cNvSpPr/>
-          <p:nvPr/>
-        </p:nvSpPr>
-        <p:spPr>
-          <a:xfrm>
-            <a:off x="4365650" y="3675887"/>
-            <a:ext cx="3460394" cy="1152144"/>
+            <a:off x="3422827" y="4498848"/>
+            <a:ext cx="2517571" cy="768096"/>
           </a:xfrm>
           <a:prstGeom prst="rect">
             <a:avLst/>
@@ -19889,14 +18767,14 @@
       </p:sp>
       <p:sp>
         <p:nvSpPr>
-          <p:cNvPr id="53" name="TextBox 52"/>
-          <p:cNvSpPr txBox="1"/>
-          <p:nvPr/>
-        </p:nvSpPr>
-        <p:spPr>
-          <a:xfrm>
-            <a:off x="4493666" y="3739896"/>
-            <a:ext cx="3204362" cy="228600"/>
+          <p:cNvPr id="28" name="TextBox 27"/>
+          <p:cNvSpPr txBox="1"/>
+          <p:nvPr/>
+        </p:nvSpPr>
+        <p:spPr>
+          <a:xfrm>
+            <a:off x="3550843" y="4562856"/>
+            <a:ext cx="2261539" cy="228600"/>
           </a:xfrm>
           <a:prstGeom prst="rect">
             <a:avLst/>
@@ -19923,21 +18801,21 @@
                 <a:ea typeface="Yu Gothic"/>
                 <a:cs typeface="Yu Gothic"/>
               </a:rPr>
-              <a:t>開発</a:t>
-            </a:r>
-          </a:p>
-        </p:txBody>
-      </p:sp>
-      <p:sp>
-        <p:nvSpPr>
-          <p:cNvPr id="54" name="TextBox 53"/>
-          <p:cNvSpPr txBox="1"/>
-          <p:nvPr/>
-        </p:nvSpPr>
-        <p:spPr>
-          <a:xfrm>
-            <a:off x="4493666" y="4005072"/>
-            <a:ext cx="3204362" cy="448055"/>
+              <a:t>開発チーム</a:t>
+            </a:r>
+          </a:p>
+        </p:txBody>
+      </p:sp>
+      <p:sp>
+        <p:nvSpPr>
+          <p:cNvPr id="29" name="TextBox 28"/>
+          <p:cNvSpPr txBox="1"/>
+          <p:nvPr/>
+        </p:nvSpPr>
+        <p:spPr>
+          <a:xfrm>
+            <a:off x="3550843" y="4828032"/>
+            <a:ext cx="2261539" cy="402335"/>
           </a:xfrm>
           <a:prstGeom prst="rect">
             <a:avLst/>
@@ -19964,106 +18842,21 @@
                 <a:ea typeface="Yu Gothic"/>
                 <a:cs typeface="Yu Gothic"/>
               </a:rPr>
-              <a:t>実装・試験</a:t>
-            </a:r>
-          </a:p>
-        </p:txBody>
-      </p:sp>
-      <p:sp>
-        <p:nvSpPr>
-          <p:cNvPr id="55" name="Rectangle 54"/>
+              <a:t>設計・開発・試験を担当</a:t>
+            </a:r>
+          </a:p>
+        </p:txBody>
+      </p:sp>
+      <p:sp>
+        <p:nvSpPr>
+          <p:cNvPr id="30" name="Rectangle 29"/>
           <p:cNvSpPr/>
           <p:nvPr/>
         </p:nvSpPr>
         <p:spPr>
           <a:xfrm>
-            <a:off x="4511954" y="4489703"/>
-            <a:ext cx="3167786" cy="9144"/>
-          </a:xfrm>
-          <a:prstGeom prst="rect">
-            <a:avLst/>
-          </a:prstGeom>
-          <a:solidFill>
-            <a:srgbClr val="D1CFC8"/>
-          </a:solidFill>
-          <a:ln>
-            <a:noFill/>
-          </a:ln>
-          <a:effectLst/>
-        </p:spPr>
-        <p:style>
-          <a:lnRef idx="1">
-            <a:schemeClr val="accent1"/>
-          </a:lnRef>
-          <a:fillRef idx="3">
-            <a:schemeClr val="accent1"/>
-          </a:fillRef>
-          <a:effectRef idx="2">
-            <a:schemeClr val="accent1"/>
-          </a:effectRef>
-          <a:fontRef idx="minor">
-            <a:schemeClr val="lt1"/>
-          </a:fontRef>
-        </p:style>
-        <p:txBody>
-          <a:bodyPr rtlCol="0" anchor="ctr"/>
-          <a:lstStyle/>
-          <a:p>
-            <a:pPr algn="ctr"/>
-          </a:p>
-        </p:txBody>
-      </p:sp>
-      <p:sp>
-        <p:nvSpPr>
-          <p:cNvPr id="56" name="TextBox 55"/>
-          <p:cNvSpPr txBox="1"/>
-          <p:nvPr/>
-        </p:nvSpPr>
-        <p:spPr>
-          <a:xfrm>
-            <a:off x="4502810" y="4553712"/>
-            <a:ext cx="3186074" cy="219456"/>
-          </a:xfrm>
-          <a:prstGeom prst="rect">
-            <a:avLst/>
-          </a:prstGeom>
-          <a:noFill/>
-        </p:spPr>
-        <p:txBody>
-          <a:bodyPr wrap="square" anchor="ctr" lIns="0" rIns="0" tIns="0" bIns="0">
-            <a:spAutoFit/>
-          </a:bodyPr>
-          <a:lstStyle/>
-          <a:p>
-            <a:pPr algn="ctr">
-              <a:lnSpc>
-                <a:spcPct val="105000"/>
-              </a:lnSpc>
-            </a:pPr>
-            <a:r>
-              <a:rPr sz="950" b="0" lang="ja-JP">
-                <a:solidFill>
-                  <a:srgbClr val="202729"/>
-                </a:solidFill>
-                <a:latin typeface="Yu Gothic"/>
-                <a:ea typeface="Yu Gothic"/>
-                <a:cs typeface="Yu Gothic"/>
-              </a:rPr>
-              <a:t>アプリ / 基盤 / QA</a:t>
-            </a:r>
-          </a:p>
-        </p:txBody>
-      </p:sp>
-      <p:sp>
-        <p:nvSpPr>
-          <p:cNvPr id="57" name="Rectangle 56"/>
-          <p:cNvSpPr/>
-          <p:nvPr/>
-        </p:nvSpPr>
-        <p:spPr>
-          <a:xfrm>
-            <a:off x="8136940" y="3675887"/>
-            <a:ext cx="3460394" cy="1152144"/>
+            <a:off x="6251295" y="4498848"/>
+            <a:ext cx="2517571" cy="768096"/>
           </a:xfrm>
           <a:prstGeom prst="rect">
             <a:avLst/>
@@ -20102,14 +18895,14 @@
       </p:sp>
       <p:sp>
         <p:nvSpPr>
-          <p:cNvPr id="58" name="TextBox 57"/>
-          <p:cNvSpPr txBox="1"/>
-          <p:nvPr/>
-        </p:nvSpPr>
-        <p:spPr>
-          <a:xfrm>
-            <a:off x="8264956" y="3739896"/>
-            <a:ext cx="3204362" cy="228600"/>
+          <p:cNvPr id="31" name="TextBox 30"/>
+          <p:cNvSpPr txBox="1"/>
+          <p:nvPr/>
+        </p:nvSpPr>
+        <p:spPr>
+          <a:xfrm>
+            <a:off x="6379311" y="4562856"/>
+            <a:ext cx="2261539" cy="228600"/>
           </a:xfrm>
           <a:prstGeom prst="rect">
             <a:avLst/>
@@ -20136,21 +18929,21 @@
                 <a:ea typeface="Yu Gothic"/>
                 <a:cs typeface="Yu Gothic"/>
               </a:rPr>
-              <a:t>展開</a:t>
-            </a:r>
-          </a:p>
-        </p:txBody>
-      </p:sp>
-      <p:sp>
-        <p:nvSpPr>
-          <p:cNvPr id="59" name="TextBox 58"/>
-          <p:cNvSpPr txBox="1"/>
-          <p:nvPr/>
-        </p:nvSpPr>
-        <p:spPr>
-          <a:xfrm>
-            <a:off x="8264956" y="4005072"/>
-            <a:ext cx="3204362" cy="448055"/>
+              <a:t>基盤チーム</a:t>
+            </a:r>
+          </a:p>
+        </p:txBody>
+      </p:sp>
+      <p:sp>
+        <p:nvSpPr>
+          <p:cNvPr id="32" name="TextBox 31"/>
+          <p:cNvSpPr txBox="1"/>
+          <p:nvPr/>
+        </p:nvSpPr>
+        <p:spPr>
+          <a:xfrm>
+            <a:off x="6379311" y="4828032"/>
+            <a:ext cx="2261539" cy="402335"/>
           </a:xfrm>
           <a:prstGeom prst="rect">
             <a:avLst/>
@@ -20177,106 +18970,21 @@
                 <a:ea typeface="Yu Gothic"/>
                 <a:cs typeface="Yu Gothic"/>
               </a:rPr>
-              <a:t>教育・移行</a:t>
-            </a:r>
-          </a:p>
-        </p:txBody>
-      </p:sp>
-      <p:sp>
-        <p:nvSpPr>
-          <p:cNvPr id="60" name="Rectangle 59"/>
+              <a:t>基盤・ネットワークを担当</a:t>
+            </a:r>
+          </a:p>
+        </p:txBody>
+      </p:sp>
+      <p:sp>
+        <p:nvSpPr>
+          <p:cNvPr id="33" name="Rectangle 32"/>
           <p:cNvSpPr/>
           <p:nvPr/>
         </p:nvSpPr>
         <p:spPr>
           <a:xfrm>
-            <a:off x="8283244" y="4489703"/>
-            <a:ext cx="3167786" cy="9144"/>
-          </a:xfrm>
-          <a:prstGeom prst="rect">
-            <a:avLst/>
-          </a:prstGeom>
-          <a:solidFill>
-            <a:srgbClr val="D1CFC8"/>
-          </a:solidFill>
-          <a:ln>
-            <a:noFill/>
-          </a:ln>
-          <a:effectLst/>
-        </p:spPr>
-        <p:style>
-          <a:lnRef idx="1">
-            <a:schemeClr val="accent1"/>
-          </a:lnRef>
-          <a:fillRef idx="3">
-            <a:schemeClr val="accent1"/>
-          </a:fillRef>
-          <a:effectRef idx="2">
-            <a:schemeClr val="accent1"/>
-          </a:effectRef>
-          <a:fontRef idx="minor">
-            <a:schemeClr val="lt1"/>
-          </a:fontRef>
-        </p:style>
-        <p:txBody>
-          <a:bodyPr rtlCol="0" anchor="ctr"/>
-          <a:lstStyle/>
-          <a:p>
-            <a:pPr algn="ctr"/>
-          </a:p>
-        </p:txBody>
-      </p:sp>
-      <p:sp>
-        <p:nvSpPr>
-          <p:cNvPr id="61" name="TextBox 60"/>
-          <p:cNvSpPr txBox="1"/>
-          <p:nvPr/>
-        </p:nvSpPr>
-        <p:spPr>
-          <a:xfrm>
-            <a:off x="8274100" y="4553712"/>
-            <a:ext cx="3186074" cy="219456"/>
-          </a:xfrm>
-          <a:prstGeom prst="rect">
-            <a:avLst/>
-          </a:prstGeom>
-          <a:noFill/>
-        </p:spPr>
-        <p:txBody>
-          <a:bodyPr wrap="square" anchor="ctr" lIns="0" rIns="0" tIns="0" bIns="0">
-            <a:spAutoFit/>
-          </a:bodyPr>
-          <a:lstStyle/>
-          <a:p>
-            <a:pPr algn="ctr">
-              <a:lnSpc>
-                <a:spcPct val="105000"/>
-              </a:lnSpc>
-            </a:pPr>
-            <a:r>
-              <a:rPr sz="950" b="0" lang="ja-JP">
-                <a:solidFill>
-                  <a:srgbClr val="202729"/>
-                </a:solidFill>
-                <a:latin typeface="Yu Gothic"/>
-                <a:ea typeface="Yu Gothic"/>
-                <a:cs typeface="Yu Gothic"/>
-              </a:rPr>
-              <a:t>PMO / 部門窓口</a:t>
-            </a:r>
-          </a:p>
-        </p:txBody>
-      </p:sp>
-      <p:sp>
-        <p:nvSpPr>
-          <p:cNvPr id="62" name="Rectangle 61"/>
-          <p:cNvSpPr/>
-          <p:nvPr/>
-        </p:nvSpPr>
-        <p:spPr>
-          <a:xfrm>
-            <a:off x="594360" y="5138927"/>
-            <a:ext cx="5227167" cy="768096"/>
+            <a:off x="9079763" y="4498848"/>
+            <a:ext cx="2517571" cy="768096"/>
           </a:xfrm>
           <a:prstGeom prst="rect">
             <a:avLst/>
@@ -20315,14 +19023,14 @@
       </p:sp>
       <p:sp>
         <p:nvSpPr>
-          <p:cNvPr id="63" name="TextBox 62"/>
-          <p:cNvSpPr txBox="1"/>
-          <p:nvPr/>
-        </p:nvSpPr>
-        <p:spPr>
-          <a:xfrm>
-            <a:off x="722376" y="5202936"/>
-            <a:ext cx="4971135" cy="228600"/>
+          <p:cNvPr id="34" name="TextBox 33"/>
+          <p:cNvSpPr txBox="1"/>
+          <p:nvPr/>
+        </p:nvSpPr>
+        <p:spPr>
+          <a:xfrm>
+            <a:off x="9207779" y="4562856"/>
+            <a:ext cx="2261539" cy="228600"/>
           </a:xfrm>
           <a:prstGeom prst="rect">
             <a:avLst/>
@@ -20349,21 +19057,21 @@
                 <a:ea typeface="Yu Gothic"/>
                 <a:cs typeface="Yu Gothic"/>
               </a:rPr>
-              <a:t>運用</a:t>
-            </a:r>
-          </a:p>
-        </p:txBody>
-      </p:sp>
-      <p:sp>
-        <p:nvSpPr>
-          <p:cNvPr id="64" name="TextBox 63"/>
-          <p:cNvSpPr txBox="1"/>
-          <p:nvPr/>
-        </p:nvSpPr>
-        <p:spPr>
-          <a:xfrm>
-            <a:off x="722376" y="5468112"/>
-            <a:ext cx="4971135" cy="402335"/>
+              <a:t>移行・運用チーム</a:t>
+            </a:r>
+          </a:p>
+        </p:txBody>
+      </p:sp>
+      <p:sp>
+        <p:nvSpPr>
+          <p:cNvPr id="35" name="TextBox 34"/>
+          <p:cNvSpPr txBox="1"/>
+          <p:nvPr/>
+        </p:nvSpPr>
+        <p:spPr>
+          <a:xfrm>
+            <a:off x="9207779" y="4828032"/>
+            <a:ext cx="2261539" cy="402335"/>
           </a:xfrm>
           <a:prstGeom prst="rect">
             <a:avLst/>
@@ -20390,342 +19098,14 @@
                 <a:ea typeface="Yu Gothic"/>
                 <a:cs typeface="Yu Gothic"/>
               </a:rPr>
-              <a:t>監視・改善</a:t>
-            </a:r>
-          </a:p>
-        </p:txBody>
-      </p:sp>
-      <p:sp>
-        <p:nvSpPr>
-          <p:cNvPr id="65" name="Rectangle 64"/>
-          <p:cNvSpPr/>
-          <p:nvPr/>
-        </p:nvSpPr>
-        <p:spPr>
-          <a:xfrm>
-            <a:off x="6370167" y="5138927"/>
-            <a:ext cx="5227167" cy="768096"/>
-          </a:xfrm>
-          <a:prstGeom prst="rect">
-            <a:avLst/>
-          </a:prstGeom>
-          <a:solidFill>
-            <a:srgbClr val="FFFFFC"/>
-          </a:solidFill>
-          <a:ln w="9525">
-            <a:solidFill>
-              <a:srgbClr val="D1CFC8"/>
-            </a:solidFill>
-          </a:ln>
-          <a:effectLst/>
-        </p:spPr>
-        <p:style>
-          <a:lnRef idx="1">
-            <a:schemeClr val="accent1"/>
-          </a:lnRef>
-          <a:fillRef idx="3">
-            <a:schemeClr val="accent1"/>
-          </a:fillRef>
-          <a:effectRef idx="2">
-            <a:schemeClr val="accent1"/>
-          </a:effectRef>
-          <a:fontRef idx="minor">
-            <a:schemeClr val="lt1"/>
-          </a:fontRef>
-        </p:style>
-        <p:txBody>
-          <a:bodyPr rtlCol="0" anchor="ctr"/>
-          <a:lstStyle/>
-          <a:p>
-            <a:pPr algn="ctr"/>
-          </a:p>
-        </p:txBody>
-      </p:sp>
-      <p:sp>
-        <p:nvSpPr>
-          <p:cNvPr id="66" name="TextBox 65"/>
-          <p:cNvSpPr txBox="1"/>
-          <p:nvPr/>
-        </p:nvSpPr>
-        <p:spPr>
-          <a:xfrm>
-            <a:off x="6498183" y="5202936"/>
-            <a:ext cx="4971135" cy="228600"/>
-          </a:xfrm>
-          <a:prstGeom prst="rect">
-            <a:avLst/>
-          </a:prstGeom>
-          <a:noFill/>
-        </p:spPr>
-        <p:txBody>
-          <a:bodyPr wrap="square" anchor="t" lIns="0" rIns="0" tIns="0" bIns="0">
-            <a:spAutoFit/>
-          </a:bodyPr>
-          <a:lstStyle/>
-          <a:p>
-            <a:pPr algn="ctr">
-              <a:lnSpc>
-                <a:spcPct val="105000"/>
-              </a:lnSpc>
-            </a:pPr>
-            <a:r>
-              <a:rPr sz="1250" b="1" lang="ja-JP">
-                <a:solidFill>
-                  <a:srgbClr val="182C43"/>
-                </a:solidFill>
-                <a:latin typeface="Yu Gothic"/>
-                <a:ea typeface="Yu Gothic"/>
-                <a:cs typeface="Yu Gothic"/>
-              </a:rPr>
-              <a:t>セキュリティ</a:t>
-            </a:r>
-          </a:p>
-        </p:txBody>
-      </p:sp>
-      <p:sp>
-        <p:nvSpPr>
-          <p:cNvPr id="67" name="TextBox 66"/>
-          <p:cNvSpPr txBox="1"/>
-          <p:nvPr/>
-        </p:nvSpPr>
-        <p:spPr>
-          <a:xfrm>
-            <a:off x="6498183" y="5468112"/>
-            <a:ext cx="4971135" cy="402335"/>
-          </a:xfrm>
-          <a:prstGeom prst="rect">
-            <a:avLst/>
-          </a:prstGeom>
-          <a:noFill/>
-        </p:spPr>
-        <p:txBody>
-          <a:bodyPr wrap="square" anchor="ctr" lIns="0" rIns="0" tIns="0" bIns="0">
-            <a:spAutoFit/>
-          </a:bodyPr>
-          <a:lstStyle/>
-          <a:p>
-            <a:pPr algn="ctr">
-              <a:lnSpc>
-                <a:spcPct val="105000"/>
-              </a:lnSpc>
-            </a:pPr>
-            <a:r>
-              <a:rPr sz="950" b="0" lang="ja-JP">
-                <a:solidFill>
-                  <a:srgbClr val="666E70"/>
-                </a:solidFill>
-                <a:latin typeface="Yu Gothic"/>
-                <a:ea typeface="Yu Gothic"/>
-                <a:cs typeface="Yu Gothic"/>
-              </a:rPr>
-              <a:t>審査・監査</a:t>
-            </a:r>
-          </a:p>
-        </p:txBody>
-      </p:sp>
-      <p:cxnSp>
-        <p:nvCxnSpPr>
-          <p:cNvPr id="68" name="Connector 67"/>
-          <p:cNvCxnSpPr/>
-          <p:nvPr/>
-        </p:nvCxnSpPr>
-        <p:spPr>
-          <a:xfrm>
-            <a:off x="4012082" y="2980944"/>
-            <a:ext cx="347472" cy="0"/>
-          </a:xfrm>
-          <a:prstGeom prst="line">
-            <a:avLst/>
-          </a:prstGeom>
-          <a:ln w="15875">
-            <a:prstDash val="dash"/>
-            <a:solidFill>
-              <a:srgbClr val="6C7372"/>
-            </a:solidFill>
-            <a:tailEnd type="triangle" w="med" len="med"/>
-          </a:ln>
-          <a:effectLst/>
-        </p:spPr>
-        <p:style>
-          <a:lnRef idx="2">
-            <a:schemeClr val="accent1"/>
-          </a:lnRef>
-          <a:fillRef idx="0">
-            <a:schemeClr val="accent1"/>
-          </a:fillRef>
-          <a:effectRef idx="1">
-            <a:schemeClr val="accent1"/>
-          </a:effectRef>
-          <a:fontRef idx="minor">
-            <a:schemeClr val="tx1"/>
-          </a:fontRef>
-        </p:style>
-      </p:cxnSp>
-      <p:cxnSp>
-        <p:nvCxnSpPr>
-          <p:cNvPr id="69" name="Connector 68"/>
-          <p:cNvCxnSpPr/>
-          <p:nvPr/>
-        </p:nvCxnSpPr>
-        <p:spPr>
-          <a:xfrm flipH="1">
-            <a:off x="5876391" y="5522975"/>
-            <a:ext cx="219456" cy="0"/>
-          </a:xfrm>
-          <a:prstGeom prst="line">
-            <a:avLst/>
-          </a:prstGeom>
-          <a:ln w="15875">
-            <a:prstDash val="dash"/>
-            <a:solidFill>
-              <a:srgbClr val="6C7372"/>
-            </a:solidFill>
-            <a:tailEnd type="triangle" w="med" len="med"/>
-          </a:ln>
-          <a:effectLst/>
-        </p:spPr>
-        <p:style>
-          <a:lnRef idx="2">
-            <a:schemeClr val="accent1"/>
-          </a:lnRef>
-          <a:fillRef idx="0">
-            <a:schemeClr val="accent1"/>
-          </a:fillRef>
-          <a:effectRef idx="1">
-            <a:schemeClr val="accent1"/>
-          </a:effectRef>
-          <a:fontRef idx="minor">
-            <a:schemeClr val="tx1"/>
-          </a:fontRef>
-        </p:style>
-      </p:cxnSp>
-      <p:cxnSp>
-        <p:nvCxnSpPr>
-          <p:cNvPr id="70" name="Connector 69"/>
-          <p:cNvCxnSpPr/>
-          <p:nvPr/>
-        </p:nvCxnSpPr>
-        <p:spPr>
-          <a:xfrm>
-            <a:off x="6095847" y="5522975"/>
-            <a:ext cx="219456" cy="0"/>
-          </a:xfrm>
-          <a:prstGeom prst="line">
-            <a:avLst/>
-          </a:prstGeom>
-          <a:ln w="15875">
-            <a:prstDash val="dash"/>
-            <a:solidFill>
-              <a:srgbClr val="6C7372"/>
-            </a:solidFill>
-            <a:tailEnd type="triangle" w="med" len="med"/>
-          </a:ln>
-          <a:effectLst/>
-        </p:spPr>
-        <p:style>
-          <a:lnRef idx="2">
-            <a:schemeClr val="accent1"/>
-          </a:lnRef>
-          <a:fillRef idx="0">
-            <a:schemeClr val="accent1"/>
-          </a:fillRef>
-          <a:effectRef idx="1">
-            <a:schemeClr val="accent1"/>
-          </a:effectRef>
-          <a:fontRef idx="minor">
-            <a:schemeClr val="tx1"/>
-          </a:fontRef>
-        </p:style>
-      </p:cxnSp>
-      <p:sp>
-        <p:nvSpPr>
-          <p:cNvPr id="71" name="TextBox 70"/>
-          <p:cNvSpPr txBox="1"/>
-          <p:nvPr/>
-        </p:nvSpPr>
-        <p:spPr>
-          <a:xfrm>
-            <a:off x="4026941" y="2784411"/>
-            <a:ext cx="317754" cy="155321"/>
-          </a:xfrm>
-          <a:prstGeom prst="rect">
-            <a:avLst/>
-          </a:prstGeom>
-          <a:solidFill>
-            <a:srgbClr val="F7F5EF"/>
-          </a:solidFill>
-        </p:spPr>
-        <p:txBody>
-          <a:bodyPr wrap="square" anchor="ctr" lIns="0" rIns="0" tIns="0" bIns="0">
-            <a:spAutoFit/>
-          </a:bodyPr>
-          <a:lstStyle/>
-          <a:p>
-            <a:pPr algn="ctr">
-              <a:lnSpc>
-                <a:spcPct val="130000"/>
-              </a:lnSpc>
-            </a:pPr>
-            <a:r>
-              <a:rPr sz="850" b="0" lang="ja-JP">
-                <a:solidFill>
-                  <a:srgbClr val="202729"/>
-                </a:solidFill>
-                <a:latin typeface="Yu Gothic"/>
-                <a:ea typeface="Yu Gothic"/>
-                <a:cs typeface="Yu Gothic"/>
-              </a:rPr>
-              <a:t>助言</a:t>
-            </a:r>
-          </a:p>
-        </p:txBody>
-      </p:sp>
-      <p:sp>
-        <p:nvSpPr>
-          <p:cNvPr id="72" name="TextBox 71"/>
-          <p:cNvSpPr txBox="1"/>
-          <p:nvPr/>
-        </p:nvSpPr>
-        <p:spPr>
-          <a:xfrm>
-            <a:off x="5936970" y="5326443"/>
-            <a:ext cx="317754" cy="155321"/>
-          </a:xfrm>
-          <a:prstGeom prst="rect">
-            <a:avLst/>
-          </a:prstGeom>
-          <a:solidFill>
-            <a:srgbClr val="F7F5EF"/>
-          </a:solidFill>
-        </p:spPr>
-        <p:txBody>
-          <a:bodyPr wrap="square" anchor="ctr" lIns="0" rIns="0" tIns="0" bIns="0">
-            <a:spAutoFit/>
-          </a:bodyPr>
-          <a:lstStyle/>
-          <a:p>
-            <a:pPr algn="ctr">
-              <a:lnSpc>
-                <a:spcPct val="130000"/>
-              </a:lnSpc>
-            </a:pPr>
-            <a:r>
-              <a:rPr sz="850" b="0" lang="ja-JP">
-                <a:solidFill>
-                  <a:srgbClr val="202729"/>
-                </a:solidFill>
-                <a:latin typeface="Yu Gothic"/>
-                <a:ea typeface="Yu Gothic"/>
-                <a:cs typeface="Yu Gothic"/>
-              </a:rPr>
-              <a:t>連携</a:t>
-            </a:r>
-          </a:p>
-        </p:txBody>
-      </p:sp>
-      <p:sp>
-        <p:nvSpPr>
-          <p:cNvPr id="73" name="Rectangle 72"/>
+              <a:t>移行・運用設計を担当</a:t>
+            </a:r>
+          </a:p>
+        </p:txBody>
+      </p:sp>
+      <p:sp>
+        <p:nvSpPr>
+          <p:cNvPr id="36" name="Rectangle 35"/>
           <p:cNvSpPr/>
           <p:nvPr/>
         </p:nvSpPr>
@@ -20769,7 +19149,7 @@
       </p:sp>
       <p:sp>
         <p:nvSpPr>
-          <p:cNvPr id="74" name="TextBox 73"/>
+          <p:cNvPr id="37" name="TextBox 36"/>
           <p:cNvSpPr txBox="1"/>
           <p:nvPr/>
         </p:nvSpPr>
@@ -20810,7 +19190,7 @@
       </p:sp>
       <p:sp>
         <p:nvSpPr>
-          <p:cNvPr id="75" name="TextBox 74"/>
+          <p:cNvPr id="38" name="TextBox 37"/>
           <p:cNvSpPr txBox="1"/>
           <p:nvPr/>
         </p:nvSpPr>
@@ -20851,7 +19231,7 @@
       </p:sp>
       <p:sp>
         <p:nvSpPr>
-          <p:cNvPr id="76" name="TextBox 75"/>
+          <p:cNvPr id="39" name="TextBox 38"/>
           <p:cNvSpPr txBox="1"/>
           <p:nvPr/>
         </p:nvSpPr>
